--- a/soutenance/Soutenance-PFE-ETTAHIRI-Mouad.pptx
+++ b/soutenance/Soutenance-PFE-ETTAHIRI-Mouad.pptx
@@ -535,7 +535,7 @@
           </a:p>
           <a:p>
             <a:r>
-              <a:t>Bonjour. Je m'appelle Mouad Ettahiri. Je vous présente mon projet de fin d'études, soutenu le 14 septembre 2026, réalisé à l'EMSI Rabat, option MIAGE, au Ministère de l'Économie et des Finances, Direction des Affaires administratives et générales. Le thème est la dématérialisation de la gestion des candidatures aux concours : une application web pour importer les candidats, les répartir automatiquement dans les salles, puis générer et envoyer les convocations.</a:t>
+              <a:t>Bonjour. Je m'appelle Mouad Ettahiri. Je vous présente mon projet de fin d'études, soutenu le 14 septembre 2026, réalisé à l'EMSI Rabat, option MIAGE, au Ministère de l'Économie et des Finances, Direction des Affaires administratives et générales. Le titre officiel : conception et développement d'une application pour l'automatisation de la gestion des concours de recrutement. Concrètement : une application web pour importer les candidats, les répartir automatiquement dans les salles, puis générer et envoyer les convocations.</a:t>
             </a:r>
           </a:p>
           <a:p>
@@ -2045,7 +2045,7 @@
           </a:p>
           <a:p>
             <a:r>
-              <a:t>Je nomme les limites avant qu'on me les pose. Pas de refresh token, répartition non transactionnelle, Gmail au lieu d'une messagerie MEF. Ensuite les suites naturelles : un petit espace candidat en consultation seulement, et un vrai déploiement, qui n'était pas dans les trois mois. Je ne promets pas l'inscription en ligne : ce n'était pas le besoin.</a:t>
+              <a:t>Je nomme les limites avant qu'on me les pose. Pas de refresh token, répartition non transactionnelle, Gmail au lieu d'une messagerie MEF. Ensuite les suites naturelles : un petit espace candidat en consultation seulement, et un vrai déploiement, qui n'entrait pas dans la durée du stage. Je ne promets pas l'inscription en ligne : ce n'était pas le besoin.</a:t>
             </a:r>
           </a:p>
         </p:txBody>
@@ -2645,7 +2645,7 @@
           </a:p>
           <a:p>
             <a:r>
-              <a:t>Le stage dure trois mois. Deux semaines de cahier des charges (6–19 mars), un mois de conception UML (20 mars – 19 avril) : rien n'est codé tant que les diagrammes ne sont pas validés. Puis cinq semaines de réalisation (20 avril – 24 mai) : authentification, concours et lieux, import, répartition, convocations, tableau de bord. Enfin deux semaines de tests et corrections (25 mai – 6 juin). C'est volontairement linéaire : on ne commence pas le code pendant la conception.</a:t>
+              <a:t>Le stage dure cinq mois et demi. Deux semaines de cahier des charges (6–19 mars), un mois et une semaine de conception UML (20 mars – 26 avril) : rien n'est codé tant que les diagrammes ne sont pas validés. Puis trois mois de réalisation (27 avril – 26 juillet) : authentification, concours et lieux, import, répartition, convocations, tableau de bord. Enfin trois semaines de tests et corrections (27 juillet – 17 août). C'est volontairement linéaire : on ne commence pas le code pendant la conception.</a:t>
             </a:r>
           </a:p>
         </p:txBody>
@@ -5761,54 +5761,9 @@
           </a:prstGeom>
         </p:spPr>
       </p:pic>
-      <p:sp>
-        <p:nvSpPr>
-          <p:cNvPr id="5" name="Rounded Rectangle 4"/>
-          <p:cNvSpPr/>
-          <p:nvPr/>
-        </p:nvSpPr>
-        <p:spPr>
-          <a:xfrm>
-            <a:off x="10001346" y="164592"/>
-            <a:ext cx="1861165" cy="822960"/>
-          </a:xfrm>
-          <a:prstGeom prst="roundRect">
-            <a:avLst>
-              <a:gd name="adj" fmla="val 8000"/>
-            </a:avLst>
-          </a:prstGeom>
-          <a:solidFill>
-            <a:srgbClr val="000000"/>
-          </a:solidFill>
-          <a:ln>
-            <a:noFill/>
-          </a:ln>
-        </p:spPr>
-        <p:style>
-          <a:lnRef idx="1">
-            <a:schemeClr val="accent1"/>
-          </a:lnRef>
-          <a:fillRef idx="3">
-            <a:schemeClr val="accent1"/>
-          </a:fillRef>
-          <a:effectRef idx="2">
-            <a:schemeClr val="accent1"/>
-          </a:effectRef>
-          <a:fontRef idx="minor">
-            <a:schemeClr val="lt1"/>
-          </a:fontRef>
-        </p:style>
-        <p:txBody>
-          <a:bodyPr rtlCol="0" anchor="ctr"/>
-          <a:lstStyle/>
-          <a:p>
-            <a:pPr algn="ctr"/>
-          </a:p>
-        </p:txBody>
-      </p:sp>
       <p:pic>
         <p:nvPicPr>
-          <p:cNvPr id="6" name="Picture 5" descr="mef-logo.png"/>
+          <p:cNvPr id="5" name="Picture 4" descr="mef-logo.png"/>
           <p:cNvPicPr>
             <a:picLocks noChangeAspect="1"/>
           </p:cNvPicPr>
@@ -5822,8 +5777,8 @@
         </p:blipFill>
         <p:spPr>
           <a:xfrm>
-            <a:off x="10111074" y="219456"/>
-            <a:ext cx="1751438" cy="713232"/>
+            <a:off x="9960985" y="201168"/>
+            <a:ext cx="1846663" cy="713232"/>
           </a:xfrm>
           <a:prstGeom prst="rect">
             <a:avLst/>
@@ -5832,7 +5787,7 @@
       </p:pic>
       <p:sp>
         <p:nvSpPr>
-          <p:cNvPr id="7" name="Rectangle 6"/>
+          <p:cNvPr id="6" name="Rectangle 5"/>
           <p:cNvSpPr/>
           <p:nvPr/>
         </p:nvSpPr>
@@ -5875,7 +5830,7 @@
       </p:sp>
       <p:sp>
         <p:nvSpPr>
-          <p:cNvPr id="8" name="Rectangle 7"/>
+          <p:cNvPr id="7" name="Rectangle 6"/>
           <p:cNvSpPr/>
           <p:nvPr/>
         </p:nvSpPr>
@@ -5918,7 +5873,7 @@
       </p:sp>
       <p:sp>
         <p:nvSpPr>
-          <p:cNvPr id="9" name="TextBox 8"/>
+          <p:cNvPr id="8" name="TextBox 7"/>
           <p:cNvSpPr txBox="1"/>
           <p:nvPr/>
         </p:nvSpPr>
@@ -5951,7 +5906,7 @@
       </p:sp>
       <p:sp>
         <p:nvSpPr>
-          <p:cNvPr id="10" name="TextBox 9"/>
+          <p:cNvPr id="9" name="TextBox 8"/>
           <p:cNvSpPr txBox="1"/>
           <p:nvPr/>
         </p:nvSpPr>
@@ -5984,7 +5939,7 @@
       </p:sp>
       <p:sp>
         <p:nvSpPr>
-          <p:cNvPr id="11" name="Rounded Rectangle 10"/>
+          <p:cNvPr id="10" name="Rounded Rectangle 9"/>
           <p:cNvSpPr/>
           <p:nvPr/>
         </p:nvSpPr>
@@ -6029,7 +5984,7 @@
       </p:sp>
       <p:sp>
         <p:nvSpPr>
-          <p:cNvPr id="12" name="TextBox 11"/>
+          <p:cNvPr id="11" name="TextBox 10"/>
           <p:cNvSpPr txBox="1"/>
           <p:nvPr/>
         </p:nvSpPr>
@@ -6062,14 +6017,47 @@
       </p:sp>
       <p:sp>
         <p:nvSpPr>
+          <p:cNvPr id="12" name="TextBox 11"/>
+          <p:cNvSpPr txBox="1"/>
+          <p:nvPr/>
+        </p:nvSpPr>
+        <p:spPr>
+          <a:xfrm>
+            <a:off x="640080" y="2359152"/>
+            <a:ext cx="10972800" cy="256032"/>
+          </a:xfrm>
+          <a:prstGeom prst="rect">
+            <a:avLst/>
+          </a:prstGeom>
+          <a:noFill/>
+        </p:spPr>
+        <p:txBody>
+          <a:bodyPr wrap="square" anchor="t"/>
+          <a:lstStyle/>
+          <a:p>
+            <a:pPr algn="ctr"/>
+            <a:r>
+              <a:rPr sz="1400" b="0" i="0">
+                <a:solidFill>
+                  <a:srgbClr val="4B5563"/>
+                </a:solidFill>
+                <a:latin typeface="Calibri"/>
+              </a:rPr>
+              <a:t>Spécialité Ingénierie Informatique et Réseaux  ·  Option MIAGE</a:t>
+            </a:r>
+          </a:p>
+        </p:txBody>
+      </p:sp>
+      <p:sp>
+        <p:nvSpPr>
           <p:cNvPr id="13" name="TextBox 12"/>
           <p:cNvSpPr txBox="1"/>
           <p:nvPr/>
         </p:nvSpPr>
         <p:spPr>
           <a:xfrm>
-            <a:off x="640080" y="2395728"/>
-            <a:ext cx="10972800" cy="274320"/>
+            <a:off x="640080" y="2651760"/>
+            <a:ext cx="10881360" cy="914400"/>
           </a:xfrm>
           <a:prstGeom prst="rect">
             <a:avLst/>
@@ -6082,13 +6070,14 @@
           <a:p>
             <a:pPr algn="ctr"/>
             <a:r>
-              <a:rPr sz="1400" b="0" i="0">
-                <a:solidFill>
-                  <a:srgbClr val="4B5563"/>
-                </a:solidFill>
-                <a:latin typeface="Calibri"/>
-              </a:rPr>
-              <a:t>Spécialité Ingénierie Informatique et Réseaux  ·  Option MIAGE</a:t>
+              <a:rPr sz="2200" b="1" i="0">
+                <a:solidFill>
+                  <a:srgbClr val="0B2545"/>
+                </a:solidFill>
+                <a:latin typeface="Calibri"/>
+              </a:rPr>
+              <a:t>Conception et développement d'une application pour
+l'automatisation de la gestion des concours de recrutement</a:t>
             </a:r>
           </a:p>
         </p:txBody>
@@ -6101,8 +6090,8 @@
         </p:nvSpPr>
         <p:spPr>
           <a:xfrm>
-            <a:off x="731520" y="2761488"/>
-            <a:ext cx="10698480" cy="822960"/>
+            <a:off x="1097280" y="3584448"/>
+            <a:ext cx="9966960" cy="566928"/>
           </a:xfrm>
           <a:prstGeom prst="rect">
             <a:avLst/>
@@ -6115,54 +6104,21 @@
           <a:p>
             <a:pPr algn="ctr"/>
             <a:r>
-              <a:rPr sz="3000" b="1" i="0">
-                <a:solidFill>
-                  <a:srgbClr val="0B2545"/>
-                </a:solidFill>
-                <a:latin typeface="Calibri"/>
-              </a:rPr>
-              <a:t>Dématérialisation de la gestion des candidatures</a:t>
-            </a:r>
-          </a:p>
-        </p:txBody>
-      </p:sp>
-      <p:sp>
-        <p:nvSpPr>
-          <p:cNvPr id="15" name="TextBox 14"/>
-          <p:cNvSpPr txBox="1"/>
-          <p:nvPr/>
-        </p:nvSpPr>
-        <p:spPr>
-          <a:xfrm>
-            <a:off x="1280160" y="3584448"/>
-            <a:ext cx="9601200" cy="594360"/>
-          </a:xfrm>
-          <a:prstGeom prst="rect">
-            <a:avLst/>
-          </a:prstGeom>
-          <a:noFill/>
-        </p:spPr>
-        <p:txBody>
-          <a:bodyPr wrap="square" anchor="t"/>
-          <a:lstStyle/>
-          <a:p>
-            <a:pPr algn="ctr"/>
-            <a:r>
               <a:rPr sz="1500" b="0" i="0">
                 <a:solidFill>
                   <a:srgbClr val="1F2937"/>
                 </a:solidFill>
                 <a:latin typeface="Calibri"/>
               </a:rPr>
-              <a:t>Développement d'une application web pour l'organisation des concours :
-import des candidats, répartition automatique et convocations</a:t>
-            </a:r>
-          </a:p>
-        </p:txBody>
-      </p:sp>
-      <p:sp>
-        <p:nvSpPr>
-          <p:cNvPr id="16" name="Rounded Rectangle 15"/>
+              <a:t>Dématérialisation de la gestion des candidatures :
+import Excel, répartition automatique et convocations</a:t>
+            </a:r>
+          </a:p>
+        </p:txBody>
+      </p:sp>
+      <p:sp>
+        <p:nvSpPr>
+          <p:cNvPr id="15" name="Rounded Rectangle 14"/>
           <p:cNvSpPr/>
           <p:nvPr/>
         </p:nvSpPr>
@@ -6209,7 +6165,7 @@
       </p:sp>
       <p:sp>
         <p:nvSpPr>
-          <p:cNvPr id="17" name="TextBox 16"/>
+          <p:cNvPr id="16" name="TextBox 15"/>
           <p:cNvSpPr txBox="1"/>
           <p:nvPr/>
         </p:nvSpPr>
@@ -6242,7 +6198,7 @@
       </p:sp>
       <p:sp>
         <p:nvSpPr>
-          <p:cNvPr id="18" name="TextBox 17"/>
+          <p:cNvPr id="17" name="TextBox 16"/>
           <p:cNvSpPr txBox="1"/>
           <p:nvPr/>
         </p:nvSpPr>
@@ -6275,7 +6231,7 @@
       </p:sp>
       <p:sp>
         <p:nvSpPr>
-          <p:cNvPr id="19" name="Rounded Rectangle 18"/>
+          <p:cNvPr id="18" name="Rounded Rectangle 17"/>
           <p:cNvSpPr/>
           <p:nvPr/>
         </p:nvSpPr>
@@ -6322,7 +6278,7 @@
       </p:sp>
       <p:sp>
         <p:nvSpPr>
-          <p:cNvPr id="20" name="TextBox 19"/>
+          <p:cNvPr id="19" name="TextBox 18"/>
           <p:cNvSpPr txBox="1"/>
           <p:nvPr/>
         </p:nvSpPr>
@@ -6355,7 +6311,7 @@
       </p:sp>
       <p:sp>
         <p:nvSpPr>
-          <p:cNvPr id="21" name="TextBox 20"/>
+          <p:cNvPr id="20" name="TextBox 19"/>
           <p:cNvSpPr txBox="1"/>
           <p:nvPr/>
         </p:nvSpPr>
@@ -6388,7 +6344,7 @@
       </p:sp>
       <p:sp>
         <p:nvSpPr>
-          <p:cNvPr id="22" name="Rounded Rectangle 21"/>
+          <p:cNvPr id="21" name="Rounded Rectangle 20"/>
           <p:cNvSpPr/>
           <p:nvPr/>
         </p:nvSpPr>
@@ -6435,7 +6391,7 @@
       </p:sp>
       <p:sp>
         <p:nvSpPr>
-          <p:cNvPr id="23" name="TextBox 22"/>
+          <p:cNvPr id="22" name="TextBox 21"/>
           <p:cNvSpPr txBox="1"/>
           <p:nvPr/>
         </p:nvSpPr>
@@ -6468,7 +6424,7 @@
       </p:sp>
       <p:sp>
         <p:nvSpPr>
-          <p:cNvPr id="24" name="TextBox 23"/>
+          <p:cNvPr id="23" name="TextBox 22"/>
           <p:cNvSpPr txBox="1"/>
           <p:nvPr/>
         </p:nvSpPr>
@@ -6501,7 +6457,7 @@
       </p:sp>
       <p:sp>
         <p:nvSpPr>
-          <p:cNvPr id="25" name="Rounded Rectangle 24"/>
+          <p:cNvPr id="24" name="Rounded Rectangle 23"/>
           <p:cNvSpPr/>
           <p:nvPr/>
         </p:nvSpPr>
@@ -6548,7 +6504,7 @@
       </p:sp>
       <p:sp>
         <p:nvSpPr>
-          <p:cNvPr id="26" name="TextBox 25"/>
+          <p:cNvPr id="25" name="TextBox 24"/>
           <p:cNvSpPr txBox="1"/>
           <p:nvPr/>
         </p:nvSpPr>
@@ -6581,7 +6537,7 @@
       </p:sp>
       <p:sp>
         <p:nvSpPr>
-          <p:cNvPr id="27" name="TextBox 26"/>
+          <p:cNvPr id="26" name="TextBox 25"/>
           <p:cNvSpPr txBox="1"/>
           <p:nvPr/>
         </p:nvSpPr>
@@ -6615,7 +6571,7 @@
       </p:sp>
       <p:sp>
         <p:nvSpPr>
-          <p:cNvPr id="28" name="Rectangle 27"/>
+          <p:cNvPr id="27" name="Rectangle 26"/>
           <p:cNvSpPr/>
           <p:nvPr/>
         </p:nvSpPr>
@@ -6658,7 +6614,7 @@
       </p:sp>
       <p:sp>
         <p:nvSpPr>
-          <p:cNvPr id="29" name="TextBox 28"/>
+          <p:cNvPr id="28" name="TextBox 27"/>
           <p:cNvSpPr txBox="1"/>
           <p:nvPr/>
         </p:nvSpPr>
@@ -6860,54 +6816,9 @@
           </a:prstGeom>
         </p:spPr>
       </p:pic>
-      <p:sp>
-        <p:nvSpPr>
-          <p:cNvPr id="6" name="Rounded Rectangle 5"/>
-          <p:cNvSpPr/>
-          <p:nvPr/>
-        </p:nvSpPr>
-        <p:spPr>
-          <a:xfrm>
-            <a:off x="10684931" y="109728"/>
-            <a:ext cx="1195868" cy="530352"/>
-          </a:xfrm>
-          <a:prstGeom prst="roundRect">
-            <a:avLst>
-              <a:gd name="adj" fmla="val 8000"/>
-            </a:avLst>
-          </a:prstGeom>
-          <a:solidFill>
-            <a:srgbClr val="000000"/>
-          </a:solidFill>
-          <a:ln>
-            <a:noFill/>
-          </a:ln>
-        </p:spPr>
-        <p:style>
-          <a:lnRef idx="1">
-            <a:schemeClr val="accent1"/>
-          </a:lnRef>
-          <a:fillRef idx="3">
-            <a:schemeClr val="accent1"/>
-          </a:fillRef>
-          <a:effectRef idx="2">
-            <a:schemeClr val="accent1"/>
-          </a:effectRef>
-          <a:fontRef idx="minor">
-            <a:schemeClr val="lt1"/>
-          </a:fontRef>
-        </p:style>
-        <p:txBody>
-          <a:bodyPr rtlCol="0" anchor="ctr"/>
-          <a:lstStyle/>
-          <a:p>
-            <a:pPr algn="ctr"/>
-          </a:p>
-        </p:txBody>
-      </p:sp>
       <p:pic>
         <p:nvPicPr>
-          <p:cNvPr id="7" name="Picture 6" descr="mef-logo.png"/>
+          <p:cNvPr id="6" name="Picture 5" descr="mef-logo.png"/>
           <p:cNvPicPr>
             <a:picLocks noChangeAspect="1"/>
           </p:cNvPicPr>
@@ -6921,8 +6832,8 @@
         </p:blipFill>
         <p:spPr>
           <a:xfrm>
-            <a:off x="10758083" y="146304"/>
-            <a:ext cx="1122717" cy="457200"/>
+            <a:off x="10613115" y="128016"/>
+            <a:ext cx="1231108" cy="475488"/>
           </a:xfrm>
           <a:prstGeom prst="rect">
             <a:avLst/>
@@ -6931,7 +6842,7 @@
       </p:pic>
       <p:sp>
         <p:nvSpPr>
-          <p:cNvPr id="8" name="TextBox 7"/>
+          <p:cNvPr id="7" name="TextBox 6"/>
           <p:cNvSpPr txBox="1"/>
           <p:nvPr/>
         </p:nvSpPr>
@@ -6957,14 +6868,14 @@
                 </a:solidFill>
                 <a:latin typeface="Calibri"/>
               </a:rPr>
-              <a:t>Partie 4  ·  Analyse et conception</a:t>
-            </a:r>
-          </a:p>
-        </p:txBody>
-      </p:sp>
-      <p:sp>
-        <p:nvSpPr>
-          <p:cNvPr id="9" name="TextBox 8"/>
+              <a:t>Partie 3  ·  Analyse et conception</a:t>
+            </a:r>
+          </a:p>
+        </p:txBody>
+      </p:sp>
+      <p:sp>
+        <p:nvSpPr>
+          <p:cNvPr id="8" name="TextBox 7"/>
           <p:cNvSpPr txBox="1"/>
           <p:nvPr/>
         </p:nvSpPr>
@@ -6997,7 +6908,7 @@
       </p:sp>
       <p:sp>
         <p:nvSpPr>
-          <p:cNvPr id="10" name="Rectangle 9"/>
+          <p:cNvPr id="9" name="Rectangle 8"/>
           <p:cNvSpPr/>
           <p:nvPr/>
         </p:nvSpPr>
@@ -7040,7 +6951,7 @@
       </p:sp>
       <p:sp>
         <p:nvSpPr>
-          <p:cNvPr id="11" name="TextBox 10"/>
+          <p:cNvPr id="10" name="TextBox 9"/>
           <p:cNvSpPr txBox="1"/>
           <p:nvPr/>
         </p:nvSpPr>
@@ -7073,7 +6984,7 @@
       </p:sp>
       <p:sp>
         <p:nvSpPr>
-          <p:cNvPr id="12" name="TextBox 11"/>
+          <p:cNvPr id="11" name="TextBox 10"/>
           <p:cNvSpPr txBox="1"/>
           <p:nvPr/>
         </p:nvSpPr>
@@ -7106,7 +7017,7 @@
       </p:sp>
       <p:sp>
         <p:nvSpPr>
-          <p:cNvPr id="13" name="Rounded Rectangle 12"/>
+          <p:cNvPr id="12" name="Rounded Rectangle 11"/>
           <p:cNvSpPr/>
           <p:nvPr/>
         </p:nvSpPr>
@@ -7153,7 +7064,7 @@
       </p:sp>
       <p:sp>
         <p:nvSpPr>
-          <p:cNvPr id="14" name="Rectangle 13"/>
+          <p:cNvPr id="13" name="Rectangle 12"/>
           <p:cNvSpPr/>
           <p:nvPr/>
         </p:nvSpPr>
@@ -7196,7 +7107,7 @@
       </p:sp>
       <p:sp>
         <p:nvSpPr>
-          <p:cNvPr id="15" name="TextBox 14"/>
+          <p:cNvPr id="14" name="TextBox 13"/>
           <p:cNvSpPr txBox="1"/>
           <p:nvPr/>
         </p:nvSpPr>
@@ -7229,7 +7140,7 @@
       </p:sp>
       <p:sp>
         <p:nvSpPr>
-          <p:cNvPr id="16" name="Rounded Rectangle 15"/>
+          <p:cNvPr id="15" name="Rounded Rectangle 14"/>
           <p:cNvSpPr/>
           <p:nvPr/>
         </p:nvSpPr>
@@ -7274,7 +7185,7 @@
       </p:sp>
       <p:sp>
         <p:nvSpPr>
-          <p:cNvPr id="17" name="TextBox 16"/>
+          <p:cNvPr id="16" name="TextBox 15"/>
           <p:cNvSpPr txBox="1"/>
           <p:nvPr/>
         </p:nvSpPr>
@@ -7307,7 +7218,7 @@
       </p:sp>
       <p:sp>
         <p:nvSpPr>
-          <p:cNvPr id="18" name="TextBox 17"/>
+          <p:cNvPr id="17" name="TextBox 16"/>
           <p:cNvSpPr txBox="1"/>
           <p:nvPr/>
         </p:nvSpPr>
@@ -7340,7 +7251,7 @@
       </p:sp>
       <p:sp>
         <p:nvSpPr>
-          <p:cNvPr id="19" name="Rounded Rectangle 18"/>
+          <p:cNvPr id="18" name="Rounded Rectangle 17"/>
           <p:cNvSpPr/>
           <p:nvPr/>
         </p:nvSpPr>
@@ -7387,7 +7298,7 @@
       </p:sp>
       <p:sp>
         <p:nvSpPr>
-          <p:cNvPr id="20" name="Rectangle 19"/>
+          <p:cNvPr id="19" name="Rectangle 18"/>
           <p:cNvSpPr/>
           <p:nvPr/>
         </p:nvSpPr>
@@ -7430,7 +7341,7 @@
       </p:sp>
       <p:sp>
         <p:nvSpPr>
-          <p:cNvPr id="21" name="TextBox 20"/>
+          <p:cNvPr id="20" name="TextBox 19"/>
           <p:cNvSpPr txBox="1"/>
           <p:nvPr/>
         </p:nvSpPr>
@@ -7463,7 +7374,7 @@
       </p:sp>
       <p:sp>
         <p:nvSpPr>
-          <p:cNvPr id="22" name="Rounded Rectangle 21"/>
+          <p:cNvPr id="21" name="Rounded Rectangle 20"/>
           <p:cNvSpPr/>
           <p:nvPr/>
         </p:nvSpPr>
@@ -7508,7 +7419,7 @@
       </p:sp>
       <p:sp>
         <p:nvSpPr>
-          <p:cNvPr id="23" name="TextBox 22"/>
+          <p:cNvPr id="22" name="TextBox 21"/>
           <p:cNvSpPr txBox="1"/>
           <p:nvPr/>
         </p:nvSpPr>
@@ -7541,7 +7452,7 @@
       </p:sp>
       <p:sp>
         <p:nvSpPr>
-          <p:cNvPr id="24" name="TextBox 23"/>
+          <p:cNvPr id="23" name="TextBox 22"/>
           <p:cNvSpPr txBox="1"/>
           <p:nvPr/>
         </p:nvSpPr>
@@ -7574,7 +7485,7 @@
       </p:sp>
       <p:sp>
         <p:nvSpPr>
-          <p:cNvPr id="25" name="Rounded Rectangle 24"/>
+          <p:cNvPr id="24" name="Rounded Rectangle 23"/>
           <p:cNvSpPr/>
           <p:nvPr/>
         </p:nvSpPr>
@@ -7621,7 +7532,7 @@
       </p:sp>
       <p:sp>
         <p:nvSpPr>
-          <p:cNvPr id="26" name="Rectangle 25"/>
+          <p:cNvPr id="25" name="Rectangle 24"/>
           <p:cNvSpPr/>
           <p:nvPr/>
         </p:nvSpPr>
@@ -7664,7 +7575,7 @@
       </p:sp>
       <p:sp>
         <p:nvSpPr>
-          <p:cNvPr id="27" name="TextBox 26"/>
+          <p:cNvPr id="26" name="TextBox 25"/>
           <p:cNvSpPr txBox="1"/>
           <p:nvPr/>
         </p:nvSpPr>
@@ -7697,7 +7608,7 @@
       </p:sp>
       <p:sp>
         <p:nvSpPr>
-          <p:cNvPr id="28" name="Rounded Rectangle 27"/>
+          <p:cNvPr id="27" name="Rounded Rectangle 26"/>
           <p:cNvSpPr/>
           <p:nvPr/>
         </p:nvSpPr>
@@ -7742,7 +7653,7 @@
       </p:sp>
       <p:sp>
         <p:nvSpPr>
-          <p:cNvPr id="29" name="TextBox 28"/>
+          <p:cNvPr id="28" name="TextBox 27"/>
           <p:cNvSpPr txBox="1"/>
           <p:nvPr/>
         </p:nvSpPr>
@@ -7775,7 +7686,7 @@
       </p:sp>
       <p:sp>
         <p:nvSpPr>
-          <p:cNvPr id="30" name="TextBox 29"/>
+          <p:cNvPr id="29" name="TextBox 28"/>
           <p:cNvSpPr txBox="1"/>
           <p:nvPr/>
         </p:nvSpPr>
@@ -7808,7 +7719,7 @@
       </p:sp>
       <p:sp>
         <p:nvSpPr>
-          <p:cNvPr id="31" name="Rounded Rectangle 30"/>
+          <p:cNvPr id="30" name="Rounded Rectangle 29"/>
           <p:cNvSpPr/>
           <p:nvPr/>
         </p:nvSpPr>
@@ -7855,7 +7766,7 @@
       </p:sp>
       <p:sp>
         <p:nvSpPr>
-          <p:cNvPr id="32" name="Rectangle 31"/>
+          <p:cNvPr id="31" name="Rectangle 30"/>
           <p:cNvSpPr/>
           <p:nvPr/>
         </p:nvSpPr>
@@ -7898,7 +7809,7 @@
       </p:sp>
       <p:sp>
         <p:nvSpPr>
-          <p:cNvPr id="33" name="TextBox 32"/>
+          <p:cNvPr id="32" name="TextBox 31"/>
           <p:cNvSpPr txBox="1"/>
           <p:nvPr/>
         </p:nvSpPr>
@@ -7931,7 +7842,7 @@
       </p:sp>
       <p:sp>
         <p:nvSpPr>
-          <p:cNvPr id="34" name="Rounded Rectangle 33"/>
+          <p:cNvPr id="33" name="Rounded Rectangle 32"/>
           <p:cNvSpPr/>
           <p:nvPr/>
         </p:nvSpPr>
@@ -7976,7 +7887,7 @@
       </p:sp>
       <p:sp>
         <p:nvSpPr>
-          <p:cNvPr id="35" name="TextBox 34"/>
+          <p:cNvPr id="34" name="TextBox 33"/>
           <p:cNvSpPr txBox="1"/>
           <p:nvPr/>
         </p:nvSpPr>
@@ -8009,7 +7920,7 @@
       </p:sp>
       <p:sp>
         <p:nvSpPr>
-          <p:cNvPr id="36" name="TextBox 35"/>
+          <p:cNvPr id="35" name="TextBox 34"/>
           <p:cNvSpPr txBox="1"/>
           <p:nvPr/>
         </p:nvSpPr>
@@ -8211,54 +8122,9 @@
           </a:prstGeom>
         </p:spPr>
       </p:pic>
-      <p:sp>
-        <p:nvSpPr>
-          <p:cNvPr id="6" name="Rounded Rectangle 5"/>
-          <p:cNvSpPr/>
-          <p:nvPr/>
-        </p:nvSpPr>
-        <p:spPr>
-          <a:xfrm>
-            <a:off x="10684931" y="109728"/>
-            <a:ext cx="1195868" cy="530352"/>
-          </a:xfrm>
-          <a:prstGeom prst="roundRect">
-            <a:avLst>
-              <a:gd name="adj" fmla="val 8000"/>
-            </a:avLst>
-          </a:prstGeom>
-          <a:solidFill>
-            <a:srgbClr val="000000"/>
-          </a:solidFill>
-          <a:ln>
-            <a:noFill/>
-          </a:ln>
-        </p:spPr>
-        <p:style>
-          <a:lnRef idx="1">
-            <a:schemeClr val="accent1"/>
-          </a:lnRef>
-          <a:fillRef idx="3">
-            <a:schemeClr val="accent1"/>
-          </a:fillRef>
-          <a:effectRef idx="2">
-            <a:schemeClr val="accent1"/>
-          </a:effectRef>
-          <a:fontRef idx="minor">
-            <a:schemeClr val="lt1"/>
-          </a:fontRef>
-        </p:style>
-        <p:txBody>
-          <a:bodyPr rtlCol="0" anchor="ctr"/>
-          <a:lstStyle/>
-          <a:p>
-            <a:pPr algn="ctr"/>
-          </a:p>
-        </p:txBody>
-      </p:sp>
       <p:pic>
         <p:nvPicPr>
-          <p:cNvPr id="7" name="Picture 6" descr="mef-logo.png"/>
+          <p:cNvPr id="6" name="Picture 5" descr="mef-logo.png"/>
           <p:cNvPicPr>
             <a:picLocks noChangeAspect="1"/>
           </p:cNvPicPr>
@@ -8272,8 +8138,8 @@
         </p:blipFill>
         <p:spPr>
           <a:xfrm>
-            <a:off x="10758083" y="146304"/>
-            <a:ext cx="1122717" cy="457200"/>
+            <a:off x="10613115" y="128016"/>
+            <a:ext cx="1231108" cy="475488"/>
           </a:xfrm>
           <a:prstGeom prst="rect">
             <a:avLst/>
@@ -8282,7 +8148,7 @@
       </p:pic>
       <p:sp>
         <p:nvSpPr>
-          <p:cNvPr id="8" name="TextBox 7"/>
+          <p:cNvPr id="7" name="TextBox 6"/>
           <p:cNvSpPr txBox="1"/>
           <p:nvPr/>
         </p:nvSpPr>
@@ -8308,14 +8174,14 @@
                 </a:solidFill>
                 <a:latin typeface="Calibri"/>
               </a:rPr>
-              <a:t>Partie 4  ·  Analyse et conception</a:t>
-            </a:r>
-          </a:p>
-        </p:txBody>
-      </p:sp>
-      <p:sp>
-        <p:nvSpPr>
-          <p:cNvPr id="9" name="TextBox 8"/>
+              <a:t>Partie 3  ·  Analyse et conception</a:t>
+            </a:r>
+          </a:p>
+        </p:txBody>
+      </p:sp>
+      <p:sp>
+        <p:nvSpPr>
+          <p:cNvPr id="8" name="TextBox 7"/>
           <p:cNvSpPr txBox="1"/>
           <p:nvPr/>
         </p:nvSpPr>
@@ -8341,14 +8207,14 @@
                 </a:solidFill>
                 <a:latin typeface="Calibri"/>
               </a:rPr>
-              <a:t>Périmètre : ce qui est dans le système, et ce qui n'y est pas</a:t>
-            </a:r>
-          </a:p>
-        </p:txBody>
-      </p:sp>
-      <p:sp>
-        <p:nvSpPr>
-          <p:cNvPr id="10" name="Rectangle 9"/>
+              <a:t>Périmètre du système</a:t>
+            </a:r>
+          </a:p>
+        </p:txBody>
+      </p:sp>
+      <p:sp>
+        <p:nvSpPr>
+          <p:cNvPr id="9" name="Rectangle 8"/>
           <p:cNvSpPr/>
           <p:nvPr/>
         </p:nvSpPr>
@@ -8391,7 +8257,7 @@
       </p:sp>
       <p:sp>
         <p:nvSpPr>
-          <p:cNvPr id="11" name="TextBox 10"/>
+          <p:cNvPr id="10" name="TextBox 9"/>
           <p:cNvSpPr txBox="1"/>
           <p:nvPr/>
         </p:nvSpPr>
@@ -8424,7 +8290,7 @@
       </p:sp>
       <p:sp>
         <p:nvSpPr>
-          <p:cNvPr id="12" name="TextBox 11"/>
+          <p:cNvPr id="11" name="TextBox 10"/>
           <p:cNvSpPr txBox="1"/>
           <p:nvPr/>
         </p:nvSpPr>
@@ -8457,7 +8323,7 @@
       </p:sp>
       <p:sp>
         <p:nvSpPr>
-          <p:cNvPr id="13" name="Rounded Rectangle 12"/>
+          <p:cNvPr id="12" name="Rounded Rectangle 11"/>
           <p:cNvSpPr/>
           <p:nvPr/>
         </p:nvSpPr>
@@ -8504,7 +8370,7 @@
       </p:sp>
       <p:sp>
         <p:nvSpPr>
-          <p:cNvPr id="14" name="Rectangle 13"/>
+          <p:cNvPr id="13" name="Rectangle 12"/>
           <p:cNvSpPr/>
           <p:nvPr/>
         </p:nvSpPr>
@@ -8547,7 +8413,7 @@
       </p:sp>
       <p:sp>
         <p:nvSpPr>
-          <p:cNvPr id="15" name="TextBox 14"/>
+          <p:cNvPr id="14" name="TextBox 13"/>
           <p:cNvSpPr txBox="1"/>
           <p:nvPr/>
         </p:nvSpPr>
@@ -8580,7 +8446,7 @@
       </p:sp>
       <p:sp>
         <p:nvSpPr>
-          <p:cNvPr id="16" name="TextBox 15"/>
+          <p:cNvPr id="15" name="TextBox 14"/>
           <p:cNvSpPr txBox="1"/>
           <p:nvPr/>
         </p:nvSpPr>
@@ -8660,7 +8526,7 @@
                 </a:solidFill>
                 <a:latin typeface="Calibri"/>
               </a:rPr>
-              <a:t>•   Répartition automatique, historique, reset, export</a:t>
+              <a:t>•   Répartition automatique, historique, réinitialisation, export</a:t>
             </a:r>
           </a:p>
           <a:p>
@@ -8699,7 +8565,7 @@
       </p:sp>
       <p:sp>
         <p:nvSpPr>
-          <p:cNvPr id="17" name="Rounded Rectangle 16"/>
+          <p:cNvPr id="16" name="Rounded Rectangle 15"/>
           <p:cNvSpPr/>
           <p:nvPr/>
         </p:nvSpPr>
@@ -8746,7 +8612,7 @@
       </p:sp>
       <p:sp>
         <p:nvSpPr>
-          <p:cNvPr id="18" name="Rectangle 17"/>
+          <p:cNvPr id="17" name="Rectangle 16"/>
           <p:cNvSpPr/>
           <p:nvPr/>
         </p:nvSpPr>
@@ -8789,7 +8655,7 @@
       </p:sp>
       <p:sp>
         <p:nvSpPr>
-          <p:cNvPr id="19" name="TextBox 18"/>
+          <p:cNvPr id="18" name="TextBox 17"/>
           <p:cNvSpPr txBox="1"/>
           <p:nvPr/>
         </p:nvSpPr>
@@ -8822,7 +8688,7 @@
       </p:sp>
       <p:sp>
         <p:nvSpPr>
-          <p:cNvPr id="20" name="TextBox 19"/>
+          <p:cNvPr id="19" name="TextBox 18"/>
           <p:cNvSpPr txBox="1"/>
           <p:nvPr/>
         </p:nvSpPr>
@@ -9094,54 +8960,9 @@
           </a:prstGeom>
         </p:spPr>
       </p:pic>
-      <p:sp>
-        <p:nvSpPr>
-          <p:cNvPr id="6" name="Rounded Rectangle 5"/>
-          <p:cNvSpPr/>
-          <p:nvPr/>
-        </p:nvSpPr>
-        <p:spPr>
-          <a:xfrm>
-            <a:off x="10684931" y="109728"/>
-            <a:ext cx="1195868" cy="530352"/>
-          </a:xfrm>
-          <a:prstGeom prst="roundRect">
-            <a:avLst>
-              <a:gd name="adj" fmla="val 8000"/>
-            </a:avLst>
-          </a:prstGeom>
-          <a:solidFill>
-            <a:srgbClr val="000000"/>
-          </a:solidFill>
-          <a:ln>
-            <a:noFill/>
-          </a:ln>
-        </p:spPr>
-        <p:style>
-          <a:lnRef idx="1">
-            <a:schemeClr val="accent1"/>
-          </a:lnRef>
-          <a:fillRef idx="3">
-            <a:schemeClr val="accent1"/>
-          </a:fillRef>
-          <a:effectRef idx="2">
-            <a:schemeClr val="accent1"/>
-          </a:effectRef>
-          <a:fontRef idx="minor">
-            <a:schemeClr val="lt1"/>
-          </a:fontRef>
-        </p:style>
-        <p:txBody>
-          <a:bodyPr rtlCol="0" anchor="ctr"/>
-          <a:lstStyle/>
-          <a:p>
-            <a:pPr algn="ctr"/>
-          </a:p>
-        </p:txBody>
-      </p:sp>
       <p:pic>
         <p:nvPicPr>
-          <p:cNvPr id="7" name="Picture 6" descr="mef-logo.png"/>
+          <p:cNvPr id="6" name="Picture 5" descr="mef-logo.png"/>
           <p:cNvPicPr>
             <a:picLocks noChangeAspect="1"/>
           </p:cNvPicPr>
@@ -9155,8 +8976,8 @@
         </p:blipFill>
         <p:spPr>
           <a:xfrm>
-            <a:off x="10758083" y="146304"/>
-            <a:ext cx="1122717" cy="457200"/>
+            <a:off x="10613115" y="128016"/>
+            <a:ext cx="1231108" cy="475488"/>
           </a:xfrm>
           <a:prstGeom prst="rect">
             <a:avLst/>
@@ -9165,7 +8986,7 @@
       </p:pic>
       <p:sp>
         <p:nvSpPr>
-          <p:cNvPr id="8" name="TextBox 7"/>
+          <p:cNvPr id="7" name="TextBox 6"/>
           <p:cNvSpPr txBox="1"/>
           <p:nvPr/>
         </p:nvSpPr>
@@ -9191,14 +9012,14 @@
                 </a:solidFill>
                 <a:latin typeface="Calibri"/>
               </a:rPr>
-              <a:t>Partie 4  ·  Analyse et conception</a:t>
-            </a:r>
-          </a:p>
-        </p:txBody>
-      </p:sp>
-      <p:sp>
-        <p:nvSpPr>
-          <p:cNvPr id="9" name="TextBox 8"/>
+              <a:t>Partie 3  ·  Analyse et conception</a:t>
+            </a:r>
+          </a:p>
+        </p:txBody>
+      </p:sp>
+      <p:sp>
+        <p:nvSpPr>
+          <p:cNvPr id="8" name="TextBox 7"/>
           <p:cNvSpPr txBox="1"/>
           <p:nvPr/>
         </p:nvSpPr>
@@ -9231,7 +9052,7 @@
       </p:sp>
       <p:sp>
         <p:nvSpPr>
-          <p:cNvPr id="10" name="Rectangle 9"/>
+          <p:cNvPr id="9" name="Rectangle 8"/>
           <p:cNvSpPr/>
           <p:nvPr/>
         </p:nvSpPr>
@@ -9274,7 +9095,7 @@
       </p:sp>
       <p:sp>
         <p:nvSpPr>
-          <p:cNvPr id="11" name="TextBox 10"/>
+          <p:cNvPr id="10" name="TextBox 9"/>
           <p:cNvSpPr txBox="1"/>
           <p:nvPr/>
         </p:nvSpPr>
@@ -9307,7 +9128,7 @@
       </p:sp>
       <p:sp>
         <p:nvSpPr>
-          <p:cNvPr id="12" name="TextBox 11"/>
+          <p:cNvPr id="11" name="TextBox 10"/>
           <p:cNvSpPr txBox="1"/>
           <p:nvPr/>
         </p:nvSpPr>
@@ -9340,7 +9161,7 @@
       </p:sp>
       <p:sp>
         <p:nvSpPr>
-          <p:cNvPr id="13" name="Rounded Rectangle 12"/>
+          <p:cNvPr id="12" name="Rounded Rectangle 11"/>
           <p:cNvSpPr/>
           <p:nvPr/>
         </p:nvSpPr>
@@ -9387,7 +9208,7 @@
       </p:sp>
       <p:sp>
         <p:nvSpPr>
-          <p:cNvPr id="14" name="Oval 13"/>
+          <p:cNvPr id="13" name="Oval 12"/>
           <p:cNvSpPr/>
           <p:nvPr/>
         </p:nvSpPr>
@@ -9430,7 +9251,7 @@
       </p:sp>
       <p:sp>
         <p:nvSpPr>
-          <p:cNvPr id="15" name="TextBox 14"/>
+          <p:cNvPr id="14" name="TextBox 13"/>
           <p:cNvSpPr txBox="1"/>
           <p:nvPr/>
         </p:nvSpPr>
@@ -9463,7 +9284,7 @@
       </p:sp>
       <p:sp>
         <p:nvSpPr>
-          <p:cNvPr id="16" name="TextBox 15"/>
+          <p:cNvPr id="15" name="TextBox 14"/>
           <p:cNvSpPr txBox="1"/>
           <p:nvPr/>
         </p:nvSpPr>
@@ -9496,7 +9317,7 @@
       </p:sp>
       <p:sp>
         <p:nvSpPr>
-          <p:cNvPr id="17" name="TextBox 16"/>
+          <p:cNvPr id="16" name="TextBox 15"/>
           <p:cNvSpPr txBox="1"/>
           <p:nvPr/>
         </p:nvSpPr>
@@ -9529,7 +9350,7 @@
       </p:sp>
       <p:sp>
         <p:nvSpPr>
-          <p:cNvPr id="18" name="Right Arrow 17"/>
+          <p:cNvPr id="17" name="Right Arrow 16"/>
           <p:cNvSpPr/>
           <p:nvPr/>
         </p:nvSpPr>
@@ -9572,7 +9393,7 @@
       </p:sp>
       <p:sp>
         <p:nvSpPr>
-          <p:cNvPr id="19" name="Rounded Rectangle 18"/>
+          <p:cNvPr id="18" name="Rounded Rectangle 17"/>
           <p:cNvSpPr/>
           <p:nvPr/>
         </p:nvSpPr>
@@ -9619,7 +9440,7 @@
       </p:sp>
       <p:sp>
         <p:nvSpPr>
-          <p:cNvPr id="20" name="Oval 19"/>
+          <p:cNvPr id="19" name="Oval 18"/>
           <p:cNvSpPr/>
           <p:nvPr/>
         </p:nvSpPr>
@@ -9662,7 +9483,7 @@
       </p:sp>
       <p:sp>
         <p:nvSpPr>
-          <p:cNvPr id="21" name="TextBox 20"/>
+          <p:cNvPr id="20" name="TextBox 19"/>
           <p:cNvSpPr txBox="1"/>
           <p:nvPr/>
         </p:nvSpPr>
@@ -9695,7 +9516,7 @@
       </p:sp>
       <p:sp>
         <p:nvSpPr>
-          <p:cNvPr id="22" name="TextBox 21"/>
+          <p:cNvPr id="21" name="TextBox 20"/>
           <p:cNvSpPr txBox="1"/>
           <p:nvPr/>
         </p:nvSpPr>
@@ -9728,7 +9549,7 @@
       </p:sp>
       <p:sp>
         <p:nvSpPr>
-          <p:cNvPr id="23" name="TextBox 22"/>
+          <p:cNvPr id="22" name="TextBox 21"/>
           <p:cNvSpPr txBox="1"/>
           <p:nvPr/>
         </p:nvSpPr>
@@ -9761,7 +9582,7 @@
       </p:sp>
       <p:sp>
         <p:nvSpPr>
-          <p:cNvPr id="24" name="Right Arrow 23"/>
+          <p:cNvPr id="23" name="Right Arrow 22"/>
           <p:cNvSpPr/>
           <p:nvPr/>
         </p:nvSpPr>
@@ -9804,7 +9625,7 @@
       </p:sp>
       <p:sp>
         <p:nvSpPr>
-          <p:cNvPr id="25" name="Rounded Rectangle 24"/>
+          <p:cNvPr id="24" name="Rounded Rectangle 23"/>
           <p:cNvSpPr/>
           <p:nvPr/>
         </p:nvSpPr>
@@ -9851,7 +9672,7 @@
       </p:sp>
       <p:sp>
         <p:nvSpPr>
-          <p:cNvPr id="26" name="Oval 25"/>
+          <p:cNvPr id="25" name="Oval 24"/>
           <p:cNvSpPr/>
           <p:nvPr/>
         </p:nvSpPr>
@@ -9894,7 +9715,7 @@
       </p:sp>
       <p:sp>
         <p:nvSpPr>
-          <p:cNvPr id="27" name="TextBox 26"/>
+          <p:cNvPr id="26" name="TextBox 25"/>
           <p:cNvSpPr txBox="1"/>
           <p:nvPr/>
         </p:nvSpPr>
@@ -9927,7 +9748,7 @@
       </p:sp>
       <p:sp>
         <p:nvSpPr>
-          <p:cNvPr id="28" name="TextBox 27"/>
+          <p:cNvPr id="27" name="TextBox 26"/>
           <p:cNvSpPr txBox="1"/>
           <p:nvPr/>
         </p:nvSpPr>
@@ -9960,7 +9781,7 @@
       </p:sp>
       <p:sp>
         <p:nvSpPr>
-          <p:cNvPr id="29" name="TextBox 28"/>
+          <p:cNvPr id="28" name="TextBox 27"/>
           <p:cNvSpPr txBox="1"/>
           <p:nvPr/>
         </p:nvSpPr>
@@ -9993,7 +9814,7 @@
       </p:sp>
       <p:sp>
         <p:nvSpPr>
-          <p:cNvPr id="30" name="Rounded Rectangle 29"/>
+          <p:cNvPr id="29" name="Rounded Rectangle 28"/>
           <p:cNvSpPr/>
           <p:nvPr/>
         </p:nvSpPr>
@@ -10040,7 +9861,7 @@
       </p:sp>
       <p:sp>
         <p:nvSpPr>
-          <p:cNvPr id="31" name="Oval 30"/>
+          <p:cNvPr id="30" name="Oval 29"/>
           <p:cNvSpPr/>
           <p:nvPr/>
         </p:nvSpPr>
@@ -10083,7 +9904,7 @@
       </p:sp>
       <p:sp>
         <p:nvSpPr>
-          <p:cNvPr id="32" name="TextBox 31"/>
+          <p:cNvPr id="31" name="TextBox 30"/>
           <p:cNvSpPr txBox="1"/>
           <p:nvPr/>
         </p:nvSpPr>
@@ -10116,7 +9937,7 @@
       </p:sp>
       <p:sp>
         <p:nvSpPr>
-          <p:cNvPr id="33" name="TextBox 32"/>
+          <p:cNvPr id="32" name="TextBox 31"/>
           <p:cNvSpPr txBox="1"/>
           <p:nvPr/>
         </p:nvSpPr>
@@ -10149,7 +9970,7 @@
       </p:sp>
       <p:sp>
         <p:nvSpPr>
-          <p:cNvPr id="34" name="TextBox 33"/>
+          <p:cNvPr id="33" name="TextBox 32"/>
           <p:cNvSpPr txBox="1"/>
           <p:nvPr/>
         </p:nvSpPr>
@@ -10182,7 +10003,7 @@
       </p:sp>
       <p:sp>
         <p:nvSpPr>
-          <p:cNvPr id="35" name="Right Arrow 34"/>
+          <p:cNvPr id="34" name="Right Arrow 33"/>
           <p:cNvSpPr/>
           <p:nvPr/>
         </p:nvSpPr>
@@ -10225,7 +10046,7 @@
       </p:sp>
       <p:sp>
         <p:nvSpPr>
-          <p:cNvPr id="36" name="Rounded Rectangle 35"/>
+          <p:cNvPr id="35" name="Rounded Rectangle 34"/>
           <p:cNvSpPr/>
           <p:nvPr/>
         </p:nvSpPr>
@@ -10272,7 +10093,7 @@
       </p:sp>
       <p:sp>
         <p:nvSpPr>
-          <p:cNvPr id="37" name="Oval 36"/>
+          <p:cNvPr id="36" name="Oval 35"/>
           <p:cNvSpPr/>
           <p:nvPr/>
         </p:nvSpPr>
@@ -10315,7 +10136,7 @@
       </p:sp>
       <p:sp>
         <p:nvSpPr>
-          <p:cNvPr id="38" name="TextBox 37"/>
+          <p:cNvPr id="37" name="TextBox 36"/>
           <p:cNvSpPr txBox="1"/>
           <p:nvPr/>
         </p:nvSpPr>
@@ -10348,7 +10169,7 @@
       </p:sp>
       <p:sp>
         <p:nvSpPr>
-          <p:cNvPr id="39" name="TextBox 38"/>
+          <p:cNvPr id="38" name="TextBox 37"/>
           <p:cNvSpPr txBox="1"/>
           <p:nvPr/>
         </p:nvSpPr>
@@ -10381,7 +10202,7 @@
       </p:sp>
       <p:sp>
         <p:nvSpPr>
-          <p:cNvPr id="40" name="TextBox 39"/>
+          <p:cNvPr id="39" name="TextBox 38"/>
           <p:cNvSpPr txBox="1"/>
           <p:nvPr/>
         </p:nvSpPr>
@@ -10414,7 +10235,7 @@
       </p:sp>
       <p:sp>
         <p:nvSpPr>
-          <p:cNvPr id="41" name="Right Arrow 40"/>
+          <p:cNvPr id="40" name="Right Arrow 39"/>
           <p:cNvSpPr/>
           <p:nvPr/>
         </p:nvSpPr>
@@ -10457,7 +10278,7 @@
       </p:sp>
       <p:sp>
         <p:nvSpPr>
-          <p:cNvPr id="42" name="Rounded Rectangle 41"/>
+          <p:cNvPr id="41" name="Rounded Rectangle 40"/>
           <p:cNvSpPr/>
           <p:nvPr/>
         </p:nvSpPr>
@@ -10504,7 +10325,7 @@
       </p:sp>
       <p:sp>
         <p:nvSpPr>
-          <p:cNvPr id="43" name="Oval 42"/>
+          <p:cNvPr id="42" name="Oval 41"/>
           <p:cNvSpPr/>
           <p:nvPr/>
         </p:nvSpPr>
@@ -10547,7 +10368,7 @@
       </p:sp>
       <p:sp>
         <p:nvSpPr>
-          <p:cNvPr id="44" name="TextBox 43"/>
+          <p:cNvPr id="43" name="TextBox 42"/>
           <p:cNvSpPr txBox="1"/>
           <p:nvPr/>
         </p:nvSpPr>
@@ -10580,7 +10401,7 @@
       </p:sp>
       <p:sp>
         <p:nvSpPr>
-          <p:cNvPr id="45" name="TextBox 44"/>
+          <p:cNvPr id="44" name="TextBox 43"/>
           <p:cNvSpPr txBox="1"/>
           <p:nvPr/>
         </p:nvSpPr>
@@ -10613,7 +10434,7 @@
       </p:sp>
       <p:sp>
         <p:nvSpPr>
-          <p:cNvPr id="46" name="TextBox 45"/>
+          <p:cNvPr id="45" name="TextBox 44"/>
           <p:cNvSpPr txBox="1"/>
           <p:nvPr/>
         </p:nvSpPr>
@@ -10815,54 +10636,9 @@
           </a:prstGeom>
         </p:spPr>
       </p:pic>
-      <p:sp>
-        <p:nvSpPr>
-          <p:cNvPr id="6" name="Rounded Rectangle 5"/>
-          <p:cNvSpPr/>
-          <p:nvPr/>
-        </p:nvSpPr>
-        <p:spPr>
-          <a:xfrm>
-            <a:off x="10684931" y="109728"/>
-            <a:ext cx="1195868" cy="530352"/>
-          </a:xfrm>
-          <a:prstGeom prst="roundRect">
-            <a:avLst>
-              <a:gd name="adj" fmla="val 8000"/>
-            </a:avLst>
-          </a:prstGeom>
-          <a:solidFill>
-            <a:srgbClr val="000000"/>
-          </a:solidFill>
-          <a:ln>
-            <a:noFill/>
-          </a:ln>
-        </p:spPr>
-        <p:style>
-          <a:lnRef idx="1">
-            <a:schemeClr val="accent1"/>
-          </a:lnRef>
-          <a:fillRef idx="3">
-            <a:schemeClr val="accent1"/>
-          </a:fillRef>
-          <a:effectRef idx="2">
-            <a:schemeClr val="accent1"/>
-          </a:effectRef>
-          <a:fontRef idx="minor">
-            <a:schemeClr val="lt1"/>
-          </a:fontRef>
-        </p:style>
-        <p:txBody>
-          <a:bodyPr rtlCol="0" anchor="ctr"/>
-          <a:lstStyle/>
-          <a:p>
-            <a:pPr algn="ctr"/>
-          </a:p>
-        </p:txBody>
-      </p:sp>
       <p:pic>
         <p:nvPicPr>
-          <p:cNvPr id="7" name="Picture 6" descr="mef-logo.png"/>
+          <p:cNvPr id="6" name="Picture 5" descr="mef-logo.png"/>
           <p:cNvPicPr>
             <a:picLocks noChangeAspect="1"/>
           </p:cNvPicPr>
@@ -10876,8 +10652,8 @@
         </p:blipFill>
         <p:spPr>
           <a:xfrm>
-            <a:off x="10758083" y="146304"/>
-            <a:ext cx="1122717" cy="457200"/>
+            <a:off x="10613115" y="128016"/>
+            <a:ext cx="1231108" cy="475488"/>
           </a:xfrm>
           <a:prstGeom prst="rect">
             <a:avLst/>
@@ -10886,7 +10662,7 @@
       </p:pic>
       <p:sp>
         <p:nvSpPr>
-          <p:cNvPr id="8" name="TextBox 7"/>
+          <p:cNvPr id="7" name="TextBox 6"/>
           <p:cNvSpPr txBox="1"/>
           <p:nvPr/>
         </p:nvSpPr>
@@ -10912,14 +10688,14 @@
                 </a:solidFill>
                 <a:latin typeface="Calibri"/>
               </a:rPr>
-              <a:t>Partie 4  ·  Analyse et conception</a:t>
-            </a:r>
-          </a:p>
-        </p:txBody>
-      </p:sp>
-      <p:sp>
-        <p:nvSpPr>
-          <p:cNvPr id="9" name="TextBox 8"/>
+              <a:t>Partie 3  ·  Analyse et conception</a:t>
+            </a:r>
+          </a:p>
+        </p:txBody>
+      </p:sp>
+      <p:sp>
+        <p:nvSpPr>
+          <p:cNvPr id="8" name="TextBox 7"/>
           <p:cNvSpPr txBox="1"/>
           <p:nvPr/>
         </p:nvSpPr>
@@ -10952,7 +10728,7 @@
       </p:sp>
       <p:sp>
         <p:nvSpPr>
-          <p:cNvPr id="10" name="Rectangle 9"/>
+          <p:cNvPr id="9" name="Rectangle 8"/>
           <p:cNvSpPr/>
           <p:nvPr/>
         </p:nvSpPr>
@@ -10995,7 +10771,7 @@
       </p:sp>
       <p:sp>
         <p:nvSpPr>
-          <p:cNvPr id="11" name="TextBox 10"/>
+          <p:cNvPr id="10" name="TextBox 9"/>
           <p:cNvSpPr txBox="1"/>
           <p:nvPr/>
         </p:nvSpPr>
@@ -11028,7 +10804,7 @@
       </p:sp>
       <p:sp>
         <p:nvSpPr>
-          <p:cNvPr id="12" name="TextBox 11"/>
+          <p:cNvPr id="11" name="TextBox 10"/>
           <p:cNvSpPr txBox="1"/>
           <p:nvPr/>
         </p:nvSpPr>
@@ -11061,7 +10837,7 @@
       </p:sp>
       <p:sp>
         <p:nvSpPr>
-          <p:cNvPr id="13" name="Rounded Rectangle 12"/>
+          <p:cNvPr id="12" name="Rounded Rectangle 11"/>
           <p:cNvSpPr/>
           <p:nvPr/>
         </p:nvSpPr>
@@ -11108,7 +10884,7 @@
       </p:sp>
       <p:sp>
         <p:nvSpPr>
-          <p:cNvPr id="14" name="TextBox 13"/>
+          <p:cNvPr id="13" name="TextBox 12"/>
           <p:cNvSpPr txBox="1"/>
           <p:nvPr/>
         </p:nvSpPr>
@@ -11141,7 +10917,7 @@
       </p:sp>
       <p:sp>
         <p:nvSpPr>
-          <p:cNvPr id="15" name="TextBox 14"/>
+          <p:cNvPr id="14" name="TextBox 13"/>
           <p:cNvSpPr txBox="1"/>
           <p:nvPr/>
         </p:nvSpPr>
@@ -11174,7 +10950,7 @@
       </p:sp>
       <p:sp>
         <p:nvSpPr>
-          <p:cNvPr id="16" name="Rounded Rectangle 15"/>
+          <p:cNvPr id="15" name="Rounded Rectangle 14"/>
           <p:cNvSpPr/>
           <p:nvPr/>
         </p:nvSpPr>
@@ -11221,7 +10997,7 @@
       </p:sp>
       <p:sp>
         <p:nvSpPr>
-          <p:cNvPr id="17" name="TextBox 16"/>
+          <p:cNvPr id="16" name="TextBox 15"/>
           <p:cNvSpPr txBox="1"/>
           <p:nvPr/>
         </p:nvSpPr>
@@ -11254,7 +11030,7 @@
       </p:sp>
       <p:sp>
         <p:nvSpPr>
-          <p:cNvPr id="18" name="TextBox 17"/>
+          <p:cNvPr id="17" name="TextBox 16"/>
           <p:cNvSpPr txBox="1"/>
           <p:nvPr/>
         </p:nvSpPr>
@@ -11287,7 +11063,7 @@
       </p:sp>
       <p:sp>
         <p:nvSpPr>
-          <p:cNvPr id="19" name="Rounded Rectangle 18"/>
+          <p:cNvPr id="18" name="Rounded Rectangle 17"/>
           <p:cNvSpPr/>
           <p:nvPr/>
         </p:nvSpPr>
@@ -11334,7 +11110,7 @@
       </p:sp>
       <p:sp>
         <p:nvSpPr>
-          <p:cNvPr id="20" name="TextBox 19"/>
+          <p:cNvPr id="19" name="TextBox 18"/>
           <p:cNvSpPr txBox="1"/>
           <p:nvPr/>
         </p:nvSpPr>
@@ -11367,7 +11143,7 @@
       </p:sp>
       <p:sp>
         <p:nvSpPr>
-          <p:cNvPr id="21" name="TextBox 20"/>
+          <p:cNvPr id="20" name="TextBox 19"/>
           <p:cNvSpPr txBox="1"/>
           <p:nvPr/>
         </p:nvSpPr>
@@ -11400,7 +11176,7 @@
       </p:sp>
       <p:sp>
         <p:nvSpPr>
-          <p:cNvPr id="22" name="Rounded Rectangle 21"/>
+          <p:cNvPr id="21" name="Rounded Rectangle 20"/>
           <p:cNvSpPr/>
           <p:nvPr/>
         </p:nvSpPr>
@@ -11447,7 +11223,7 @@
       </p:sp>
       <p:pic>
         <p:nvPicPr>
-          <p:cNvPr id="23" name="Picture 22" descr="usecase-general.png"/>
+          <p:cNvPr id="22" name="Picture 21" descr="usecase-general.png"/>
           <p:cNvPicPr>
             <a:picLocks noChangeAspect="1"/>
           </p:cNvPicPr>
@@ -11640,54 +11416,9 @@
           </a:prstGeom>
         </p:spPr>
       </p:pic>
-      <p:sp>
-        <p:nvSpPr>
-          <p:cNvPr id="6" name="Rounded Rectangle 5"/>
-          <p:cNvSpPr/>
-          <p:nvPr/>
-        </p:nvSpPr>
-        <p:spPr>
-          <a:xfrm>
-            <a:off x="10684931" y="109728"/>
-            <a:ext cx="1195868" cy="530352"/>
-          </a:xfrm>
-          <a:prstGeom prst="roundRect">
-            <a:avLst>
-              <a:gd name="adj" fmla="val 8000"/>
-            </a:avLst>
-          </a:prstGeom>
-          <a:solidFill>
-            <a:srgbClr val="000000"/>
-          </a:solidFill>
-          <a:ln>
-            <a:noFill/>
-          </a:ln>
-        </p:spPr>
-        <p:style>
-          <a:lnRef idx="1">
-            <a:schemeClr val="accent1"/>
-          </a:lnRef>
-          <a:fillRef idx="3">
-            <a:schemeClr val="accent1"/>
-          </a:fillRef>
-          <a:effectRef idx="2">
-            <a:schemeClr val="accent1"/>
-          </a:effectRef>
-          <a:fontRef idx="minor">
-            <a:schemeClr val="lt1"/>
-          </a:fontRef>
-        </p:style>
-        <p:txBody>
-          <a:bodyPr rtlCol="0" anchor="ctr"/>
-          <a:lstStyle/>
-          <a:p>
-            <a:pPr algn="ctr"/>
-          </a:p>
-        </p:txBody>
-      </p:sp>
       <p:pic>
         <p:nvPicPr>
-          <p:cNvPr id="7" name="Picture 6" descr="mef-logo.png"/>
+          <p:cNvPr id="6" name="Picture 5" descr="mef-logo.png"/>
           <p:cNvPicPr>
             <a:picLocks noChangeAspect="1"/>
           </p:cNvPicPr>
@@ -11701,8 +11432,8 @@
         </p:blipFill>
         <p:spPr>
           <a:xfrm>
-            <a:off x="10758083" y="146304"/>
-            <a:ext cx="1122717" cy="457200"/>
+            <a:off x="10613115" y="128016"/>
+            <a:ext cx="1231108" cy="475488"/>
           </a:xfrm>
           <a:prstGeom prst="rect">
             <a:avLst/>
@@ -11711,7 +11442,7 @@
       </p:pic>
       <p:sp>
         <p:nvSpPr>
-          <p:cNvPr id="8" name="TextBox 7"/>
+          <p:cNvPr id="7" name="TextBox 6"/>
           <p:cNvSpPr txBox="1"/>
           <p:nvPr/>
         </p:nvSpPr>
@@ -11737,14 +11468,14 @@
                 </a:solidFill>
                 <a:latin typeface="Calibri"/>
               </a:rPr>
-              <a:t>Partie 4  ·  Analyse et conception</a:t>
-            </a:r>
-          </a:p>
-        </p:txBody>
-      </p:sp>
-      <p:sp>
-        <p:nvSpPr>
-          <p:cNvPr id="9" name="TextBox 8"/>
+              <a:t>Partie 3  ·  Analyse et conception</a:t>
+            </a:r>
+          </a:p>
+        </p:txBody>
+      </p:sp>
+      <p:sp>
+        <p:nvSpPr>
+          <p:cNvPr id="8" name="TextBox 7"/>
           <p:cNvSpPr txBox="1"/>
           <p:nvPr/>
         </p:nvSpPr>
@@ -11777,7 +11508,7 @@
       </p:sp>
       <p:sp>
         <p:nvSpPr>
-          <p:cNvPr id="10" name="Rectangle 9"/>
+          <p:cNvPr id="9" name="Rectangle 8"/>
           <p:cNvSpPr/>
           <p:nvPr/>
         </p:nvSpPr>
@@ -11820,7 +11551,7 @@
       </p:sp>
       <p:sp>
         <p:nvSpPr>
-          <p:cNvPr id="11" name="TextBox 10"/>
+          <p:cNvPr id="10" name="TextBox 9"/>
           <p:cNvSpPr txBox="1"/>
           <p:nvPr/>
         </p:nvSpPr>
@@ -11853,7 +11584,7 @@
       </p:sp>
       <p:sp>
         <p:nvSpPr>
-          <p:cNvPr id="12" name="TextBox 11"/>
+          <p:cNvPr id="11" name="TextBox 10"/>
           <p:cNvSpPr txBox="1"/>
           <p:nvPr/>
         </p:nvSpPr>
@@ -11886,7 +11617,7 @@
       </p:sp>
       <p:pic>
         <p:nvPicPr>
-          <p:cNvPr id="13" name="Picture 12" descr="classe-general.png"/>
+          <p:cNvPr id="12" name="Picture 11" descr="classe-general.png"/>
           <p:cNvPicPr>
             <a:picLocks noChangeAspect="1"/>
           </p:cNvPicPr>
@@ -11900,8 +11631,8 @@
         </p:blipFill>
         <p:spPr>
           <a:xfrm>
-            <a:off x="2907254" y="1298448"/>
-            <a:ext cx="6347011" cy="4315967"/>
+            <a:off x="2630872" y="1298448"/>
+            <a:ext cx="6899774" cy="4315967"/>
           </a:xfrm>
           <a:prstGeom prst="rect">
             <a:avLst/>
@@ -11910,7 +11641,7 @@
       </p:pic>
       <p:sp>
         <p:nvSpPr>
-          <p:cNvPr id="14" name="Rounded Rectangle 13"/>
+          <p:cNvPr id="13" name="Rounded Rectangle 12"/>
           <p:cNvSpPr/>
           <p:nvPr/>
         </p:nvSpPr>
@@ -11955,7 +11686,7 @@
       </p:sp>
       <p:sp>
         <p:nvSpPr>
-          <p:cNvPr id="15" name="TextBox 14"/>
+          <p:cNvPr id="14" name="TextBox 13"/>
           <p:cNvSpPr txBox="1"/>
           <p:nvPr/>
         </p:nvSpPr>
@@ -11981,7 +11712,7 @@
                 </a:solidFill>
                 <a:latin typeface="Calibri"/>
               </a:rPr>
-              <a:t>Losange plein = composition dans un même service.   Flèche en pointillés = référence logique entre bases (id_centre, numero_concours…).   Convocation est « assemblée » : elle n'est pas stockée, elle est recalculée à la lecture.</a:t>
+              <a:t>Six paquets, un par microservice. Les pointillés sont des identifiants logiques (id_centre, numero_concours), pas des clés étrangères. La convocation n'est pas stockée : elle est assemblée à la lecture.</a:t>
             </a:r>
           </a:p>
         </p:txBody>
@@ -12157,54 +11888,9 @@
           </a:prstGeom>
         </p:spPr>
       </p:pic>
-      <p:sp>
-        <p:nvSpPr>
-          <p:cNvPr id="6" name="Rounded Rectangle 5"/>
-          <p:cNvSpPr/>
-          <p:nvPr/>
-        </p:nvSpPr>
-        <p:spPr>
-          <a:xfrm>
-            <a:off x="10684931" y="109728"/>
-            <a:ext cx="1195868" cy="530352"/>
-          </a:xfrm>
-          <a:prstGeom prst="roundRect">
-            <a:avLst>
-              <a:gd name="adj" fmla="val 8000"/>
-            </a:avLst>
-          </a:prstGeom>
-          <a:solidFill>
-            <a:srgbClr val="000000"/>
-          </a:solidFill>
-          <a:ln>
-            <a:noFill/>
-          </a:ln>
-        </p:spPr>
-        <p:style>
-          <a:lnRef idx="1">
-            <a:schemeClr val="accent1"/>
-          </a:lnRef>
-          <a:fillRef idx="3">
-            <a:schemeClr val="accent1"/>
-          </a:fillRef>
-          <a:effectRef idx="2">
-            <a:schemeClr val="accent1"/>
-          </a:effectRef>
-          <a:fontRef idx="minor">
-            <a:schemeClr val="lt1"/>
-          </a:fontRef>
-        </p:style>
-        <p:txBody>
-          <a:bodyPr rtlCol="0" anchor="ctr"/>
-          <a:lstStyle/>
-          <a:p>
-            <a:pPr algn="ctr"/>
-          </a:p>
-        </p:txBody>
-      </p:sp>
       <p:pic>
         <p:nvPicPr>
-          <p:cNvPr id="7" name="Picture 6" descr="mef-logo.png"/>
+          <p:cNvPr id="6" name="Picture 5" descr="mef-logo.png"/>
           <p:cNvPicPr>
             <a:picLocks noChangeAspect="1"/>
           </p:cNvPicPr>
@@ -12218,8 +11904,8 @@
         </p:blipFill>
         <p:spPr>
           <a:xfrm>
-            <a:off x="10758083" y="146304"/>
-            <a:ext cx="1122717" cy="457200"/>
+            <a:off x="10613115" y="128016"/>
+            <a:ext cx="1231108" cy="475488"/>
           </a:xfrm>
           <a:prstGeom prst="rect">
             <a:avLst/>
@@ -12228,7 +11914,7 @@
       </p:pic>
       <p:sp>
         <p:nvSpPr>
-          <p:cNvPr id="8" name="TextBox 7"/>
+          <p:cNvPr id="7" name="TextBox 6"/>
           <p:cNvSpPr txBox="1"/>
           <p:nvPr/>
         </p:nvSpPr>
@@ -12254,14 +11940,14 @@
                 </a:solidFill>
                 <a:latin typeface="Calibri"/>
               </a:rPr>
-              <a:t>Partie 5  ·  Architecture technique</a:t>
-            </a:r>
-          </a:p>
-        </p:txBody>
-      </p:sp>
-      <p:sp>
-        <p:nvSpPr>
-          <p:cNvPr id="9" name="TextBox 8"/>
+              <a:t>Partie 4  ·  Architecture technique</a:t>
+            </a:r>
+          </a:p>
+        </p:txBody>
+      </p:sp>
+      <p:sp>
+        <p:nvSpPr>
+          <p:cNvPr id="8" name="TextBox 7"/>
           <p:cNvSpPr txBox="1"/>
           <p:nvPr/>
         </p:nvSpPr>
@@ -12294,7 +11980,7 @@
       </p:sp>
       <p:sp>
         <p:nvSpPr>
-          <p:cNvPr id="10" name="Rectangle 9"/>
+          <p:cNvPr id="9" name="Rectangle 8"/>
           <p:cNvSpPr/>
           <p:nvPr/>
         </p:nvSpPr>
@@ -12337,7 +12023,7 @@
       </p:sp>
       <p:sp>
         <p:nvSpPr>
-          <p:cNvPr id="11" name="TextBox 10"/>
+          <p:cNvPr id="10" name="TextBox 9"/>
           <p:cNvSpPr txBox="1"/>
           <p:nvPr/>
         </p:nvSpPr>
@@ -12370,7 +12056,7 @@
       </p:sp>
       <p:sp>
         <p:nvSpPr>
-          <p:cNvPr id="12" name="TextBox 11"/>
+          <p:cNvPr id="11" name="TextBox 10"/>
           <p:cNvSpPr txBox="1"/>
           <p:nvPr/>
         </p:nvSpPr>
@@ -12403,7 +12089,7 @@
       </p:sp>
       <p:sp>
         <p:nvSpPr>
-          <p:cNvPr id="13" name="Rounded Rectangle 12"/>
+          <p:cNvPr id="12" name="Rounded Rectangle 11"/>
           <p:cNvSpPr/>
           <p:nvPr/>
         </p:nvSpPr>
@@ -12448,7 +12134,7 @@
       </p:sp>
       <p:sp>
         <p:nvSpPr>
-          <p:cNvPr id="14" name="TextBox 13"/>
+          <p:cNvPr id="13" name="TextBox 12"/>
           <p:cNvSpPr txBox="1"/>
           <p:nvPr/>
         </p:nvSpPr>
@@ -12481,7 +12167,7 @@
       </p:sp>
       <p:sp>
         <p:nvSpPr>
-          <p:cNvPr id="15" name="TextBox 14"/>
+          <p:cNvPr id="14" name="TextBox 13"/>
           <p:cNvSpPr txBox="1"/>
           <p:nvPr/>
         </p:nvSpPr>
@@ -12514,7 +12200,7 @@
       </p:sp>
       <p:sp>
         <p:nvSpPr>
-          <p:cNvPr id="16" name="Rounded Rectangle 15"/>
+          <p:cNvPr id="15" name="Rounded Rectangle 14"/>
           <p:cNvSpPr/>
           <p:nvPr/>
         </p:nvSpPr>
@@ -12559,7 +12245,7 @@
       </p:sp>
       <p:sp>
         <p:nvSpPr>
-          <p:cNvPr id="17" name="TextBox 16"/>
+          <p:cNvPr id="16" name="TextBox 15"/>
           <p:cNvSpPr txBox="1"/>
           <p:nvPr/>
         </p:nvSpPr>
@@ -12592,7 +12278,7 @@
       </p:sp>
       <p:sp>
         <p:nvSpPr>
-          <p:cNvPr id="18" name="Rounded Rectangle 17"/>
+          <p:cNvPr id="17" name="Rounded Rectangle 16"/>
           <p:cNvSpPr/>
           <p:nvPr/>
         </p:nvSpPr>
@@ -12637,7 +12323,7 @@
       </p:sp>
       <p:sp>
         <p:nvSpPr>
-          <p:cNvPr id="19" name="TextBox 18"/>
+          <p:cNvPr id="18" name="TextBox 17"/>
           <p:cNvSpPr txBox="1"/>
           <p:nvPr/>
         </p:nvSpPr>
@@ -12670,7 +12356,7 @@
       </p:sp>
       <p:sp>
         <p:nvSpPr>
-          <p:cNvPr id="20" name="TextBox 19"/>
+          <p:cNvPr id="19" name="TextBox 18"/>
           <p:cNvSpPr txBox="1"/>
           <p:nvPr/>
         </p:nvSpPr>
@@ -12703,7 +12389,7 @@
       </p:sp>
       <p:sp>
         <p:nvSpPr>
-          <p:cNvPr id="21" name="TextBox 20"/>
+          <p:cNvPr id="20" name="TextBox 19"/>
           <p:cNvSpPr txBox="1"/>
           <p:nvPr/>
         </p:nvSpPr>
@@ -12736,7 +12422,7 @@
       </p:sp>
       <p:sp>
         <p:nvSpPr>
-          <p:cNvPr id="22" name="Rounded Rectangle 21"/>
+          <p:cNvPr id="21" name="Rounded Rectangle 20"/>
           <p:cNvSpPr/>
           <p:nvPr/>
         </p:nvSpPr>
@@ -12783,7 +12469,7 @@
       </p:sp>
       <p:sp>
         <p:nvSpPr>
-          <p:cNvPr id="23" name="TextBox 22"/>
+          <p:cNvPr id="22" name="TextBox 21"/>
           <p:cNvSpPr txBox="1"/>
           <p:nvPr/>
         </p:nvSpPr>
@@ -12816,7 +12502,7 @@
       </p:sp>
       <p:sp>
         <p:nvSpPr>
-          <p:cNvPr id="24" name="Rounded Rectangle 23"/>
+          <p:cNvPr id="23" name="Rounded Rectangle 22"/>
           <p:cNvSpPr/>
           <p:nvPr/>
         </p:nvSpPr>
@@ -12861,7 +12547,7 @@
       </p:sp>
       <p:sp>
         <p:nvSpPr>
-          <p:cNvPr id="25" name="TextBox 24"/>
+          <p:cNvPr id="24" name="TextBox 23"/>
           <p:cNvSpPr txBox="1"/>
           <p:nvPr/>
         </p:nvSpPr>
@@ -12894,7 +12580,7 @@
       </p:sp>
       <p:sp>
         <p:nvSpPr>
-          <p:cNvPr id="26" name="TextBox 25"/>
+          <p:cNvPr id="25" name="TextBox 24"/>
           <p:cNvSpPr txBox="1"/>
           <p:nvPr/>
         </p:nvSpPr>
@@ -12927,7 +12613,7 @@
       </p:sp>
       <p:sp>
         <p:nvSpPr>
-          <p:cNvPr id="27" name="TextBox 26"/>
+          <p:cNvPr id="26" name="TextBox 25"/>
           <p:cNvSpPr txBox="1"/>
           <p:nvPr/>
         </p:nvSpPr>
@@ -12960,7 +12646,7 @@
       </p:sp>
       <p:sp>
         <p:nvSpPr>
-          <p:cNvPr id="28" name="Rounded Rectangle 27"/>
+          <p:cNvPr id="27" name="Rounded Rectangle 26"/>
           <p:cNvSpPr/>
           <p:nvPr/>
         </p:nvSpPr>
@@ -13007,7 +12693,7 @@
       </p:sp>
       <p:sp>
         <p:nvSpPr>
-          <p:cNvPr id="29" name="TextBox 28"/>
+          <p:cNvPr id="28" name="TextBox 27"/>
           <p:cNvSpPr txBox="1"/>
           <p:nvPr/>
         </p:nvSpPr>
@@ -13040,7 +12726,7 @@
       </p:sp>
       <p:sp>
         <p:nvSpPr>
-          <p:cNvPr id="30" name="Rounded Rectangle 29"/>
+          <p:cNvPr id="29" name="Rounded Rectangle 28"/>
           <p:cNvSpPr/>
           <p:nvPr/>
         </p:nvSpPr>
@@ -13085,7 +12771,7 @@
       </p:sp>
       <p:sp>
         <p:nvSpPr>
-          <p:cNvPr id="31" name="TextBox 30"/>
+          <p:cNvPr id="30" name="TextBox 29"/>
           <p:cNvSpPr txBox="1"/>
           <p:nvPr/>
         </p:nvSpPr>
@@ -13118,7 +12804,7 @@
       </p:sp>
       <p:sp>
         <p:nvSpPr>
-          <p:cNvPr id="32" name="TextBox 31"/>
+          <p:cNvPr id="31" name="TextBox 30"/>
           <p:cNvSpPr txBox="1"/>
           <p:nvPr/>
         </p:nvSpPr>
@@ -13151,7 +12837,7 @@
       </p:sp>
       <p:sp>
         <p:nvSpPr>
-          <p:cNvPr id="33" name="TextBox 32"/>
+          <p:cNvPr id="32" name="TextBox 31"/>
           <p:cNvSpPr txBox="1"/>
           <p:nvPr/>
         </p:nvSpPr>
@@ -13184,7 +12870,7 @@
       </p:sp>
       <p:sp>
         <p:nvSpPr>
-          <p:cNvPr id="34" name="Rounded Rectangle 33"/>
+          <p:cNvPr id="33" name="Rounded Rectangle 32"/>
           <p:cNvSpPr/>
           <p:nvPr/>
         </p:nvSpPr>
@@ -13231,7 +12917,7 @@
       </p:sp>
       <p:sp>
         <p:nvSpPr>
-          <p:cNvPr id="35" name="TextBox 34"/>
+          <p:cNvPr id="34" name="TextBox 33"/>
           <p:cNvSpPr txBox="1"/>
           <p:nvPr/>
         </p:nvSpPr>
@@ -13264,7 +12950,7 @@
       </p:sp>
       <p:sp>
         <p:nvSpPr>
-          <p:cNvPr id="36" name="Rounded Rectangle 35"/>
+          <p:cNvPr id="35" name="Rounded Rectangle 34"/>
           <p:cNvSpPr/>
           <p:nvPr/>
         </p:nvSpPr>
@@ -13309,7 +12995,7 @@
       </p:sp>
       <p:sp>
         <p:nvSpPr>
-          <p:cNvPr id="37" name="TextBox 36"/>
+          <p:cNvPr id="36" name="TextBox 35"/>
           <p:cNvSpPr txBox="1"/>
           <p:nvPr/>
         </p:nvSpPr>
@@ -13342,7 +13028,7 @@
       </p:sp>
       <p:sp>
         <p:nvSpPr>
-          <p:cNvPr id="38" name="TextBox 37"/>
+          <p:cNvPr id="37" name="TextBox 36"/>
           <p:cNvSpPr txBox="1"/>
           <p:nvPr/>
         </p:nvSpPr>
@@ -13375,7 +13061,7 @@
       </p:sp>
       <p:sp>
         <p:nvSpPr>
-          <p:cNvPr id="39" name="TextBox 38"/>
+          <p:cNvPr id="38" name="TextBox 37"/>
           <p:cNvSpPr txBox="1"/>
           <p:nvPr/>
         </p:nvSpPr>
@@ -13408,7 +13094,7 @@
       </p:sp>
       <p:sp>
         <p:nvSpPr>
-          <p:cNvPr id="40" name="Rounded Rectangle 39"/>
+          <p:cNvPr id="39" name="Rounded Rectangle 38"/>
           <p:cNvSpPr/>
           <p:nvPr/>
         </p:nvSpPr>
@@ -13455,7 +13141,7 @@
       </p:sp>
       <p:sp>
         <p:nvSpPr>
-          <p:cNvPr id="41" name="TextBox 40"/>
+          <p:cNvPr id="40" name="TextBox 39"/>
           <p:cNvSpPr txBox="1"/>
           <p:nvPr/>
         </p:nvSpPr>
@@ -13488,7 +13174,7 @@
       </p:sp>
       <p:sp>
         <p:nvSpPr>
-          <p:cNvPr id="42" name="Rounded Rectangle 41"/>
+          <p:cNvPr id="41" name="Rounded Rectangle 40"/>
           <p:cNvSpPr/>
           <p:nvPr/>
         </p:nvSpPr>
@@ -13533,7 +13219,7 @@
       </p:sp>
       <p:sp>
         <p:nvSpPr>
-          <p:cNvPr id="43" name="TextBox 42"/>
+          <p:cNvPr id="42" name="TextBox 41"/>
           <p:cNvSpPr txBox="1"/>
           <p:nvPr/>
         </p:nvSpPr>
@@ -13566,7 +13252,7 @@
       </p:sp>
       <p:sp>
         <p:nvSpPr>
-          <p:cNvPr id="44" name="TextBox 43"/>
+          <p:cNvPr id="43" name="TextBox 42"/>
           <p:cNvSpPr txBox="1"/>
           <p:nvPr/>
         </p:nvSpPr>
@@ -13599,7 +13285,7 @@
       </p:sp>
       <p:sp>
         <p:nvSpPr>
-          <p:cNvPr id="45" name="TextBox 44"/>
+          <p:cNvPr id="44" name="TextBox 43"/>
           <p:cNvSpPr txBox="1"/>
           <p:nvPr/>
         </p:nvSpPr>
@@ -13632,7 +13318,7 @@
       </p:sp>
       <p:sp>
         <p:nvSpPr>
-          <p:cNvPr id="46" name="Rounded Rectangle 45"/>
+          <p:cNvPr id="45" name="Rounded Rectangle 44"/>
           <p:cNvSpPr/>
           <p:nvPr/>
         </p:nvSpPr>
@@ -13679,7 +13365,7 @@
       </p:sp>
       <p:sp>
         <p:nvSpPr>
-          <p:cNvPr id="47" name="TextBox 46"/>
+          <p:cNvPr id="46" name="TextBox 45"/>
           <p:cNvSpPr txBox="1"/>
           <p:nvPr/>
         </p:nvSpPr>
@@ -13712,7 +13398,7 @@
       </p:sp>
       <p:sp>
         <p:nvSpPr>
-          <p:cNvPr id="48" name="Rounded Rectangle 47"/>
+          <p:cNvPr id="47" name="Rounded Rectangle 46"/>
           <p:cNvSpPr/>
           <p:nvPr/>
         </p:nvSpPr>
@@ -13757,7 +13443,7 @@
       </p:sp>
       <p:sp>
         <p:nvSpPr>
-          <p:cNvPr id="49" name="TextBox 48"/>
+          <p:cNvPr id="48" name="TextBox 47"/>
           <p:cNvSpPr txBox="1"/>
           <p:nvPr/>
         </p:nvSpPr>
@@ -13790,7 +13476,7 @@
       </p:sp>
       <p:sp>
         <p:nvSpPr>
-          <p:cNvPr id="50" name="TextBox 49"/>
+          <p:cNvPr id="49" name="TextBox 48"/>
           <p:cNvSpPr txBox="1"/>
           <p:nvPr/>
         </p:nvSpPr>
@@ -13823,7 +13509,7 @@
       </p:sp>
       <p:sp>
         <p:nvSpPr>
-          <p:cNvPr id="51" name="TextBox 50"/>
+          <p:cNvPr id="50" name="TextBox 49"/>
           <p:cNvSpPr txBox="1"/>
           <p:nvPr/>
         </p:nvSpPr>
@@ -13856,7 +13542,7 @@
       </p:sp>
       <p:sp>
         <p:nvSpPr>
-          <p:cNvPr id="52" name="Rounded Rectangle 51"/>
+          <p:cNvPr id="51" name="Rounded Rectangle 50"/>
           <p:cNvSpPr/>
           <p:nvPr/>
         </p:nvSpPr>
@@ -13903,7 +13589,7 @@
       </p:sp>
       <p:sp>
         <p:nvSpPr>
-          <p:cNvPr id="53" name="TextBox 52"/>
+          <p:cNvPr id="52" name="TextBox 51"/>
           <p:cNvSpPr txBox="1"/>
           <p:nvPr/>
         </p:nvSpPr>
@@ -13936,7 +13622,7 @@
       </p:sp>
       <p:sp>
         <p:nvSpPr>
-          <p:cNvPr id="54" name="TextBox 53"/>
+          <p:cNvPr id="53" name="TextBox 52"/>
           <p:cNvSpPr txBox="1"/>
           <p:nvPr/>
         </p:nvSpPr>
@@ -14139,54 +13825,9 @@
           </a:prstGeom>
         </p:spPr>
       </p:pic>
-      <p:sp>
-        <p:nvSpPr>
-          <p:cNvPr id="6" name="Rounded Rectangle 5"/>
-          <p:cNvSpPr/>
-          <p:nvPr/>
-        </p:nvSpPr>
-        <p:spPr>
-          <a:xfrm>
-            <a:off x="10684931" y="109728"/>
-            <a:ext cx="1195868" cy="530352"/>
-          </a:xfrm>
-          <a:prstGeom prst="roundRect">
-            <a:avLst>
-              <a:gd name="adj" fmla="val 8000"/>
-            </a:avLst>
-          </a:prstGeom>
-          <a:solidFill>
-            <a:srgbClr val="000000"/>
-          </a:solidFill>
-          <a:ln>
-            <a:noFill/>
-          </a:ln>
-        </p:spPr>
-        <p:style>
-          <a:lnRef idx="1">
-            <a:schemeClr val="accent1"/>
-          </a:lnRef>
-          <a:fillRef idx="3">
-            <a:schemeClr val="accent1"/>
-          </a:fillRef>
-          <a:effectRef idx="2">
-            <a:schemeClr val="accent1"/>
-          </a:effectRef>
-          <a:fontRef idx="minor">
-            <a:schemeClr val="lt1"/>
-          </a:fontRef>
-        </p:style>
-        <p:txBody>
-          <a:bodyPr rtlCol="0" anchor="ctr"/>
-          <a:lstStyle/>
-          <a:p>
-            <a:pPr algn="ctr"/>
-          </a:p>
-        </p:txBody>
-      </p:sp>
       <p:pic>
         <p:nvPicPr>
-          <p:cNvPr id="7" name="Picture 6" descr="mef-logo.png"/>
+          <p:cNvPr id="6" name="Picture 5" descr="mef-logo.png"/>
           <p:cNvPicPr>
             <a:picLocks noChangeAspect="1"/>
           </p:cNvPicPr>
@@ -14200,8 +13841,8 @@
         </p:blipFill>
         <p:spPr>
           <a:xfrm>
-            <a:off x="10758083" y="146304"/>
-            <a:ext cx="1122717" cy="457200"/>
+            <a:off x="10613115" y="128016"/>
+            <a:ext cx="1231108" cy="475488"/>
           </a:xfrm>
           <a:prstGeom prst="rect">
             <a:avLst/>
@@ -14210,7 +13851,7 @@
       </p:pic>
       <p:sp>
         <p:nvSpPr>
-          <p:cNvPr id="8" name="TextBox 7"/>
+          <p:cNvPr id="7" name="TextBox 6"/>
           <p:cNvSpPr txBox="1"/>
           <p:nvPr/>
         </p:nvSpPr>
@@ -14236,14 +13877,14 @@
                 </a:solidFill>
                 <a:latin typeface="Calibri"/>
               </a:rPr>
-              <a:t>Partie 5  ·  Architecture technique</a:t>
-            </a:r>
-          </a:p>
-        </p:txBody>
-      </p:sp>
-      <p:sp>
-        <p:nvSpPr>
-          <p:cNvPr id="9" name="TextBox 8"/>
+              <a:t>Partie 4  ·  Architecture technique</a:t>
+            </a:r>
+          </a:p>
+        </p:txBody>
+      </p:sp>
+      <p:sp>
+        <p:nvSpPr>
+          <p:cNvPr id="8" name="TextBox 7"/>
           <p:cNvSpPr txBox="1"/>
           <p:nvPr/>
         </p:nvSpPr>
@@ -14276,7 +13917,7 @@
       </p:sp>
       <p:sp>
         <p:nvSpPr>
-          <p:cNvPr id="10" name="Rectangle 9"/>
+          <p:cNvPr id="9" name="Rectangle 8"/>
           <p:cNvSpPr/>
           <p:nvPr/>
         </p:nvSpPr>
@@ -14319,7 +13960,7 @@
       </p:sp>
       <p:sp>
         <p:nvSpPr>
-          <p:cNvPr id="11" name="TextBox 10"/>
+          <p:cNvPr id="10" name="TextBox 9"/>
           <p:cNvSpPr txBox="1"/>
           <p:nvPr/>
         </p:nvSpPr>
@@ -14352,7 +13993,7 @@
       </p:sp>
       <p:sp>
         <p:nvSpPr>
-          <p:cNvPr id="12" name="TextBox 11"/>
+          <p:cNvPr id="11" name="TextBox 10"/>
           <p:cNvSpPr txBox="1"/>
           <p:nvPr/>
         </p:nvSpPr>
@@ -14385,7 +14026,7 @@
       </p:sp>
       <p:sp>
         <p:nvSpPr>
-          <p:cNvPr id="13" name="Rounded Rectangle 12"/>
+          <p:cNvPr id="12" name="Rounded Rectangle 11"/>
           <p:cNvSpPr/>
           <p:nvPr/>
         </p:nvSpPr>
@@ -14430,7 +14071,7 @@
       </p:sp>
       <p:sp>
         <p:nvSpPr>
-          <p:cNvPr id="14" name="TextBox 13"/>
+          <p:cNvPr id="13" name="TextBox 12"/>
           <p:cNvSpPr txBox="1"/>
           <p:nvPr/>
         </p:nvSpPr>
@@ -14463,7 +14104,7 @@
       </p:sp>
       <p:sp>
         <p:nvSpPr>
-          <p:cNvPr id="15" name="Rounded Rectangle 14"/>
+          <p:cNvPr id="14" name="Rounded Rectangle 13"/>
           <p:cNvSpPr/>
           <p:nvPr/>
         </p:nvSpPr>
@@ -14510,7 +14151,7 @@
       </p:sp>
       <p:sp>
         <p:nvSpPr>
-          <p:cNvPr id="16" name="TextBox 15"/>
+          <p:cNvPr id="15" name="TextBox 14"/>
           <p:cNvSpPr txBox="1"/>
           <p:nvPr/>
         </p:nvSpPr>
@@ -14543,7 +14184,7 @@
       </p:sp>
       <p:sp>
         <p:nvSpPr>
-          <p:cNvPr id="17" name="Rounded Rectangle 16"/>
+          <p:cNvPr id="16" name="Rounded Rectangle 15"/>
           <p:cNvSpPr/>
           <p:nvPr/>
         </p:nvSpPr>
@@ -14588,7 +14229,7 @@
       </p:sp>
       <p:sp>
         <p:nvSpPr>
-          <p:cNvPr id="18" name="TextBox 17"/>
+          <p:cNvPr id="17" name="TextBox 16"/>
           <p:cNvSpPr txBox="1"/>
           <p:nvPr/>
         </p:nvSpPr>
@@ -14621,7 +14262,7 @@
       </p:sp>
       <p:sp>
         <p:nvSpPr>
-          <p:cNvPr id="19" name="Rounded Rectangle 18"/>
+          <p:cNvPr id="18" name="Rounded Rectangle 17"/>
           <p:cNvSpPr/>
           <p:nvPr/>
         </p:nvSpPr>
@@ -14668,7 +14309,7 @@
       </p:sp>
       <p:sp>
         <p:nvSpPr>
-          <p:cNvPr id="20" name="TextBox 19"/>
+          <p:cNvPr id="19" name="TextBox 18"/>
           <p:cNvSpPr txBox="1"/>
           <p:nvPr/>
         </p:nvSpPr>
@@ -14701,7 +14342,7 @@
       </p:sp>
       <p:sp>
         <p:nvSpPr>
-          <p:cNvPr id="21" name="Rounded Rectangle 20"/>
+          <p:cNvPr id="20" name="Rounded Rectangle 19"/>
           <p:cNvSpPr/>
           <p:nvPr/>
         </p:nvSpPr>
@@ -14746,7 +14387,7 @@
       </p:sp>
       <p:sp>
         <p:nvSpPr>
-          <p:cNvPr id="22" name="TextBox 21"/>
+          <p:cNvPr id="21" name="TextBox 20"/>
           <p:cNvSpPr txBox="1"/>
           <p:nvPr/>
         </p:nvSpPr>
@@ -14779,7 +14420,7 @@
       </p:sp>
       <p:sp>
         <p:nvSpPr>
-          <p:cNvPr id="23" name="Rounded Rectangle 22"/>
+          <p:cNvPr id="22" name="Rounded Rectangle 21"/>
           <p:cNvSpPr/>
           <p:nvPr/>
         </p:nvSpPr>
@@ -14826,7 +14467,7 @@
       </p:sp>
       <p:sp>
         <p:nvSpPr>
-          <p:cNvPr id="24" name="TextBox 23"/>
+          <p:cNvPr id="23" name="TextBox 22"/>
           <p:cNvSpPr txBox="1"/>
           <p:nvPr/>
         </p:nvSpPr>
@@ -14859,7 +14500,7 @@
       </p:sp>
       <p:sp>
         <p:nvSpPr>
-          <p:cNvPr id="25" name="Rounded Rectangle 24"/>
+          <p:cNvPr id="24" name="Rounded Rectangle 23"/>
           <p:cNvSpPr/>
           <p:nvPr/>
         </p:nvSpPr>
@@ -14904,7 +14545,7 @@
       </p:sp>
       <p:sp>
         <p:nvSpPr>
-          <p:cNvPr id="26" name="TextBox 25"/>
+          <p:cNvPr id="25" name="TextBox 24"/>
           <p:cNvSpPr txBox="1"/>
           <p:nvPr/>
         </p:nvSpPr>
@@ -14937,7 +14578,7 @@
       </p:sp>
       <p:sp>
         <p:nvSpPr>
-          <p:cNvPr id="27" name="Rounded Rectangle 26"/>
+          <p:cNvPr id="26" name="Rounded Rectangle 25"/>
           <p:cNvSpPr/>
           <p:nvPr/>
         </p:nvSpPr>
@@ -14984,7 +14625,7 @@
       </p:sp>
       <p:sp>
         <p:nvSpPr>
-          <p:cNvPr id="28" name="TextBox 27"/>
+          <p:cNvPr id="27" name="TextBox 26"/>
           <p:cNvSpPr txBox="1"/>
           <p:nvPr/>
         </p:nvSpPr>
@@ -15017,7 +14658,7 @@
       </p:sp>
       <p:sp>
         <p:nvSpPr>
-          <p:cNvPr id="29" name="Rounded Rectangle 28"/>
+          <p:cNvPr id="28" name="Rounded Rectangle 27"/>
           <p:cNvSpPr/>
           <p:nvPr/>
         </p:nvSpPr>
@@ -15062,7 +14703,7 @@
       </p:sp>
       <p:sp>
         <p:nvSpPr>
-          <p:cNvPr id="30" name="TextBox 29"/>
+          <p:cNvPr id="29" name="TextBox 28"/>
           <p:cNvSpPr txBox="1"/>
           <p:nvPr/>
         </p:nvSpPr>
@@ -15095,7 +14736,7 @@
       </p:sp>
       <p:sp>
         <p:nvSpPr>
-          <p:cNvPr id="31" name="Rounded Rectangle 30"/>
+          <p:cNvPr id="30" name="Rounded Rectangle 29"/>
           <p:cNvSpPr/>
           <p:nvPr/>
         </p:nvSpPr>
@@ -15142,7 +14783,7 @@
       </p:sp>
       <p:sp>
         <p:nvSpPr>
-          <p:cNvPr id="32" name="TextBox 31"/>
+          <p:cNvPr id="31" name="TextBox 30"/>
           <p:cNvSpPr txBox="1"/>
           <p:nvPr/>
         </p:nvSpPr>
@@ -15175,7 +14816,7 @@
       </p:sp>
       <p:sp>
         <p:nvSpPr>
-          <p:cNvPr id="33" name="Rounded Rectangle 32"/>
+          <p:cNvPr id="32" name="Rounded Rectangle 31"/>
           <p:cNvSpPr/>
           <p:nvPr/>
         </p:nvSpPr>
@@ -15220,7 +14861,7 @@
       </p:sp>
       <p:sp>
         <p:nvSpPr>
-          <p:cNvPr id="34" name="TextBox 33"/>
+          <p:cNvPr id="33" name="TextBox 32"/>
           <p:cNvSpPr txBox="1"/>
           <p:nvPr/>
         </p:nvSpPr>
@@ -15253,7 +14894,7 @@
       </p:sp>
       <p:sp>
         <p:nvSpPr>
-          <p:cNvPr id="35" name="Rounded Rectangle 34"/>
+          <p:cNvPr id="34" name="Rounded Rectangle 33"/>
           <p:cNvSpPr/>
           <p:nvPr/>
         </p:nvSpPr>
@@ -15300,7 +14941,7 @@
       </p:sp>
       <p:sp>
         <p:nvSpPr>
-          <p:cNvPr id="36" name="TextBox 35"/>
+          <p:cNvPr id="35" name="TextBox 34"/>
           <p:cNvSpPr txBox="1"/>
           <p:nvPr/>
         </p:nvSpPr>
@@ -15502,54 +15143,9 @@
           </a:prstGeom>
         </p:spPr>
       </p:pic>
-      <p:sp>
-        <p:nvSpPr>
-          <p:cNvPr id="6" name="Rounded Rectangle 5"/>
-          <p:cNvSpPr/>
-          <p:nvPr/>
-        </p:nvSpPr>
-        <p:spPr>
-          <a:xfrm>
-            <a:off x="10684931" y="109728"/>
-            <a:ext cx="1195868" cy="530352"/>
-          </a:xfrm>
-          <a:prstGeom prst="roundRect">
-            <a:avLst>
-              <a:gd name="adj" fmla="val 8000"/>
-            </a:avLst>
-          </a:prstGeom>
-          <a:solidFill>
-            <a:srgbClr val="000000"/>
-          </a:solidFill>
-          <a:ln>
-            <a:noFill/>
-          </a:ln>
-        </p:spPr>
-        <p:style>
-          <a:lnRef idx="1">
-            <a:schemeClr val="accent1"/>
-          </a:lnRef>
-          <a:fillRef idx="3">
-            <a:schemeClr val="accent1"/>
-          </a:fillRef>
-          <a:effectRef idx="2">
-            <a:schemeClr val="accent1"/>
-          </a:effectRef>
-          <a:fontRef idx="minor">
-            <a:schemeClr val="lt1"/>
-          </a:fontRef>
-        </p:style>
-        <p:txBody>
-          <a:bodyPr rtlCol="0" anchor="ctr"/>
-          <a:lstStyle/>
-          <a:p>
-            <a:pPr algn="ctr"/>
-          </a:p>
-        </p:txBody>
-      </p:sp>
       <p:pic>
         <p:nvPicPr>
-          <p:cNvPr id="7" name="Picture 6" descr="mef-logo.png"/>
+          <p:cNvPr id="6" name="Picture 5" descr="mef-logo.png"/>
           <p:cNvPicPr>
             <a:picLocks noChangeAspect="1"/>
           </p:cNvPicPr>
@@ -15563,8 +15159,8 @@
         </p:blipFill>
         <p:spPr>
           <a:xfrm>
-            <a:off x="10758083" y="146304"/>
-            <a:ext cx="1122717" cy="457200"/>
+            <a:off x="10613115" y="128016"/>
+            <a:ext cx="1231108" cy="475488"/>
           </a:xfrm>
           <a:prstGeom prst="rect">
             <a:avLst/>
@@ -15573,7 +15169,7 @@
       </p:pic>
       <p:sp>
         <p:nvSpPr>
-          <p:cNvPr id="8" name="TextBox 7"/>
+          <p:cNvPr id="7" name="TextBox 6"/>
           <p:cNvSpPr txBox="1"/>
           <p:nvPr/>
         </p:nvSpPr>
@@ -15599,14 +15195,14 @@
                 </a:solidFill>
                 <a:latin typeface="Calibri"/>
               </a:rPr>
-              <a:t>Partie 5  ·  Architecture technique</a:t>
-            </a:r>
-          </a:p>
-        </p:txBody>
-      </p:sp>
-      <p:sp>
-        <p:nvSpPr>
-          <p:cNvPr id="9" name="TextBox 8"/>
+              <a:t>Partie 4  ·  Architecture technique</a:t>
+            </a:r>
+          </a:p>
+        </p:txBody>
+      </p:sp>
+      <p:sp>
+        <p:nvSpPr>
+          <p:cNvPr id="8" name="TextBox 7"/>
           <p:cNvSpPr txBox="1"/>
           <p:nvPr/>
         </p:nvSpPr>
@@ -15639,7 +15235,7 @@
       </p:sp>
       <p:sp>
         <p:nvSpPr>
-          <p:cNvPr id="10" name="Rectangle 9"/>
+          <p:cNvPr id="9" name="Rectangle 8"/>
           <p:cNvSpPr/>
           <p:nvPr/>
         </p:nvSpPr>
@@ -15682,7 +15278,7 @@
       </p:sp>
       <p:sp>
         <p:nvSpPr>
-          <p:cNvPr id="11" name="TextBox 10"/>
+          <p:cNvPr id="10" name="TextBox 9"/>
           <p:cNvSpPr txBox="1"/>
           <p:nvPr/>
         </p:nvSpPr>
@@ -15715,7 +15311,7 @@
       </p:sp>
       <p:sp>
         <p:nvSpPr>
-          <p:cNvPr id="12" name="TextBox 11"/>
+          <p:cNvPr id="11" name="TextBox 10"/>
           <p:cNvSpPr txBox="1"/>
           <p:nvPr/>
         </p:nvSpPr>
@@ -15748,7 +15344,7 @@
       </p:sp>
       <p:sp>
         <p:nvSpPr>
-          <p:cNvPr id="13" name="Oval 12"/>
+          <p:cNvPr id="12" name="Oval 11"/>
           <p:cNvSpPr/>
           <p:nvPr/>
         </p:nvSpPr>
@@ -15791,7 +15387,7 @@
       </p:sp>
       <p:sp>
         <p:nvSpPr>
-          <p:cNvPr id="14" name="TextBox 13"/>
+          <p:cNvPr id="13" name="TextBox 12"/>
           <p:cNvSpPr txBox="1"/>
           <p:nvPr/>
         </p:nvSpPr>
@@ -15824,7 +15420,7 @@
       </p:sp>
       <p:sp>
         <p:nvSpPr>
-          <p:cNvPr id="15" name="TextBox 14"/>
+          <p:cNvPr id="14" name="TextBox 13"/>
           <p:cNvSpPr txBox="1"/>
           <p:nvPr/>
         </p:nvSpPr>
@@ -15857,7 +15453,7 @@
       </p:sp>
       <p:sp>
         <p:nvSpPr>
-          <p:cNvPr id="16" name="TextBox 15"/>
+          <p:cNvPr id="15" name="TextBox 14"/>
           <p:cNvSpPr txBox="1"/>
           <p:nvPr/>
         </p:nvSpPr>
@@ -15890,7 +15486,7 @@
       </p:sp>
       <p:sp>
         <p:nvSpPr>
-          <p:cNvPr id="17" name="Oval 16"/>
+          <p:cNvPr id="16" name="Oval 15"/>
           <p:cNvSpPr/>
           <p:nvPr/>
         </p:nvSpPr>
@@ -15933,7 +15529,7 @@
       </p:sp>
       <p:sp>
         <p:nvSpPr>
-          <p:cNvPr id="18" name="TextBox 17"/>
+          <p:cNvPr id="17" name="TextBox 16"/>
           <p:cNvSpPr txBox="1"/>
           <p:nvPr/>
         </p:nvSpPr>
@@ -15966,7 +15562,7 @@
       </p:sp>
       <p:sp>
         <p:nvSpPr>
-          <p:cNvPr id="19" name="TextBox 18"/>
+          <p:cNvPr id="18" name="TextBox 17"/>
           <p:cNvSpPr txBox="1"/>
           <p:nvPr/>
         </p:nvSpPr>
@@ -15999,7 +15595,7 @@
       </p:sp>
       <p:sp>
         <p:nvSpPr>
-          <p:cNvPr id="20" name="TextBox 19"/>
+          <p:cNvPr id="19" name="TextBox 18"/>
           <p:cNvSpPr txBox="1"/>
           <p:nvPr/>
         </p:nvSpPr>
@@ -16032,7 +15628,7 @@
       </p:sp>
       <p:sp>
         <p:nvSpPr>
-          <p:cNvPr id="21" name="Oval 20"/>
+          <p:cNvPr id="20" name="Oval 19"/>
           <p:cNvSpPr/>
           <p:nvPr/>
         </p:nvSpPr>
@@ -16075,7 +15671,7 @@
       </p:sp>
       <p:sp>
         <p:nvSpPr>
-          <p:cNvPr id="22" name="TextBox 21"/>
+          <p:cNvPr id="21" name="TextBox 20"/>
           <p:cNvSpPr txBox="1"/>
           <p:nvPr/>
         </p:nvSpPr>
@@ -16108,7 +15704,7 @@
       </p:sp>
       <p:sp>
         <p:nvSpPr>
-          <p:cNvPr id="23" name="TextBox 22"/>
+          <p:cNvPr id="22" name="TextBox 21"/>
           <p:cNvSpPr txBox="1"/>
           <p:nvPr/>
         </p:nvSpPr>
@@ -16141,7 +15737,7 @@
       </p:sp>
       <p:sp>
         <p:nvSpPr>
-          <p:cNvPr id="24" name="TextBox 23"/>
+          <p:cNvPr id="23" name="TextBox 22"/>
           <p:cNvSpPr txBox="1"/>
           <p:nvPr/>
         </p:nvSpPr>
@@ -16174,7 +15770,7 @@
       </p:sp>
       <p:sp>
         <p:nvSpPr>
-          <p:cNvPr id="25" name="Oval 24"/>
+          <p:cNvPr id="24" name="Oval 23"/>
           <p:cNvSpPr/>
           <p:nvPr/>
         </p:nvSpPr>
@@ -16217,7 +15813,7 @@
       </p:sp>
       <p:sp>
         <p:nvSpPr>
-          <p:cNvPr id="26" name="TextBox 25"/>
+          <p:cNvPr id="25" name="TextBox 24"/>
           <p:cNvSpPr txBox="1"/>
           <p:nvPr/>
         </p:nvSpPr>
@@ -16250,7 +15846,7 @@
       </p:sp>
       <p:sp>
         <p:nvSpPr>
-          <p:cNvPr id="27" name="TextBox 26"/>
+          <p:cNvPr id="26" name="TextBox 25"/>
           <p:cNvSpPr txBox="1"/>
           <p:nvPr/>
         </p:nvSpPr>
@@ -16283,7 +15879,7 @@
       </p:sp>
       <p:sp>
         <p:nvSpPr>
-          <p:cNvPr id="28" name="TextBox 27"/>
+          <p:cNvPr id="27" name="TextBox 26"/>
           <p:cNvSpPr txBox="1"/>
           <p:nvPr/>
         </p:nvSpPr>
@@ -16316,7 +15912,7 @@
       </p:sp>
       <p:sp>
         <p:nvSpPr>
-          <p:cNvPr id="29" name="Rounded Rectangle 28"/>
+          <p:cNvPr id="28" name="Rounded Rectangle 27"/>
           <p:cNvSpPr/>
           <p:nvPr/>
         </p:nvSpPr>
@@ -16363,7 +15959,7 @@
       </p:sp>
       <p:sp>
         <p:nvSpPr>
-          <p:cNvPr id="30" name="TextBox 29"/>
+          <p:cNvPr id="29" name="TextBox 28"/>
           <p:cNvSpPr txBox="1"/>
           <p:nvPr/>
         </p:nvSpPr>
@@ -16396,7 +15992,7 @@
       </p:sp>
       <p:sp>
         <p:nvSpPr>
-          <p:cNvPr id="31" name="TextBox 30"/>
+          <p:cNvPr id="30" name="TextBox 29"/>
           <p:cNvSpPr txBox="1"/>
           <p:nvPr/>
         </p:nvSpPr>
@@ -16423,7 +16019,7 @@
                 <a:latin typeface="Calibri"/>
               </a:rPr>
               <a:t>GESTIONNAIRE
-Lecture + écriture métier, run, envoi.
+Lecture et écriture métier, répartition, envoi.
 ADMINISTRATEUR
 Lecture métier. Seul à gérer les comptes.
 Pas de jeton de rafraîchissement : un choix simple, une limite assumée.</a:t>
@@ -16433,7 +16029,7 @@
       </p:sp>
       <p:sp>
         <p:nvSpPr>
-          <p:cNvPr id="32" name="Rounded Rectangle 31"/>
+          <p:cNvPr id="31" name="Rounded Rectangle 30"/>
           <p:cNvSpPr/>
           <p:nvPr/>
         </p:nvSpPr>
@@ -16478,7 +16074,7 @@
       </p:sp>
       <p:sp>
         <p:nvSpPr>
-          <p:cNvPr id="33" name="TextBox 32"/>
+          <p:cNvPr id="32" name="TextBox 31"/>
           <p:cNvSpPr txBox="1"/>
           <p:nvPr/>
         </p:nvSpPr>
@@ -16681,54 +16277,9 @@
           </a:prstGeom>
         </p:spPr>
       </p:pic>
-      <p:sp>
-        <p:nvSpPr>
-          <p:cNvPr id="6" name="Rounded Rectangle 5"/>
-          <p:cNvSpPr/>
-          <p:nvPr/>
-        </p:nvSpPr>
-        <p:spPr>
-          <a:xfrm>
-            <a:off x="10684931" y="109728"/>
-            <a:ext cx="1195868" cy="530352"/>
-          </a:xfrm>
-          <a:prstGeom prst="roundRect">
-            <a:avLst>
-              <a:gd name="adj" fmla="val 8000"/>
-            </a:avLst>
-          </a:prstGeom>
-          <a:solidFill>
-            <a:srgbClr val="000000"/>
-          </a:solidFill>
-          <a:ln>
-            <a:noFill/>
-          </a:ln>
-        </p:spPr>
-        <p:style>
-          <a:lnRef idx="1">
-            <a:schemeClr val="accent1"/>
-          </a:lnRef>
-          <a:fillRef idx="3">
-            <a:schemeClr val="accent1"/>
-          </a:fillRef>
-          <a:effectRef idx="2">
-            <a:schemeClr val="accent1"/>
-          </a:effectRef>
-          <a:fontRef idx="minor">
-            <a:schemeClr val="lt1"/>
-          </a:fontRef>
-        </p:style>
-        <p:txBody>
-          <a:bodyPr rtlCol="0" anchor="ctr"/>
-          <a:lstStyle/>
-          <a:p>
-            <a:pPr algn="ctr"/>
-          </a:p>
-        </p:txBody>
-      </p:sp>
       <p:pic>
         <p:nvPicPr>
-          <p:cNvPr id="7" name="Picture 6" descr="mef-logo.png"/>
+          <p:cNvPr id="6" name="Picture 5" descr="mef-logo.png"/>
           <p:cNvPicPr>
             <a:picLocks noChangeAspect="1"/>
           </p:cNvPicPr>
@@ -16742,8 +16293,8 @@
         </p:blipFill>
         <p:spPr>
           <a:xfrm>
-            <a:off x="10758083" y="146304"/>
-            <a:ext cx="1122717" cy="457200"/>
+            <a:off x="10613115" y="128016"/>
+            <a:ext cx="1231108" cy="475488"/>
           </a:xfrm>
           <a:prstGeom prst="rect">
             <a:avLst/>
@@ -16752,7 +16303,7 @@
       </p:pic>
       <p:sp>
         <p:nvSpPr>
-          <p:cNvPr id="8" name="TextBox 7"/>
+          <p:cNvPr id="7" name="TextBox 6"/>
           <p:cNvSpPr txBox="1"/>
           <p:nvPr/>
         </p:nvSpPr>
@@ -16778,14 +16329,14 @@
                 </a:solidFill>
                 <a:latin typeface="Calibri"/>
               </a:rPr>
-              <a:t>Partie 5  ·  Architecture technique</a:t>
-            </a:r>
-          </a:p>
-        </p:txBody>
-      </p:sp>
-      <p:sp>
-        <p:nvSpPr>
-          <p:cNvPr id="9" name="TextBox 8"/>
+              <a:t>Partie 4  ·  Architecture technique</a:t>
+            </a:r>
+          </a:p>
+        </p:txBody>
+      </p:sp>
+      <p:sp>
+        <p:nvSpPr>
+          <p:cNvPr id="8" name="TextBox 7"/>
           <p:cNvSpPr txBox="1"/>
           <p:nvPr/>
         </p:nvSpPr>
@@ -16818,7 +16369,7 @@
       </p:sp>
       <p:sp>
         <p:nvSpPr>
-          <p:cNvPr id="10" name="Rectangle 9"/>
+          <p:cNvPr id="9" name="Rectangle 8"/>
           <p:cNvSpPr/>
           <p:nvPr/>
         </p:nvSpPr>
@@ -16861,7 +16412,7 @@
       </p:sp>
       <p:sp>
         <p:nvSpPr>
-          <p:cNvPr id="11" name="TextBox 10"/>
+          <p:cNvPr id="10" name="TextBox 9"/>
           <p:cNvSpPr txBox="1"/>
           <p:nvPr/>
         </p:nvSpPr>
@@ -16894,7 +16445,7 @@
       </p:sp>
       <p:sp>
         <p:nvSpPr>
-          <p:cNvPr id="12" name="TextBox 11"/>
+          <p:cNvPr id="11" name="TextBox 10"/>
           <p:cNvSpPr txBox="1"/>
           <p:nvPr/>
         </p:nvSpPr>
@@ -16927,7 +16478,7 @@
       </p:sp>
       <p:sp>
         <p:nvSpPr>
-          <p:cNvPr id="13" name="Rounded Rectangle 12"/>
+          <p:cNvPr id="12" name="Rounded Rectangle 11"/>
           <p:cNvSpPr/>
           <p:nvPr/>
         </p:nvSpPr>
@@ -16974,7 +16525,7 @@
       </p:sp>
       <p:sp>
         <p:nvSpPr>
-          <p:cNvPr id="14" name="TextBox 13"/>
+          <p:cNvPr id="13" name="TextBox 12"/>
           <p:cNvSpPr txBox="1"/>
           <p:nvPr/>
         </p:nvSpPr>
@@ -17007,7 +16558,7 @@
       </p:sp>
       <p:sp>
         <p:nvSpPr>
-          <p:cNvPr id="15" name="TextBox 14"/>
+          <p:cNvPr id="14" name="TextBox 13"/>
           <p:cNvSpPr txBox="1"/>
           <p:nvPr/>
         </p:nvSpPr>
@@ -17040,7 +16591,7 @@
       </p:sp>
       <p:sp>
         <p:nvSpPr>
-          <p:cNvPr id="16" name="Rounded Rectangle 15"/>
+          <p:cNvPr id="15" name="Rounded Rectangle 14"/>
           <p:cNvSpPr/>
           <p:nvPr/>
         </p:nvSpPr>
@@ -17087,7 +16638,7 @@
       </p:sp>
       <p:sp>
         <p:nvSpPr>
-          <p:cNvPr id="17" name="TextBox 16"/>
+          <p:cNvPr id="16" name="TextBox 15"/>
           <p:cNvSpPr txBox="1"/>
           <p:nvPr/>
         </p:nvSpPr>
@@ -17120,7 +16671,7 @@
       </p:sp>
       <p:sp>
         <p:nvSpPr>
-          <p:cNvPr id="18" name="TextBox 17"/>
+          <p:cNvPr id="17" name="TextBox 16"/>
           <p:cNvSpPr txBox="1"/>
           <p:nvPr/>
         </p:nvSpPr>
@@ -17153,7 +16704,7 @@
       </p:sp>
       <p:sp>
         <p:nvSpPr>
-          <p:cNvPr id="19" name="Rounded Rectangle 18"/>
+          <p:cNvPr id="18" name="Rounded Rectangle 17"/>
           <p:cNvSpPr/>
           <p:nvPr/>
         </p:nvSpPr>
@@ -17200,7 +16751,7 @@
       </p:sp>
       <p:sp>
         <p:nvSpPr>
-          <p:cNvPr id="20" name="TextBox 19"/>
+          <p:cNvPr id="19" name="TextBox 18"/>
           <p:cNvSpPr txBox="1"/>
           <p:nvPr/>
         </p:nvSpPr>
@@ -17233,7 +16784,7 @@
       </p:sp>
       <p:sp>
         <p:nvSpPr>
-          <p:cNvPr id="21" name="TextBox 20"/>
+          <p:cNvPr id="20" name="TextBox 19"/>
           <p:cNvSpPr txBox="1"/>
           <p:nvPr/>
         </p:nvSpPr>
@@ -17266,7 +16817,7 @@
       </p:sp>
       <p:sp>
         <p:nvSpPr>
-          <p:cNvPr id="22" name="Rounded Rectangle 21"/>
+          <p:cNvPr id="21" name="Rounded Rectangle 20"/>
           <p:cNvSpPr/>
           <p:nvPr/>
         </p:nvSpPr>
@@ -17313,7 +16864,7 @@
       </p:sp>
       <p:sp>
         <p:nvSpPr>
-          <p:cNvPr id="23" name="TextBox 22"/>
+          <p:cNvPr id="22" name="TextBox 21"/>
           <p:cNvSpPr txBox="1"/>
           <p:nvPr/>
         </p:nvSpPr>
@@ -17346,7 +16897,7 @@
       </p:sp>
       <p:sp>
         <p:nvSpPr>
-          <p:cNvPr id="24" name="TextBox 23"/>
+          <p:cNvPr id="23" name="TextBox 22"/>
           <p:cNvSpPr txBox="1"/>
           <p:nvPr/>
         </p:nvSpPr>
@@ -17379,7 +16930,7 @@
       </p:sp>
       <p:sp>
         <p:nvSpPr>
-          <p:cNvPr id="25" name="Rounded Rectangle 24"/>
+          <p:cNvPr id="24" name="Rounded Rectangle 23"/>
           <p:cNvSpPr/>
           <p:nvPr/>
         </p:nvSpPr>
@@ -17426,7 +16977,7 @@
       </p:sp>
       <p:pic>
         <p:nvPicPr>
-          <p:cNvPr id="26" name="Picture 25" descr="seq-repartition.png"/>
+          <p:cNvPr id="25" name="Picture 24" descr="seq-repartition.png"/>
           <p:cNvPicPr>
             <a:picLocks noChangeAspect="1"/>
           </p:cNvPicPr>
@@ -17619,54 +17170,9 @@
           </a:prstGeom>
         </p:spPr>
       </p:pic>
-      <p:sp>
-        <p:nvSpPr>
-          <p:cNvPr id="6" name="Rounded Rectangle 5"/>
-          <p:cNvSpPr/>
-          <p:nvPr/>
-        </p:nvSpPr>
-        <p:spPr>
-          <a:xfrm>
-            <a:off x="10684931" y="109728"/>
-            <a:ext cx="1195868" cy="530352"/>
-          </a:xfrm>
-          <a:prstGeom prst="roundRect">
-            <a:avLst>
-              <a:gd name="adj" fmla="val 8000"/>
-            </a:avLst>
-          </a:prstGeom>
-          <a:solidFill>
-            <a:srgbClr val="000000"/>
-          </a:solidFill>
-          <a:ln>
-            <a:noFill/>
-          </a:ln>
-        </p:spPr>
-        <p:style>
-          <a:lnRef idx="1">
-            <a:schemeClr val="accent1"/>
-          </a:lnRef>
-          <a:fillRef idx="3">
-            <a:schemeClr val="accent1"/>
-          </a:fillRef>
-          <a:effectRef idx="2">
-            <a:schemeClr val="accent1"/>
-          </a:effectRef>
-          <a:fontRef idx="minor">
-            <a:schemeClr val="lt1"/>
-          </a:fontRef>
-        </p:style>
-        <p:txBody>
-          <a:bodyPr rtlCol="0" anchor="ctr"/>
-          <a:lstStyle/>
-          <a:p>
-            <a:pPr algn="ctr"/>
-          </a:p>
-        </p:txBody>
-      </p:sp>
       <p:pic>
         <p:nvPicPr>
-          <p:cNvPr id="7" name="Picture 6" descr="mef-logo.png"/>
+          <p:cNvPr id="6" name="Picture 5" descr="mef-logo.png"/>
           <p:cNvPicPr>
             <a:picLocks noChangeAspect="1"/>
           </p:cNvPicPr>
@@ -17680,8 +17186,8 @@
         </p:blipFill>
         <p:spPr>
           <a:xfrm>
-            <a:off x="10758083" y="146304"/>
-            <a:ext cx="1122717" cy="457200"/>
+            <a:off x="10613115" y="128016"/>
+            <a:ext cx="1231108" cy="475488"/>
           </a:xfrm>
           <a:prstGeom prst="rect">
             <a:avLst/>
@@ -17690,7 +17196,7 @@
       </p:pic>
       <p:sp>
         <p:nvSpPr>
-          <p:cNvPr id="8" name="TextBox 7"/>
+          <p:cNvPr id="7" name="TextBox 6"/>
           <p:cNvSpPr txBox="1"/>
           <p:nvPr/>
         </p:nvSpPr>
@@ -17716,14 +17222,14 @@
                 </a:solidFill>
                 <a:latin typeface="Calibri"/>
               </a:rPr>
-              <a:t>Partie 5  ·  Architecture technique</a:t>
-            </a:r>
-          </a:p>
-        </p:txBody>
-      </p:sp>
-      <p:sp>
-        <p:nvSpPr>
-          <p:cNvPr id="9" name="TextBox 8"/>
+              <a:t>Partie 4  ·  Architecture technique</a:t>
+            </a:r>
+          </a:p>
+        </p:txBody>
+      </p:sp>
+      <p:sp>
+        <p:nvSpPr>
+          <p:cNvPr id="8" name="TextBox 7"/>
           <p:cNvSpPr txBox="1"/>
           <p:nvPr/>
         </p:nvSpPr>
@@ -17756,7 +17262,7 @@
       </p:sp>
       <p:sp>
         <p:nvSpPr>
-          <p:cNvPr id="10" name="Rectangle 9"/>
+          <p:cNvPr id="9" name="Rectangle 8"/>
           <p:cNvSpPr/>
           <p:nvPr/>
         </p:nvSpPr>
@@ -17799,7 +17305,7 @@
       </p:sp>
       <p:sp>
         <p:nvSpPr>
-          <p:cNvPr id="11" name="TextBox 10"/>
+          <p:cNvPr id="10" name="TextBox 9"/>
           <p:cNvSpPr txBox="1"/>
           <p:nvPr/>
         </p:nvSpPr>
@@ -17832,7 +17338,7 @@
       </p:sp>
       <p:sp>
         <p:nvSpPr>
-          <p:cNvPr id="12" name="TextBox 11"/>
+          <p:cNvPr id="11" name="TextBox 10"/>
           <p:cNvSpPr txBox="1"/>
           <p:nvPr/>
         </p:nvSpPr>
@@ -17865,7 +17371,7 @@
       </p:sp>
       <p:sp>
         <p:nvSpPr>
-          <p:cNvPr id="13" name="TextBox 12"/>
+          <p:cNvPr id="12" name="TextBox 11"/>
           <p:cNvSpPr txBox="1"/>
           <p:nvPr/>
         </p:nvSpPr>
@@ -17898,7 +17404,7 @@
       </p:sp>
       <p:sp>
         <p:nvSpPr>
-          <p:cNvPr id="14" name="Rounded Rectangle 13"/>
+          <p:cNvPr id="13" name="Rounded Rectangle 12"/>
           <p:cNvSpPr/>
           <p:nvPr/>
         </p:nvSpPr>
@@ -17945,7 +17451,7 @@
       </p:sp>
       <p:pic>
         <p:nvPicPr>
-          <p:cNvPr id="15" name="Picture 14" descr="java-logo.png"/>
+          <p:cNvPr id="14" name="Picture 13" descr="java-logo.png"/>
           <p:cNvPicPr>
             <a:picLocks noChangeAspect="1"/>
           </p:cNvPicPr>
@@ -17959,8 +17465,8 @@
         </p:blipFill>
         <p:spPr>
           <a:xfrm>
-            <a:off x="693985708800" y="1655532365158"/>
-            <a:ext cx="1188720" cy="666843"/>
+            <a:off x="694944" y="1962391"/>
+            <a:ext cx="1316736" cy="738657"/>
           </a:xfrm>
           <a:prstGeom prst="rect">
             <a:avLst/>
@@ -17969,7 +17475,7 @@
       </p:pic>
       <p:sp>
         <p:nvSpPr>
-          <p:cNvPr id="16" name="TextBox 15"/>
+          <p:cNvPr id="15" name="TextBox 14"/>
           <p:cNvSpPr txBox="1"/>
           <p:nvPr/>
         </p:nvSpPr>
@@ -18002,7 +17508,7 @@
       </p:sp>
       <p:sp>
         <p:nvSpPr>
-          <p:cNvPr id="17" name="Rounded Rectangle 16"/>
+          <p:cNvPr id="16" name="Rounded Rectangle 15"/>
           <p:cNvSpPr/>
           <p:nvPr/>
         </p:nvSpPr>
@@ -18049,7 +17555,7 @@
       </p:sp>
       <p:pic>
         <p:nvPicPr>
-          <p:cNvPr id="18" name="Picture 17" descr="spring-boot-logo.png"/>
+          <p:cNvPr id="17" name="Picture 16" descr="spring-boot-logo.png"/>
           <p:cNvPicPr>
             <a:picLocks noChangeAspect="1"/>
           </p:cNvPicPr>
@@ -18063,8 +17569,8 @@
         </p:blipFill>
         <p:spPr>
           <a:xfrm>
-            <a:off x="2466575780580" y="1655532172800"/>
-            <a:ext cx="1051560" cy="1051560"/>
+            <a:off x="2752344" y="1792224"/>
+            <a:ext cx="1078992" cy="1078992"/>
           </a:xfrm>
           <a:prstGeom prst="rect">
             <a:avLst/>
@@ -18073,7 +17579,7 @@
       </p:pic>
       <p:sp>
         <p:nvSpPr>
-          <p:cNvPr id="19" name="TextBox 18"/>
+          <p:cNvPr id="18" name="TextBox 17"/>
           <p:cNvSpPr txBox="1"/>
           <p:nvPr/>
         </p:nvSpPr>
@@ -18106,7 +17612,7 @@
       </p:sp>
       <p:sp>
         <p:nvSpPr>
-          <p:cNvPr id="20" name="Rounded Rectangle 19"/>
+          <p:cNvPr id="19" name="Rounded Rectangle 18"/>
           <p:cNvSpPr/>
           <p:nvPr/>
         </p:nvSpPr>
@@ -18153,7 +17659,7 @@
       </p:sp>
       <p:pic>
         <p:nvPicPr>
-          <p:cNvPr id="21" name="Picture 20" descr="spring-cloud-logo.jpg"/>
+          <p:cNvPr id="20" name="Picture 19" descr="spring-cloud-logo.jpg"/>
           <p:cNvPicPr>
             <a:picLocks noChangeAspect="1"/>
           </p:cNvPicPr>
@@ -18167,8 +17673,8 @@
         </p:blipFill>
         <p:spPr>
           <a:xfrm>
-            <a:off x="4239165759483" y="1655532172800"/>
-            <a:ext cx="1100153" cy="1051560"/>
+            <a:off x="4665941" y="1792224"/>
+            <a:ext cx="1128852" cy="1078991"/>
           </a:xfrm>
           <a:prstGeom prst="rect">
             <a:avLst/>
@@ -18177,7 +17683,7 @@
       </p:pic>
       <p:sp>
         <p:nvSpPr>
-          <p:cNvPr id="22" name="TextBox 21"/>
+          <p:cNvPr id="21" name="TextBox 20"/>
           <p:cNvSpPr txBox="1"/>
           <p:nvPr/>
         </p:nvSpPr>
@@ -18210,7 +17716,7 @@
       </p:sp>
       <p:sp>
         <p:nvSpPr>
-          <p:cNvPr id="23" name="Rounded Rectangle 22"/>
+          <p:cNvPr id="22" name="Rounded Rectangle 21"/>
           <p:cNvSpPr/>
           <p:nvPr/>
         </p:nvSpPr>
@@ -18257,7 +17763,7 @@
       </p:sp>
       <p:pic>
         <p:nvPicPr>
-          <p:cNvPr id="24" name="Picture 23" descr="spring-security-logo.jpg"/>
+          <p:cNvPr id="23" name="Picture 22" descr="spring-security-logo.jpg"/>
           <p:cNvPicPr>
             <a:picLocks noChangeAspect="1"/>
           </p:cNvPicPr>
@@ -18271,8 +17777,8 @@
         </p:blipFill>
         <p:spPr>
           <a:xfrm>
-            <a:off x="6011755718400" y="1655532377239"/>
-            <a:ext cx="1188720" cy="642682"/>
+            <a:off x="6510528" y="1975773"/>
+            <a:ext cx="1316736" cy="711894"/>
           </a:xfrm>
           <a:prstGeom prst="rect">
             <a:avLst/>
@@ -18281,7 +17787,7 @@
       </p:pic>
       <p:sp>
         <p:nvSpPr>
-          <p:cNvPr id="25" name="TextBox 24"/>
+          <p:cNvPr id="24" name="TextBox 23"/>
           <p:cNvSpPr txBox="1"/>
           <p:nvPr/>
         </p:nvSpPr>
@@ -18314,7 +17820,7 @@
       </p:sp>
       <p:sp>
         <p:nvSpPr>
-          <p:cNvPr id="26" name="Rounded Rectangle 25"/>
+          <p:cNvPr id="25" name="Rounded Rectangle 24"/>
           <p:cNvSpPr/>
           <p:nvPr/>
         </p:nvSpPr>
@@ -18361,7 +17867,7 @@
       </p:sp>
       <p:pic>
         <p:nvPicPr>
-          <p:cNvPr id="27" name="Picture 26" descr="postgresql-logo.png"/>
+          <p:cNvPr id="26" name="Picture 25" descr="postgresql-logo.png"/>
           <p:cNvPicPr>
             <a:picLocks noChangeAspect="1"/>
           </p:cNvPicPr>
@@ -18375,8 +17881,8 @@
         </p:blipFill>
         <p:spPr>
           <a:xfrm>
-            <a:off x="7784345842371" y="1655532172800"/>
-            <a:ext cx="947177" cy="1051560"/>
+            <a:off x="8621480" y="1792224"/>
+            <a:ext cx="971886" cy="1078992"/>
           </a:xfrm>
           <a:prstGeom prst="rect">
             <a:avLst/>
@@ -18385,7 +17891,7 @@
       </p:pic>
       <p:sp>
         <p:nvSpPr>
-          <p:cNvPr id="28" name="TextBox 27"/>
+          <p:cNvPr id="27" name="TextBox 26"/>
           <p:cNvSpPr txBox="1"/>
           <p:nvPr/>
         </p:nvSpPr>
@@ -18418,7 +17924,7 @@
       </p:sp>
       <p:sp>
         <p:nvSpPr>
-          <p:cNvPr id="29" name="Rounded Rectangle 28"/>
+          <p:cNvPr id="28" name="Rounded Rectangle 27"/>
           <p:cNvSpPr/>
           <p:nvPr/>
         </p:nvSpPr>
@@ -18465,7 +17971,7 @@
       </p:sp>
       <p:pic>
         <p:nvPicPr>
-          <p:cNvPr id="30" name="Picture 29" descr="maven-logo.png"/>
+          <p:cNvPr id="29" name="Picture 28" descr="maven-logo.png"/>
           <p:cNvPicPr>
             <a:picLocks noChangeAspect="1"/>
           </p:cNvPicPr>
@@ -18479,8 +17985,8 @@
         </p:blipFill>
         <p:spPr>
           <a:xfrm>
-            <a:off x="9556935724800" y="1655532529673"/>
-            <a:ext cx="1188720" cy="337813"/>
+            <a:off x="10387584" y="2144623"/>
+            <a:ext cx="1316736" cy="374193"/>
           </a:xfrm>
           <a:prstGeom prst="rect">
             <a:avLst/>
@@ -18489,7 +17995,7 @@
       </p:pic>
       <p:sp>
         <p:nvSpPr>
-          <p:cNvPr id="31" name="TextBox 30"/>
+          <p:cNvPr id="30" name="TextBox 29"/>
           <p:cNvSpPr txBox="1"/>
           <p:nvPr/>
         </p:nvSpPr>
@@ -18522,7 +18028,7 @@
       </p:sp>
       <p:sp>
         <p:nvSpPr>
-          <p:cNvPr id="32" name="TextBox 31"/>
+          <p:cNvPr id="31" name="TextBox 30"/>
           <p:cNvSpPr txBox="1"/>
           <p:nvPr/>
         </p:nvSpPr>
@@ -18555,7 +18061,7 @@
       </p:sp>
       <p:sp>
         <p:nvSpPr>
-          <p:cNvPr id="33" name="Rounded Rectangle 32"/>
+          <p:cNvPr id="32" name="Rounded Rectangle 31"/>
           <p:cNvSpPr/>
           <p:nvPr/>
         </p:nvSpPr>
@@ -18602,7 +18108,7 @@
       </p:sp>
       <p:pic>
         <p:nvPicPr>
-          <p:cNvPr id="34" name="Picture 33" descr="apache-poi-logo.png"/>
+          <p:cNvPr id="33" name="Picture 32" descr="apache-poi-logo.png"/>
           <p:cNvPicPr>
             <a:picLocks noChangeAspect="1"/>
           </p:cNvPicPr>
@@ -18616,8 +18122,8 @@
         </p:blipFill>
         <p:spPr>
           <a:xfrm>
-            <a:off x="693985708800" y="3913076173977"/>
-            <a:ext cx="1188720" cy="793204"/>
+            <a:off x="694944" y="4361286"/>
+            <a:ext cx="1316736" cy="878626"/>
           </a:xfrm>
           <a:prstGeom prst="rect">
             <a:avLst/>
@@ -18626,7 +18132,7 @@
       </p:pic>
       <p:sp>
         <p:nvSpPr>
-          <p:cNvPr id="35" name="TextBox 34"/>
+          <p:cNvPr id="34" name="TextBox 33"/>
           <p:cNvSpPr txBox="1"/>
           <p:nvPr/>
         </p:nvSpPr>
@@ -18659,7 +18165,7 @@
       </p:sp>
       <p:sp>
         <p:nvSpPr>
-          <p:cNvPr id="36" name="Rounded Rectangle 35"/>
+          <p:cNvPr id="35" name="Rounded Rectangle 34"/>
           <p:cNvSpPr/>
           <p:nvPr/>
         </p:nvSpPr>
@@ -18706,7 +18212,7 @@
       </p:sp>
       <p:pic>
         <p:nvPicPr>
-          <p:cNvPr id="37" name="Picture 36" descr="openpdf-logo.png"/>
+          <p:cNvPr id="36" name="Picture 35" descr="openpdf-logo.png"/>
           <p:cNvPicPr>
             <a:picLocks noChangeAspect="1"/>
           </p:cNvPicPr>
@@ -18720,8 +18226,8 @@
         </p:blipFill>
         <p:spPr>
           <a:xfrm>
-            <a:off x="2466575780580" y="3913076044800"/>
-            <a:ext cx="1051560" cy="1051560"/>
+            <a:off x="2752344" y="4261104"/>
+            <a:ext cx="1078992" cy="1078992"/>
           </a:xfrm>
           <a:prstGeom prst="rect">
             <a:avLst/>
@@ -18730,7 +18236,7 @@
       </p:pic>
       <p:sp>
         <p:nvSpPr>
-          <p:cNvPr id="38" name="TextBox 37"/>
+          <p:cNvPr id="37" name="TextBox 36"/>
           <p:cNvSpPr txBox="1"/>
           <p:nvPr/>
         </p:nvSpPr>
@@ -18763,7 +18269,7 @@
       </p:sp>
       <p:sp>
         <p:nvSpPr>
-          <p:cNvPr id="39" name="Rounded Rectangle 38"/>
+          <p:cNvPr id="38" name="Rounded Rectangle 37"/>
           <p:cNvSpPr/>
           <p:nvPr/>
         </p:nvSpPr>
@@ -18810,7 +18316,7 @@
       </p:sp>
       <p:pic>
         <p:nvPicPr>
-          <p:cNvPr id="40" name="Picture 39" descr="react-logo.png"/>
+          <p:cNvPr id="39" name="Picture 38" descr="react-logo.png"/>
           <p:cNvPicPr>
             <a:picLocks noChangeAspect="1"/>
           </p:cNvPicPr>
@@ -18824,8 +18330,8 @@
         </p:blipFill>
         <p:spPr>
           <a:xfrm>
-            <a:off x="4239165733295" y="3913076044800"/>
-            <a:ext cx="1152529" cy="1051560"/>
+            <a:off x="4639070" y="4261104"/>
+            <a:ext cx="1182595" cy="1078992"/>
           </a:xfrm>
           <a:prstGeom prst="rect">
             <a:avLst/>
@@ -18834,7 +18340,7 @@
       </p:pic>
       <p:sp>
         <p:nvSpPr>
-          <p:cNvPr id="41" name="TextBox 40"/>
+          <p:cNvPr id="40" name="TextBox 39"/>
           <p:cNvSpPr txBox="1"/>
           <p:nvPr/>
         </p:nvSpPr>
@@ -18867,7 +18373,7 @@
       </p:sp>
       <p:sp>
         <p:nvSpPr>
-          <p:cNvPr id="42" name="Rounded Rectangle 41"/>
+          <p:cNvPr id="41" name="Rounded Rectangle 40"/>
           <p:cNvSpPr/>
           <p:nvPr/>
         </p:nvSpPr>
@@ -18914,7 +18420,7 @@
       </p:sp>
       <p:pic>
         <p:nvPicPr>
-          <p:cNvPr id="43" name="Picture 42" descr="typescript-logo.png"/>
+          <p:cNvPr id="42" name="Picture 41" descr="typescript-logo.png"/>
           <p:cNvPicPr>
             <a:picLocks noChangeAspect="1"/>
           </p:cNvPicPr>
@@ -18928,8 +18434,8 @@
         </p:blipFill>
         <p:spPr>
           <a:xfrm>
-            <a:off x="6011755786980" y="3913076044800"/>
-            <a:ext cx="1051560" cy="1051560"/>
+            <a:off x="6629400" y="4261104"/>
+            <a:ext cx="1078992" cy="1078992"/>
           </a:xfrm>
           <a:prstGeom prst="rect">
             <a:avLst/>
@@ -18938,7 +18444,7 @@
       </p:pic>
       <p:sp>
         <p:nvSpPr>
-          <p:cNvPr id="44" name="TextBox 43"/>
+          <p:cNvPr id="43" name="TextBox 42"/>
           <p:cNvSpPr txBox="1"/>
           <p:nvPr/>
         </p:nvSpPr>
@@ -18971,7 +18477,7 @@
       </p:sp>
       <p:sp>
         <p:nvSpPr>
-          <p:cNvPr id="45" name="Rounded Rectangle 44"/>
+          <p:cNvPr id="44" name="Rounded Rectangle 43"/>
           <p:cNvSpPr/>
           <p:nvPr/>
         </p:nvSpPr>
@@ -19018,7 +18524,7 @@
       </p:sp>
       <p:pic>
         <p:nvPicPr>
-          <p:cNvPr id="46" name="Picture 45" descr="axios-logo.png"/>
+          <p:cNvPr id="45" name="Picture 44" descr="axios-logo.png"/>
           <p:cNvPicPr>
             <a:picLocks noChangeAspect="1"/>
           </p:cNvPicPr>
@@ -19032,8 +18538,8 @@
         </p:blipFill>
         <p:spPr>
           <a:xfrm>
-            <a:off x="7784345721600" y="3913076237158"/>
-            <a:ext cx="1188720" cy="666843"/>
+            <a:off x="8449056" y="4431271"/>
+            <a:ext cx="1316736" cy="738657"/>
           </a:xfrm>
           <a:prstGeom prst="rect">
             <a:avLst/>
@@ -19042,7 +18548,7 @@
       </p:pic>
       <p:sp>
         <p:nvSpPr>
-          <p:cNvPr id="47" name="TextBox 46"/>
+          <p:cNvPr id="46" name="TextBox 45"/>
           <p:cNvSpPr txBox="1"/>
           <p:nvPr/>
         </p:nvSpPr>
@@ -19075,7 +18581,7 @@
       </p:sp>
       <p:sp>
         <p:nvSpPr>
-          <p:cNvPr id="48" name="Rounded Rectangle 47"/>
+          <p:cNvPr id="47" name="Rounded Rectangle 46"/>
           <p:cNvSpPr/>
           <p:nvPr/>
         </p:nvSpPr>
@@ -19122,7 +18628,7 @@
       </p:sp>
       <p:pic>
         <p:nvPicPr>
-          <p:cNvPr id="49" name="Picture 48" descr="jspdf-logo.png"/>
+          <p:cNvPr id="48" name="Picture 47" descr="jspdf-logo.png"/>
           <p:cNvPicPr>
             <a:picLocks noChangeAspect="1"/>
           </p:cNvPicPr>
@@ -19136,8 +18642,8 @@
         </p:blipFill>
         <p:spPr>
           <a:xfrm>
-            <a:off x="9556935724800" y="3913076371950"/>
-            <a:ext cx="1188720" cy="397259"/>
+            <a:off x="10387584" y="4580579"/>
+            <a:ext cx="1316736" cy="440040"/>
           </a:xfrm>
           <a:prstGeom prst="rect">
             <a:avLst/>
@@ -19146,7 +18652,7 @@
       </p:pic>
       <p:sp>
         <p:nvSpPr>
-          <p:cNvPr id="50" name="TextBox 49"/>
+          <p:cNvPr id="49" name="TextBox 48"/>
           <p:cNvSpPr txBox="1"/>
           <p:nvPr/>
         </p:nvSpPr>
@@ -19348,54 +18854,9 @@
           </a:prstGeom>
         </p:spPr>
       </p:pic>
-      <p:sp>
-        <p:nvSpPr>
-          <p:cNvPr id="6" name="Rounded Rectangle 5"/>
-          <p:cNvSpPr/>
-          <p:nvPr/>
-        </p:nvSpPr>
-        <p:spPr>
-          <a:xfrm>
-            <a:off x="10684931" y="109728"/>
-            <a:ext cx="1195868" cy="530352"/>
-          </a:xfrm>
-          <a:prstGeom prst="roundRect">
-            <a:avLst>
-              <a:gd name="adj" fmla="val 8000"/>
-            </a:avLst>
-          </a:prstGeom>
-          <a:solidFill>
-            <a:srgbClr val="000000"/>
-          </a:solidFill>
-          <a:ln>
-            <a:noFill/>
-          </a:ln>
-        </p:spPr>
-        <p:style>
-          <a:lnRef idx="1">
-            <a:schemeClr val="accent1"/>
-          </a:lnRef>
-          <a:fillRef idx="3">
-            <a:schemeClr val="accent1"/>
-          </a:fillRef>
-          <a:effectRef idx="2">
-            <a:schemeClr val="accent1"/>
-          </a:effectRef>
-          <a:fontRef idx="minor">
-            <a:schemeClr val="lt1"/>
-          </a:fontRef>
-        </p:style>
-        <p:txBody>
-          <a:bodyPr rtlCol="0" anchor="ctr"/>
-          <a:lstStyle/>
-          <a:p>
-            <a:pPr algn="ctr"/>
-          </a:p>
-        </p:txBody>
-      </p:sp>
       <p:pic>
         <p:nvPicPr>
-          <p:cNvPr id="7" name="Picture 6" descr="mef-logo.png"/>
+          <p:cNvPr id="6" name="Picture 5" descr="mef-logo.png"/>
           <p:cNvPicPr>
             <a:picLocks noChangeAspect="1"/>
           </p:cNvPicPr>
@@ -19409,8 +18870,8 @@
         </p:blipFill>
         <p:spPr>
           <a:xfrm>
-            <a:off x="10758083" y="146304"/>
-            <a:ext cx="1122717" cy="457200"/>
+            <a:off x="10613115" y="128016"/>
+            <a:ext cx="1231108" cy="475488"/>
           </a:xfrm>
           <a:prstGeom prst="rect">
             <a:avLst/>
@@ -19419,7 +18880,7 @@
       </p:pic>
       <p:sp>
         <p:nvSpPr>
-          <p:cNvPr id="8" name="TextBox 7"/>
+          <p:cNvPr id="7" name="TextBox 6"/>
           <p:cNvSpPr txBox="1"/>
           <p:nvPr/>
         </p:nvSpPr>
@@ -19452,7 +18913,7 @@
       </p:sp>
       <p:sp>
         <p:nvSpPr>
-          <p:cNvPr id="9" name="TextBox 8"/>
+          <p:cNvPr id="8" name="TextBox 7"/>
           <p:cNvSpPr txBox="1"/>
           <p:nvPr/>
         </p:nvSpPr>
@@ -19485,7 +18946,7 @@
       </p:sp>
       <p:sp>
         <p:nvSpPr>
-          <p:cNvPr id="10" name="Rounded Rectangle 9"/>
+          <p:cNvPr id="9" name="Rounded Rectangle 8"/>
           <p:cNvSpPr/>
           <p:nvPr/>
         </p:nvSpPr>
@@ -19532,7 +18993,7 @@
       </p:sp>
       <p:sp>
         <p:nvSpPr>
-          <p:cNvPr id="11" name="Rectangle 10"/>
+          <p:cNvPr id="10" name="Rectangle 9"/>
           <p:cNvSpPr/>
           <p:nvPr/>
         </p:nvSpPr>
@@ -19575,7 +19036,7 @@
       </p:sp>
       <p:sp>
         <p:nvSpPr>
-          <p:cNvPr id="12" name="Oval 11"/>
+          <p:cNvPr id="11" name="Oval 10"/>
           <p:cNvSpPr/>
           <p:nvPr/>
         </p:nvSpPr>
@@ -19618,7 +19079,7 @@
       </p:sp>
       <p:sp>
         <p:nvSpPr>
-          <p:cNvPr id="13" name="TextBox 12"/>
+          <p:cNvPr id="12" name="TextBox 11"/>
           <p:cNvSpPr txBox="1"/>
           <p:nvPr/>
         </p:nvSpPr>
@@ -19651,7 +19112,7 @@
       </p:sp>
       <p:sp>
         <p:nvSpPr>
-          <p:cNvPr id="14" name="Rounded Rectangle 13"/>
+          <p:cNvPr id="13" name="Rounded Rectangle 12"/>
           <p:cNvSpPr/>
           <p:nvPr/>
         </p:nvSpPr>
@@ -19696,7 +19157,7 @@
       </p:sp>
       <p:sp>
         <p:nvSpPr>
-          <p:cNvPr id="15" name="TextBox 14"/>
+          <p:cNvPr id="14" name="TextBox 13"/>
           <p:cNvSpPr txBox="1"/>
           <p:nvPr/>
         </p:nvSpPr>
@@ -19729,7 +19190,7 @@
       </p:sp>
       <p:sp>
         <p:nvSpPr>
-          <p:cNvPr id="16" name="TextBox 15"/>
+          <p:cNvPr id="15" name="TextBox 14"/>
           <p:cNvSpPr txBox="1"/>
           <p:nvPr/>
         </p:nvSpPr>
@@ -19762,7 +19223,7 @@
       </p:sp>
       <p:sp>
         <p:nvSpPr>
-          <p:cNvPr id="17" name="TextBox 16"/>
+          <p:cNvPr id="16" name="TextBox 15"/>
           <p:cNvSpPr txBox="1"/>
           <p:nvPr/>
         </p:nvSpPr>
@@ -19795,7 +19256,7 @@
       </p:sp>
       <p:sp>
         <p:nvSpPr>
-          <p:cNvPr id="18" name="Rounded Rectangle 17"/>
+          <p:cNvPr id="17" name="Rounded Rectangle 16"/>
           <p:cNvSpPr/>
           <p:nvPr/>
         </p:nvSpPr>
@@ -19842,7 +19303,7 @@
       </p:sp>
       <p:sp>
         <p:nvSpPr>
-          <p:cNvPr id="19" name="Rectangle 18"/>
+          <p:cNvPr id="18" name="Rectangle 17"/>
           <p:cNvSpPr/>
           <p:nvPr/>
         </p:nvSpPr>
@@ -19885,7 +19346,7 @@
       </p:sp>
       <p:sp>
         <p:nvSpPr>
-          <p:cNvPr id="20" name="Oval 19"/>
+          <p:cNvPr id="19" name="Oval 18"/>
           <p:cNvSpPr/>
           <p:nvPr/>
         </p:nvSpPr>
@@ -19928,7 +19389,7 @@
       </p:sp>
       <p:sp>
         <p:nvSpPr>
-          <p:cNvPr id="21" name="TextBox 20"/>
+          <p:cNvPr id="20" name="TextBox 19"/>
           <p:cNvSpPr txBox="1"/>
           <p:nvPr/>
         </p:nvSpPr>
@@ -19961,7 +19422,7 @@
       </p:sp>
       <p:sp>
         <p:nvSpPr>
-          <p:cNvPr id="22" name="Rounded Rectangle 21"/>
+          <p:cNvPr id="21" name="Rounded Rectangle 20"/>
           <p:cNvSpPr/>
           <p:nvPr/>
         </p:nvSpPr>
@@ -20006,7 +19467,7 @@
       </p:sp>
       <p:sp>
         <p:nvSpPr>
-          <p:cNvPr id="23" name="TextBox 22"/>
+          <p:cNvPr id="22" name="TextBox 21"/>
           <p:cNvSpPr txBox="1"/>
           <p:nvPr/>
         </p:nvSpPr>
@@ -20039,7 +19500,7 @@
       </p:sp>
       <p:sp>
         <p:nvSpPr>
-          <p:cNvPr id="24" name="TextBox 23"/>
+          <p:cNvPr id="23" name="TextBox 22"/>
           <p:cNvSpPr txBox="1"/>
           <p:nvPr/>
         </p:nvSpPr>
@@ -20072,7 +19533,7 @@
       </p:sp>
       <p:sp>
         <p:nvSpPr>
-          <p:cNvPr id="25" name="TextBox 24"/>
+          <p:cNvPr id="24" name="TextBox 23"/>
           <p:cNvSpPr txBox="1"/>
           <p:nvPr/>
         </p:nvSpPr>
@@ -20105,7 +19566,7 @@
       </p:sp>
       <p:sp>
         <p:nvSpPr>
-          <p:cNvPr id="26" name="Rounded Rectangle 25"/>
+          <p:cNvPr id="25" name="Rounded Rectangle 24"/>
           <p:cNvSpPr/>
           <p:nvPr/>
         </p:nvSpPr>
@@ -20152,7 +19613,7 @@
       </p:sp>
       <p:sp>
         <p:nvSpPr>
-          <p:cNvPr id="27" name="Rectangle 26"/>
+          <p:cNvPr id="26" name="Rectangle 25"/>
           <p:cNvSpPr/>
           <p:nvPr/>
         </p:nvSpPr>
@@ -20195,7 +19656,7 @@
       </p:sp>
       <p:sp>
         <p:nvSpPr>
-          <p:cNvPr id="28" name="Oval 27"/>
+          <p:cNvPr id="27" name="Oval 26"/>
           <p:cNvSpPr/>
           <p:nvPr/>
         </p:nvSpPr>
@@ -20238,7 +19699,7 @@
       </p:sp>
       <p:sp>
         <p:nvSpPr>
-          <p:cNvPr id="29" name="TextBox 28"/>
+          <p:cNvPr id="28" name="TextBox 27"/>
           <p:cNvSpPr txBox="1"/>
           <p:nvPr/>
         </p:nvSpPr>
@@ -20271,7 +19732,7 @@
       </p:sp>
       <p:sp>
         <p:nvSpPr>
-          <p:cNvPr id="30" name="Rounded Rectangle 29"/>
+          <p:cNvPr id="29" name="Rounded Rectangle 28"/>
           <p:cNvSpPr/>
           <p:nvPr/>
         </p:nvSpPr>
@@ -20316,7 +19777,7 @@
       </p:sp>
       <p:sp>
         <p:nvSpPr>
-          <p:cNvPr id="31" name="TextBox 30"/>
+          <p:cNvPr id="30" name="TextBox 29"/>
           <p:cNvSpPr txBox="1"/>
           <p:nvPr/>
         </p:nvSpPr>
@@ -20349,7 +19810,7 @@
       </p:sp>
       <p:sp>
         <p:nvSpPr>
-          <p:cNvPr id="32" name="TextBox 31"/>
+          <p:cNvPr id="31" name="TextBox 30"/>
           <p:cNvSpPr txBox="1"/>
           <p:nvPr/>
         </p:nvSpPr>
@@ -20382,7 +19843,7 @@
       </p:sp>
       <p:sp>
         <p:nvSpPr>
-          <p:cNvPr id="33" name="TextBox 32"/>
+          <p:cNvPr id="32" name="TextBox 31"/>
           <p:cNvSpPr txBox="1"/>
           <p:nvPr/>
         </p:nvSpPr>
@@ -20408,14 +19869,14 @@
                 </a:solidFill>
                 <a:latin typeface="Calibri"/>
               </a:rPr>
-              <a:t>Acteurs, besoins, cas d'utilisation, classes</a:t>
-            </a:r>
-          </a:p>
-        </p:txBody>
-      </p:sp>
-      <p:sp>
-        <p:nvSpPr>
-          <p:cNvPr id="34" name="Rounded Rectangle 33"/>
+              <a:t>Acteurs, périmètre, cas d'utilisation, classes</a:t>
+            </a:r>
+          </a:p>
+        </p:txBody>
+      </p:sp>
+      <p:sp>
+        <p:nvSpPr>
+          <p:cNvPr id="33" name="Rounded Rectangle 32"/>
           <p:cNvSpPr/>
           <p:nvPr/>
         </p:nvSpPr>
@@ -20462,7 +19923,7 @@
       </p:sp>
       <p:sp>
         <p:nvSpPr>
-          <p:cNvPr id="35" name="Rectangle 34"/>
+          <p:cNvPr id="34" name="Rectangle 33"/>
           <p:cNvSpPr/>
           <p:nvPr/>
         </p:nvSpPr>
@@ -20505,7 +19966,7 @@
       </p:sp>
       <p:sp>
         <p:nvSpPr>
-          <p:cNvPr id="36" name="Oval 35"/>
+          <p:cNvPr id="35" name="Oval 34"/>
           <p:cNvSpPr/>
           <p:nvPr/>
         </p:nvSpPr>
@@ -20548,7 +20009,7 @@
       </p:sp>
       <p:sp>
         <p:nvSpPr>
-          <p:cNvPr id="37" name="TextBox 36"/>
+          <p:cNvPr id="36" name="TextBox 35"/>
           <p:cNvSpPr txBox="1"/>
           <p:nvPr/>
         </p:nvSpPr>
@@ -20581,7 +20042,7 @@
       </p:sp>
       <p:sp>
         <p:nvSpPr>
-          <p:cNvPr id="38" name="Rounded Rectangle 37"/>
+          <p:cNvPr id="37" name="Rounded Rectangle 36"/>
           <p:cNvSpPr/>
           <p:nvPr/>
         </p:nvSpPr>
@@ -20626,7 +20087,7 @@
       </p:sp>
       <p:sp>
         <p:nvSpPr>
-          <p:cNvPr id="39" name="TextBox 38"/>
+          <p:cNvPr id="38" name="TextBox 37"/>
           <p:cNvSpPr txBox="1"/>
           <p:nvPr/>
         </p:nvSpPr>
@@ -20659,7 +20120,7 @@
       </p:sp>
       <p:sp>
         <p:nvSpPr>
-          <p:cNvPr id="40" name="TextBox 39"/>
+          <p:cNvPr id="39" name="TextBox 38"/>
           <p:cNvSpPr txBox="1"/>
           <p:nvPr/>
         </p:nvSpPr>
@@ -20692,7 +20153,7 @@
       </p:sp>
       <p:sp>
         <p:nvSpPr>
-          <p:cNvPr id="41" name="TextBox 40"/>
+          <p:cNvPr id="40" name="TextBox 39"/>
           <p:cNvSpPr txBox="1"/>
           <p:nvPr/>
         </p:nvSpPr>
@@ -20725,7 +20186,7 @@
       </p:sp>
       <p:sp>
         <p:nvSpPr>
-          <p:cNvPr id="42" name="Rounded Rectangle 41"/>
+          <p:cNvPr id="41" name="Rounded Rectangle 40"/>
           <p:cNvSpPr/>
           <p:nvPr/>
         </p:nvSpPr>
@@ -20772,7 +20233,7 @@
       </p:sp>
       <p:sp>
         <p:nvSpPr>
-          <p:cNvPr id="43" name="Rectangle 42"/>
+          <p:cNvPr id="42" name="Rectangle 41"/>
           <p:cNvSpPr/>
           <p:nvPr/>
         </p:nvSpPr>
@@ -20815,7 +20276,7 @@
       </p:sp>
       <p:sp>
         <p:nvSpPr>
-          <p:cNvPr id="44" name="Oval 43"/>
+          <p:cNvPr id="43" name="Oval 42"/>
           <p:cNvSpPr/>
           <p:nvPr/>
         </p:nvSpPr>
@@ -20858,7 +20319,7 @@
       </p:sp>
       <p:sp>
         <p:nvSpPr>
-          <p:cNvPr id="45" name="TextBox 44"/>
+          <p:cNvPr id="44" name="TextBox 43"/>
           <p:cNvSpPr txBox="1"/>
           <p:nvPr/>
         </p:nvSpPr>
@@ -20891,7 +20352,7 @@
       </p:sp>
       <p:sp>
         <p:nvSpPr>
-          <p:cNvPr id="46" name="Rounded Rectangle 45"/>
+          <p:cNvPr id="45" name="Rounded Rectangle 44"/>
           <p:cNvSpPr/>
           <p:nvPr/>
         </p:nvSpPr>
@@ -20936,7 +20397,7 @@
       </p:sp>
       <p:sp>
         <p:nvSpPr>
-          <p:cNvPr id="47" name="TextBox 46"/>
+          <p:cNvPr id="46" name="TextBox 45"/>
           <p:cNvSpPr txBox="1"/>
           <p:nvPr/>
         </p:nvSpPr>
@@ -20969,7 +20430,7 @@
       </p:sp>
       <p:sp>
         <p:nvSpPr>
-          <p:cNvPr id="48" name="TextBox 47"/>
+          <p:cNvPr id="47" name="TextBox 46"/>
           <p:cNvSpPr txBox="1"/>
           <p:nvPr/>
         </p:nvSpPr>
@@ -21002,7 +20463,7 @@
       </p:sp>
       <p:sp>
         <p:nvSpPr>
-          <p:cNvPr id="49" name="TextBox 48"/>
+          <p:cNvPr id="48" name="TextBox 47"/>
           <p:cNvSpPr txBox="1"/>
           <p:nvPr/>
         </p:nvSpPr>
@@ -21035,7 +20496,7 @@
       </p:sp>
       <p:sp>
         <p:nvSpPr>
-          <p:cNvPr id="50" name="Rounded Rectangle 49"/>
+          <p:cNvPr id="49" name="Rounded Rectangle 48"/>
           <p:cNvSpPr/>
           <p:nvPr/>
         </p:nvSpPr>
@@ -21082,7 +20543,7 @@
       </p:sp>
       <p:sp>
         <p:nvSpPr>
-          <p:cNvPr id="51" name="Rectangle 50"/>
+          <p:cNvPr id="50" name="Rectangle 49"/>
           <p:cNvSpPr/>
           <p:nvPr/>
         </p:nvSpPr>
@@ -21125,7 +20586,7 @@
       </p:sp>
       <p:sp>
         <p:nvSpPr>
-          <p:cNvPr id="52" name="Oval 51"/>
+          <p:cNvPr id="51" name="Oval 50"/>
           <p:cNvSpPr/>
           <p:nvPr/>
         </p:nvSpPr>
@@ -21168,7 +20629,7 @@
       </p:sp>
       <p:sp>
         <p:nvSpPr>
-          <p:cNvPr id="53" name="TextBox 52"/>
+          <p:cNvPr id="52" name="TextBox 51"/>
           <p:cNvSpPr txBox="1"/>
           <p:nvPr/>
         </p:nvSpPr>
@@ -21201,7 +20662,7 @@
       </p:sp>
       <p:sp>
         <p:nvSpPr>
-          <p:cNvPr id="54" name="Rounded Rectangle 53"/>
+          <p:cNvPr id="53" name="Rounded Rectangle 52"/>
           <p:cNvSpPr/>
           <p:nvPr/>
         </p:nvSpPr>
@@ -21246,7 +20707,7 @@
       </p:sp>
       <p:sp>
         <p:nvSpPr>
-          <p:cNvPr id="55" name="TextBox 54"/>
+          <p:cNvPr id="54" name="TextBox 53"/>
           <p:cNvSpPr txBox="1"/>
           <p:nvPr/>
         </p:nvSpPr>
@@ -21279,7 +20740,7 @@
       </p:sp>
       <p:sp>
         <p:nvSpPr>
-          <p:cNvPr id="56" name="TextBox 55"/>
+          <p:cNvPr id="55" name="TextBox 54"/>
           <p:cNvSpPr txBox="1"/>
           <p:nvPr/>
         </p:nvSpPr>
@@ -21312,7 +20773,7 @@
       </p:sp>
       <p:sp>
         <p:nvSpPr>
-          <p:cNvPr id="57" name="TextBox 56"/>
+          <p:cNvPr id="56" name="TextBox 55"/>
           <p:cNvSpPr txBox="1"/>
           <p:nvPr/>
         </p:nvSpPr>
@@ -21345,7 +20806,7 @@
       </p:sp>
       <p:sp>
         <p:nvSpPr>
-          <p:cNvPr id="58" name="Rectangle 57"/>
+          <p:cNvPr id="57" name="Rectangle 56"/>
           <p:cNvSpPr/>
           <p:nvPr/>
         </p:nvSpPr>
@@ -21388,7 +20849,7 @@
       </p:sp>
       <p:sp>
         <p:nvSpPr>
-          <p:cNvPr id="59" name="TextBox 58"/>
+          <p:cNvPr id="58" name="TextBox 57"/>
           <p:cNvSpPr txBox="1"/>
           <p:nvPr/>
         </p:nvSpPr>
@@ -21421,7 +20882,7 @@
       </p:sp>
       <p:sp>
         <p:nvSpPr>
-          <p:cNvPr id="60" name="TextBox 59"/>
+          <p:cNvPr id="59" name="TextBox 58"/>
           <p:cNvSpPr txBox="1"/>
           <p:nvPr/>
         </p:nvSpPr>
@@ -21623,54 +21084,9 @@
           </a:prstGeom>
         </p:spPr>
       </p:pic>
-      <p:sp>
-        <p:nvSpPr>
-          <p:cNvPr id="6" name="Rounded Rectangle 5"/>
-          <p:cNvSpPr/>
-          <p:nvPr/>
-        </p:nvSpPr>
-        <p:spPr>
-          <a:xfrm>
-            <a:off x="10684931" y="109728"/>
-            <a:ext cx="1195868" cy="530352"/>
-          </a:xfrm>
-          <a:prstGeom prst="roundRect">
-            <a:avLst>
-              <a:gd name="adj" fmla="val 8000"/>
-            </a:avLst>
-          </a:prstGeom>
-          <a:solidFill>
-            <a:srgbClr val="000000"/>
-          </a:solidFill>
-          <a:ln>
-            <a:noFill/>
-          </a:ln>
-        </p:spPr>
-        <p:style>
-          <a:lnRef idx="1">
-            <a:schemeClr val="accent1"/>
-          </a:lnRef>
-          <a:fillRef idx="3">
-            <a:schemeClr val="accent1"/>
-          </a:fillRef>
-          <a:effectRef idx="2">
-            <a:schemeClr val="accent1"/>
-          </a:effectRef>
-          <a:fontRef idx="minor">
-            <a:schemeClr val="lt1"/>
-          </a:fontRef>
-        </p:style>
-        <p:txBody>
-          <a:bodyPr rtlCol="0" anchor="ctr"/>
-          <a:lstStyle/>
-          <a:p>
-            <a:pPr algn="ctr"/>
-          </a:p>
-        </p:txBody>
-      </p:sp>
       <p:pic>
         <p:nvPicPr>
-          <p:cNvPr id="7" name="Picture 6" descr="mef-logo.png"/>
+          <p:cNvPr id="6" name="Picture 5" descr="mef-logo.png"/>
           <p:cNvPicPr>
             <a:picLocks noChangeAspect="1"/>
           </p:cNvPicPr>
@@ -21684,8 +21100,8 @@
         </p:blipFill>
         <p:spPr>
           <a:xfrm>
-            <a:off x="10758083" y="146304"/>
-            <a:ext cx="1122717" cy="457200"/>
+            <a:off x="10613115" y="128016"/>
+            <a:ext cx="1231108" cy="475488"/>
           </a:xfrm>
           <a:prstGeom prst="rect">
             <a:avLst/>
@@ -21694,7 +21110,7 @@
       </p:pic>
       <p:sp>
         <p:nvSpPr>
-          <p:cNvPr id="8" name="TextBox 7"/>
+          <p:cNvPr id="7" name="TextBox 6"/>
           <p:cNvSpPr txBox="1"/>
           <p:nvPr/>
         </p:nvSpPr>
@@ -21720,14 +21136,14 @@
                 </a:solidFill>
                 <a:latin typeface="Calibri"/>
               </a:rPr>
-              <a:t>Partie 6  ·  Réalisation</a:t>
-            </a:r>
-          </a:p>
-        </p:txBody>
-      </p:sp>
-      <p:sp>
-        <p:nvSpPr>
-          <p:cNvPr id="9" name="TextBox 8"/>
+              <a:t>Partie 5  ·  Réalisation</a:t>
+            </a:r>
+          </a:p>
+        </p:txBody>
+      </p:sp>
+      <p:sp>
+        <p:nvSpPr>
+          <p:cNvPr id="8" name="TextBox 7"/>
           <p:cNvSpPr txBox="1"/>
           <p:nvPr/>
         </p:nvSpPr>
@@ -21760,7 +21176,7 @@
       </p:sp>
       <p:sp>
         <p:nvSpPr>
-          <p:cNvPr id="10" name="Rectangle 9"/>
+          <p:cNvPr id="9" name="Rectangle 8"/>
           <p:cNvSpPr/>
           <p:nvPr/>
         </p:nvSpPr>
@@ -21803,7 +21219,7 @@
       </p:sp>
       <p:sp>
         <p:nvSpPr>
-          <p:cNvPr id="11" name="TextBox 10"/>
+          <p:cNvPr id="10" name="TextBox 9"/>
           <p:cNvSpPr txBox="1"/>
           <p:nvPr/>
         </p:nvSpPr>
@@ -21836,7 +21252,7 @@
       </p:sp>
       <p:sp>
         <p:nvSpPr>
-          <p:cNvPr id="12" name="TextBox 11"/>
+          <p:cNvPr id="11" name="TextBox 10"/>
           <p:cNvSpPr txBox="1"/>
           <p:nvPr/>
         </p:nvSpPr>
@@ -21869,7 +21285,7 @@
       </p:sp>
       <p:sp>
         <p:nvSpPr>
-          <p:cNvPr id="13" name="TextBox 12"/>
+          <p:cNvPr id="12" name="TextBox 11"/>
           <p:cNvSpPr txBox="1"/>
           <p:nvPr/>
         </p:nvSpPr>
@@ -21902,7 +21318,7 @@
       </p:sp>
       <p:pic>
         <p:nvPicPr>
-          <p:cNvPr id="14" name="Picture 13" descr="screenshot-connexion.png"/>
+          <p:cNvPr id="13" name="Picture 12" descr="screenshot-connexion.png"/>
           <p:cNvPicPr>
             <a:picLocks noChangeAspect="1"/>
           </p:cNvPicPr>
@@ -22095,54 +21511,9 @@
           </a:prstGeom>
         </p:spPr>
       </p:pic>
-      <p:sp>
-        <p:nvSpPr>
-          <p:cNvPr id="6" name="Rounded Rectangle 5"/>
-          <p:cNvSpPr/>
-          <p:nvPr/>
-        </p:nvSpPr>
-        <p:spPr>
-          <a:xfrm>
-            <a:off x="10684931" y="109728"/>
-            <a:ext cx="1195868" cy="530352"/>
-          </a:xfrm>
-          <a:prstGeom prst="roundRect">
-            <a:avLst>
-              <a:gd name="adj" fmla="val 8000"/>
-            </a:avLst>
-          </a:prstGeom>
-          <a:solidFill>
-            <a:srgbClr val="000000"/>
-          </a:solidFill>
-          <a:ln>
-            <a:noFill/>
-          </a:ln>
-        </p:spPr>
-        <p:style>
-          <a:lnRef idx="1">
-            <a:schemeClr val="accent1"/>
-          </a:lnRef>
-          <a:fillRef idx="3">
-            <a:schemeClr val="accent1"/>
-          </a:fillRef>
-          <a:effectRef idx="2">
-            <a:schemeClr val="accent1"/>
-          </a:effectRef>
-          <a:fontRef idx="minor">
-            <a:schemeClr val="lt1"/>
-          </a:fontRef>
-        </p:style>
-        <p:txBody>
-          <a:bodyPr rtlCol="0" anchor="ctr"/>
-          <a:lstStyle/>
-          <a:p>
-            <a:pPr algn="ctr"/>
-          </a:p>
-        </p:txBody>
-      </p:sp>
       <p:pic>
         <p:nvPicPr>
-          <p:cNvPr id="7" name="Picture 6" descr="mef-logo.png"/>
+          <p:cNvPr id="6" name="Picture 5" descr="mef-logo.png"/>
           <p:cNvPicPr>
             <a:picLocks noChangeAspect="1"/>
           </p:cNvPicPr>
@@ -22156,8 +21527,8 @@
         </p:blipFill>
         <p:spPr>
           <a:xfrm>
-            <a:off x="10758083" y="146304"/>
-            <a:ext cx="1122717" cy="457200"/>
+            <a:off x="10613115" y="128016"/>
+            <a:ext cx="1231108" cy="475488"/>
           </a:xfrm>
           <a:prstGeom prst="rect">
             <a:avLst/>
@@ -22166,7 +21537,7 @@
       </p:pic>
       <p:sp>
         <p:nvSpPr>
-          <p:cNvPr id="8" name="TextBox 7"/>
+          <p:cNvPr id="7" name="TextBox 6"/>
           <p:cNvSpPr txBox="1"/>
           <p:nvPr/>
         </p:nvSpPr>
@@ -22192,14 +21563,14 @@
                 </a:solidFill>
                 <a:latin typeface="Calibri"/>
               </a:rPr>
-              <a:t>Partie 6  ·  Réalisation</a:t>
-            </a:r>
-          </a:p>
-        </p:txBody>
-      </p:sp>
-      <p:sp>
-        <p:nvSpPr>
-          <p:cNvPr id="9" name="TextBox 8"/>
+              <a:t>Partie 5  ·  Réalisation</a:t>
+            </a:r>
+          </a:p>
+        </p:txBody>
+      </p:sp>
+      <p:sp>
+        <p:nvSpPr>
+          <p:cNvPr id="8" name="TextBox 7"/>
           <p:cNvSpPr txBox="1"/>
           <p:nvPr/>
         </p:nvSpPr>
@@ -22232,7 +21603,7 @@
       </p:sp>
       <p:sp>
         <p:nvSpPr>
-          <p:cNvPr id="10" name="Rectangle 9"/>
+          <p:cNvPr id="9" name="Rectangle 8"/>
           <p:cNvSpPr/>
           <p:nvPr/>
         </p:nvSpPr>
@@ -22275,7 +21646,7 @@
       </p:sp>
       <p:sp>
         <p:nvSpPr>
-          <p:cNvPr id="11" name="TextBox 10"/>
+          <p:cNvPr id="10" name="TextBox 9"/>
           <p:cNvSpPr txBox="1"/>
           <p:nvPr/>
         </p:nvSpPr>
@@ -22308,7 +21679,7 @@
       </p:sp>
       <p:sp>
         <p:nvSpPr>
-          <p:cNvPr id="12" name="TextBox 11"/>
+          <p:cNvPr id="11" name="TextBox 10"/>
           <p:cNvSpPr txBox="1"/>
           <p:nvPr/>
         </p:nvSpPr>
@@ -22341,7 +21712,7 @@
       </p:sp>
       <p:sp>
         <p:nvSpPr>
-          <p:cNvPr id="13" name="TextBox 12"/>
+          <p:cNvPr id="12" name="TextBox 11"/>
           <p:cNvSpPr txBox="1"/>
           <p:nvPr/>
         </p:nvSpPr>
@@ -22374,7 +21745,7 @@
       </p:sp>
       <p:pic>
         <p:nvPicPr>
-          <p:cNvPr id="14" name="Picture 13" descr="screenshot-dashboard.png"/>
+          <p:cNvPr id="13" name="Picture 12" descr="screenshot-dashboard.png"/>
           <p:cNvPicPr>
             <a:picLocks noChangeAspect="1"/>
           </p:cNvPicPr>
@@ -22567,54 +21938,9 @@
           </a:prstGeom>
         </p:spPr>
       </p:pic>
-      <p:sp>
-        <p:nvSpPr>
-          <p:cNvPr id="6" name="Rounded Rectangle 5"/>
-          <p:cNvSpPr/>
-          <p:nvPr/>
-        </p:nvSpPr>
-        <p:spPr>
-          <a:xfrm>
-            <a:off x="10684931" y="109728"/>
-            <a:ext cx="1195868" cy="530352"/>
-          </a:xfrm>
-          <a:prstGeom prst="roundRect">
-            <a:avLst>
-              <a:gd name="adj" fmla="val 8000"/>
-            </a:avLst>
-          </a:prstGeom>
-          <a:solidFill>
-            <a:srgbClr val="000000"/>
-          </a:solidFill>
-          <a:ln>
-            <a:noFill/>
-          </a:ln>
-        </p:spPr>
-        <p:style>
-          <a:lnRef idx="1">
-            <a:schemeClr val="accent1"/>
-          </a:lnRef>
-          <a:fillRef idx="3">
-            <a:schemeClr val="accent1"/>
-          </a:fillRef>
-          <a:effectRef idx="2">
-            <a:schemeClr val="accent1"/>
-          </a:effectRef>
-          <a:fontRef idx="minor">
-            <a:schemeClr val="lt1"/>
-          </a:fontRef>
-        </p:style>
-        <p:txBody>
-          <a:bodyPr rtlCol="0" anchor="ctr"/>
-          <a:lstStyle/>
-          <a:p>
-            <a:pPr algn="ctr"/>
-          </a:p>
-        </p:txBody>
-      </p:sp>
       <p:pic>
         <p:nvPicPr>
-          <p:cNvPr id="7" name="Picture 6" descr="mef-logo.png"/>
+          <p:cNvPr id="6" name="Picture 5" descr="mef-logo.png"/>
           <p:cNvPicPr>
             <a:picLocks noChangeAspect="1"/>
           </p:cNvPicPr>
@@ -22628,8 +21954,8 @@
         </p:blipFill>
         <p:spPr>
           <a:xfrm>
-            <a:off x="10758083" y="146304"/>
-            <a:ext cx="1122717" cy="457200"/>
+            <a:off x="10613115" y="128016"/>
+            <a:ext cx="1231108" cy="475488"/>
           </a:xfrm>
           <a:prstGeom prst="rect">
             <a:avLst/>
@@ -22638,7 +21964,7 @@
       </p:pic>
       <p:sp>
         <p:nvSpPr>
-          <p:cNvPr id="8" name="TextBox 7"/>
+          <p:cNvPr id="7" name="TextBox 6"/>
           <p:cNvSpPr txBox="1"/>
           <p:nvPr/>
         </p:nvSpPr>
@@ -22664,14 +21990,14 @@
                 </a:solidFill>
                 <a:latin typeface="Calibri"/>
               </a:rPr>
-              <a:t>Partie 6  ·  Réalisation</a:t>
-            </a:r>
-          </a:p>
-        </p:txBody>
-      </p:sp>
-      <p:sp>
-        <p:nvSpPr>
-          <p:cNvPr id="9" name="TextBox 8"/>
+              <a:t>Partie 5  ·  Réalisation</a:t>
+            </a:r>
+          </a:p>
+        </p:txBody>
+      </p:sp>
+      <p:sp>
+        <p:nvSpPr>
+          <p:cNvPr id="8" name="TextBox 7"/>
           <p:cNvSpPr txBox="1"/>
           <p:nvPr/>
         </p:nvSpPr>
@@ -22704,7 +22030,7 @@
       </p:sp>
       <p:sp>
         <p:nvSpPr>
-          <p:cNvPr id="10" name="Rectangle 9"/>
+          <p:cNvPr id="9" name="Rectangle 8"/>
           <p:cNvSpPr/>
           <p:nvPr/>
         </p:nvSpPr>
@@ -22747,7 +22073,7 @@
       </p:sp>
       <p:sp>
         <p:nvSpPr>
-          <p:cNvPr id="11" name="TextBox 10"/>
+          <p:cNvPr id="10" name="TextBox 9"/>
           <p:cNvSpPr txBox="1"/>
           <p:nvPr/>
         </p:nvSpPr>
@@ -22780,7 +22106,7 @@
       </p:sp>
       <p:sp>
         <p:nvSpPr>
-          <p:cNvPr id="12" name="TextBox 11"/>
+          <p:cNvPr id="11" name="TextBox 10"/>
           <p:cNvSpPr txBox="1"/>
           <p:nvPr/>
         </p:nvSpPr>
@@ -22813,7 +22139,7 @@
       </p:sp>
       <p:sp>
         <p:nvSpPr>
-          <p:cNvPr id="13" name="TextBox 12"/>
+          <p:cNvPr id="12" name="TextBox 11"/>
           <p:cNvSpPr txBox="1"/>
           <p:nvPr/>
         </p:nvSpPr>
@@ -22846,7 +22172,7 @@
       </p:sp>
       <p:pic>
         <p:nvPicPr>
-          <p:cNvPr id="14" name="Picture 13" descr="screenshot-lieux.png"/>
+          <p:cNvPr id="13" name="Picture 12" descr="screenshot-lieux.png"/>
           <p:cNvPicPr>
             <a:picLocks noChangeAspect="1"/>
           </p:cNvPicPr>
@@ -23039,54 +22365,9 @@
           </a:prstGeom>
         </p:spPr>
       </p:pic>
-      <p:sp>
-        <p:nvSpPr>
-          <p:cNvPr id="6" name="Rounded Rectangle 5"/>
-          <p:cNvSpPr/>
-          <p:nvPr/>
-        </p:nvSpPr>
-        <p:spPr>
-          <a:xfrm>
-            <a:off x="10684931" y="109728"/>
-            <a:ext cx="1195868" cy="530352"/>
-          </a:xfrm>
-          <a:prstGeom prst="roundRect">
-            <a:avLst>
-              <a:gd name="adj" fmla="val 8000"/>
-            </a:avLst>
-          </a:prstGeom>
-          <a:solidFill>
-            <a:srgbClr val="000000"/>
-          </a:solidFill>
-          <a:ln>
-            <a:noFill/>
-          </a:ln>
-        </p:spPr>
-        <p:style>
-          <a:lnRef idx="1">
-            <a:schemeClr val="accent1"/>
-          </a:lnRef>
-          <a:fillRef idx="3">
-            <a:schemeClr val="accent1"/>
-          </a:fillRef>
-          <a:effectRef idx="2">
-            <a:schemeClr val="accent1"/>
-          </a:effectRef>
-          <a:fontRef idx="minor">
-            <a:schemeClr val="lt1"/>
-          </a:fontRef>
-        </p:style>
-        <p:txBody>
-          <a:bodyPr rtlCol="0" anchor="ctr"/>
-          <a:lstStyle/>
-          <a:p>
-            <a:pPr algn="ctr"/>
-          </a:p>
-        </p:txBody>
-      </p:sp>
       <p:pic>
         <p:nvPicPr>
-          <p:cNvPr id="7" name="Picture 6" descr="mef-logo.png"/>
+          <p:cNvPr id="6" name="Picture 5" descr="mef-logo.png"/>
           <p:cNvPicPr>
             <a:picLocks noChangeAspect="1"/>
           </p:cNvPicPr>
@@ -23100,8 +22381,8 @@
         </p:blipFill>
         <p:spPr>
           <a:xfrm>
-            <a:off x="10758083" y="146304"/>
-            <a:ext cx="1122717" cy="457200"/>
+            <a:off x="10613115" y="128016"/>
+            <a:ext cx="1231108" cy="475488"/>
           </a:xfrm>
           <a:prstGeom prst="rect">
             <a:avLst/>
@@ -23110,7 +22391,7 @@
       </p:pic>
       <p:sp>
         <p:nvSpPr>
-          <p:cNvPr id="8" name="TextBox 7"/>
+          <p:cNvPr id="7" name="TextBox 6"/>
           <p:cNvSpPr txBox="1"/>
           <p:nvPr/>
         </p:nvSpPr>
@@ -23136,14 +22417,14 @@
                 </a:solidFill>
                 <a:latin typeface="Calibri"/>
               </a:rPr>
-              <a:t>Partie 6  ·  Réalisation</a:t>
-            </a:r>
-          </a:p>
-        </p:txBody>
-      </p:sp>
-      <p:sp>
-        <p:nvSpPr>
-          <p:cNvPr id="9" name="TextBox 8"/>
+              <a:t>Partie 5  ·  Réalisation</a:t>
+            </a:r>
+          </a:p>
+        </p:txBody>
+      </p:sp>
+      <p:sp>
+        <p:nvSpPr>
+          <p:cNvPr id="8" name="TextBox 7"/>
           <p:cNvSpPr txBox="1"/>
           <p:nvPr/>
         </p:nvSpPr>
@@ -23176,7 +22457,7 @@
       </p:sp>
       <p:sp>
         <p:nvSpPr>
-          <p:cNvPr id="10" name="Rectangle 9"/>
+          <p:cNvPr id="9" name="Rectangle 8"/>
           <p:cNvSpPr/>
           <p:nvPr/>
         </p:nvSpPr>
@@ -23219,7 +22500,7 @@
       </p:sp>
       <p:sp>
         <p:nvSpPr>
-          <p:cNvPr id="11" name="TextBox 10"/>
+          <p:cNvPr id="10" name="TextBox 9"/>
           <p:cNvSpPr txBox="1"/>
           <p:nvPr/>
         </p:nvSpPr>
@@ -23252,7 +22533,7 @@
       </p:sp>
       <p:sp>
         <p:nvSpPr>
-          <p:cNvPr id="12" name="TextBox 11"/>
+          <p:cNvPr id="11" name="TextBox 10"/>
           <p:cNvSpPr txBox="1"/>
           <p:nvPr/>
         </p:nvSpPr>
@@ -23285,7 +22566,7 @@
       </p:sp>
       <p:sp>
         <p:nvSpPr>
-          <p:cNvPr id="13" name="TextBox 12"/>
+          <p:cNvPr id="12" name="TextBox 11"/>
           <p:cNvSpPr txBox="1"/>
           <p:nvPr/>
         </p:nvSpPr>
@@ -23318,7 +22599,7 @@
       </p:sp>
       <p:pic>
         <p:nvPicPr>
-          <p:cNvPr id="14" name="Picture 13" descr="screenshot-candidats.png"/>
+          <p:cNvPr id="13" name="Picture 12" descr="screenshot-candidats.png"/>
           <p:cNvPicPr>
             <a:picLocks noChangeAspect="1"/>
           </p:cNvPicPr>
@@ -23511,54 +22792,9 @@
           </a:prstGeom>
         </p:spPr>
       </p:pic>
-      <p:sp>
-        <p:nvSpPr>
-          <p:cNvPr id="6" name="Rounded Rectangle 5"/>
-          <p:cNvSpPr/>
-          <p:nvPr/>
-        </p:nvSpPr>
-        <p:spPr>
-          <a:xfrm>
-            <a:off x="10684931" y="109728"/>
-            <a:ext cx="1195868" cy="530352"/>
-          </a:xfrm>
-          <a:prstGeom prst="roundRect">
-            <a:avLst>
-              <a:gd name="adj" fmla="val 8000"/>
-            </a:avLst>
-          </a:prstGeom>
-          <a:solidFill>
-            <a:srgbClr val="000000"/>
-          </a:solidFill>
-          <a:ln>
-            <a:noFill/>
-          </a:ln>
-        </p:spPr>
-        <p:style>
-          <a:lnRef idx="1">
-            <a:schemeClr val="accent1"/>
-          </a:lnRef>
-          <a:fillRef idx="3">
-            <a:schemeClr val="accent1"/>
-          </a:fillRef>
-          <a:effectRef idx="2">
-            <a:schemeClr val="accent1"/>
-          </a:effectRef>
-          <a:fontRef idx="minor">
-            <a:schemeClr val="lt1"/>
-          </a:fontRef>
-        </p:style>
-        <p:txBody>
-          <a:bodyPr rtlCol="0" anchor="ctr"/>
-          <a:lstStyle/>
-          <a:p>
-            <a:pPr algn="ctr"/>
-          </a:p>
-        </p:txBody>
-      </p:sp>
       <p:pic>
         <p:nvPicPr>
-          <p:cNvPr id="7" name="Picture 6" descr="mef-logo.png"/>
+          <p:cNvPr id="6" name="Picture 5" descr="mef-logo.png"/>
           <p:cNvPicPr>
             <a:picLocks noChangeAspect="1"/>
           </p:cNvPicPr>
@@ -23572,8 +22808,8 @@
         </p:blipFill>
         <p:spPr>
           <a:xfrm>
-            <a:off x="10758083" y="146304"/>
-            <a:ext cx="1122717" cy="457200"/>
+            <a:off x="10613115" y="128016"/>
+            <a:ext cx="1231108" cy="475488"/>
           </a:xfrm>
           <a:prstGeom prst="rect">
             <a:avLst/>
@@ -23582,7 +22818,7 @@
       </p:pic>
       <p:sp>
         <p:nvSpPr>
-          <p:cNvPr id="8" name="TextBox 7"/>
+          <p:cNvPr id="7" name="TextBox 6"/>
           <p:cNvSpPr txBox="1"/>
           <p:nvPr/>
         </p:nvSpPr>
@@ -23608,14 +22844,14 @@
                 </a:solidFill>
                 <a:latin typeface="Calibri"/>
               </a:rPr>
-              <a:t>Partie 6  ·  Réalisation</a:t>
-            </a:r>
-          </a:p>
-        </p:txBody>
-      </p:sp>
-      <p:sp>
-        <p:nvSpPr>
-          <p:cNvPr id="9" name="TextBox 8"/>
+              <a:t>Partie 5  ·  Réalisation</a:t>
+            </a:r>
+          </a:p>
+        </p:txBody>
+      </p:sp>
+      <p:sp>
+        <p:nvSpPr>
+          <p:cNvPr id="8" name="TextBox 7"/>
           <p:cNvSpPr txBox="1"/>
           <p:nvPr/>
         </p:nvSpPr>
@@ -23648,7 +22884,7 @@
       </p:sp>
       <p:sp>
         <p:nvSpPr>
-          <p:cNvPr id="10" name="Rectangle 9"/>
+          <p:cNvPr id="9" name="Rectangle 8"/>
           <p:cNvSpPr/>
           <p:nvPr/>
         </p:nvSpPr>
@@ -23691,7 +22927,7 @@
       </p:sp>
       <p:sp>
         <p:nvSpPr>
-          <p:cNvPr id="11" name="TextBox 10"/>
+          <p:cNvPr id="10" name="TextBox 9"/>
           <p:cNvSpPr txBox="1"/>
           <p:nvPr/>
         </p:nvSpPr>
@@ -23724,7 +22960,7 @@
       </p:sp>
       <p:sp>
         <p:nvSpPr>
-          <p:cNvPr id="12" name="TextBox 11"/>
+          <p:cNvPr id="11" name="TextBox 10"/>
           <p:cNvSpPr txBox="1"/>
           <p:nvPr/>
         </p:nvSpPr>
@@ -23757,7 +22993,7 @@
       </p:sp>
       <p:sp>
         <p:nvSpPr>
-          <p:cNvPr id="13" name="TextBox 12"/>
+          <p:cNvPr id="12" name="TextBox 11"/>
           <p:cNvSpPr txBox="1"/>
           <p:nvPr/>
         </p:nvSpPr>
@@ -23790,7 +23026,7 @@
       </p:sp>
       <p:pic>
         <p:nvPicPr>
-          <p:cNvPr id="14" name="Picture 13" descr="screenshot-repartition-synthese.png"/>
+          <p:cNvPr id="13" name="Picture 12" descr="screenshot-repartition-synthese.png"/>
           <p:cNvPicPr>
             <a:picLocks noChangeAspect="1"/>
           </p:cNvPicPr>
@@ -23983,54 +23219,9 @@
           </a:prstGeom>
         </p:spPr>
       </p:pic>
-      <p:sp>
-        <p:nvSpPr>
-          <p:cNvPr id="6" name="Rounded Rectangle 5"/>
-          <p:cNvSpPr/>
-          <p:nvPr/>
-        </p:nvSpPr>
-        <p:spPr>
-          <a:xfrm>
-            <a:off x="10684931" y="109728"/>
-            <a:ext cx="1195868" cy="530352"/>
-          </a:xfrm>
-          <a:prstGeom prst="roundRect">
-            <a:avLst>
-              <a:gd name="adj" fmla="val 8000"/>
-            </a:avLst>
-          </a:prstGeom>
-          <a:solidFill>
-            <a:srgbClr val="000000"/>
-          </a:solidFill>
-          <a:ln>
-            <a:noFill/>
-          </a:ln>
-        </p:spPr>
-        <p:style>
-          <a:lnRef idx="1">
-            <a:schemeClr val="accent1"/>
-          </a:lnRef>
-          <a:fillRef idx="3">
-            <a:schemeClr val="accent1"/>
-          </a:fillRef>
-          <a:effectRef idx="2">
-            <a:schemeClr val="accent1"/>
-          </a:effectRef>
-          <a:fontRef idx="minor">
-            <a:schemeClr val="lt1"/>
-          </a:fontRef>
-        </p:style>
-        <p:txBody>
-          <a:bodyPr rtlCol="0" anchor="ctr"/>
-          <a:lstStyle/>
-          <a:p>
-            <a:pPr algn="ctr"/>
-          </a:p>
-        </p:txBody>
-      </p:sp>
       <p:pic>
         <p:nvPicPr>
-          <p:cNvPr id="7" name="Picture 6" descr="mef-logo.png"/>
+          <p:cNvPr id="6" name="Picture 5" descr="mef-logo.png"/>
           <p:cNvPicPr>
             <a:picLocks noChangeAspect="1"/>
           </p:cNvPicPr>
@@ -24044,8 +23235,8 @@
         </p:blipFill>
         <p:spPr>
           <a:xfrm>
-            <a:off x="10758083" y="146304"/>
-            <a:ext cx="1122717" cy="457200"/>
+            <a:off x="10613115" y="128016"/>
+            <a:ext cx="1231108" cy="475488"/>
           </a:xfrm>
           <a:prstGeom prst="rect">
             <a:avLst/>
@@ -24054,7 +23245,7 @@
       </p:pic>
       <p:sp>
         <p:nvSpPr>
-          <p:cNvPr id="8" name="TextBox 7"/>
+          <p:cNvPr id="7" name="TextBox 6"/>
           <p:cNvSpPr txBox="1"/>
           <p:nvPr/>
         </p:nvSpPr>
@@ -24080,14 +23271,14 @@
                 </a:solidFill>
                 <a:latin typeface="Calibri"/>
               </a:rPr>
-              <a:t>Partie 6  ·  Réalisation</a:t>
-            </a:r>
-          </a:p>
-        </p:txBody>
-      </p:sp>
-      <p:sp>
-        <p:nvSpPr>
-          <p:cNvPr id="9" name="TextBox 8"/>
+              <a:t>Partie 5  ·  Réalisation</a:t>
+            </a:r>
+          </a:p>
+        </p:txBody>
+      </p:sp>
+      <p:sp>
+        <p:nvSpPr>
+          <p:cNvPr id="8" name="TextBox 7"/>
           <p:cNvSpPr txBox="1"/>
           <p:nvPr/>
         </p:nvSpPr>
@@ -24120,7 +23311,7 @@
       </p:sp>
       <p:sp>
         <p:nvSpPr>
-          <p:cNvPr id="10" name="Rectangle 9"/>
+          <p:cNvPr id="9" name="Rectangle 8"/>
           <p:cNvSpPr/>
           <p:nvPr/>
         </p:nvSpPr>
@@ -24163,7 +23354,7 @@
       </p:sp>
       <p:sp>
         <p:nvSpPr>
-          <p:cNvPr id="11" name="TextBox 10"/>
+          <p:cNvPr id="10" name="TextBox 9"/>
           <p:cNvSpPr txBox="1"/>
           <p:nvPr/>
         </p:nvSpPr>
@@ -24196,7 +23387,7 @@
       </p:sp>
       <p:sp>
         <p:nvSpPr>
-          <p:cNvPr id="12" name="TextBox 11"/>
+          <p:cNvPr id="11" name="TextBox 10"/>
           <p:cNvSpPr txBox="1"/>
           <p:nvPr/>
         </p:nvSpPr>
@@ -24229,7 +23420,7 @@
       </p:sp>
       <p:sp>
         <p:nvSpPr>
-          <p:cNvPr id="13" name="TextBox 12"/>
+          <p:cNvPr id="12" name="TextBox 11"/>
           <p:cNvSpPr txBox="1"/>
           <p:nvPr/>
         </p:nvSpPr>
@@ -24262,7 +23453,7 @@
       </p:sp>
       <p:pic>
         <p:nvPicPr>
-          <p:cNvPr id="14" name="Picture 13" descr="screenshot-convocations.png"/>
+          <p:cNvPr id="13" name="Picture 12" descr="screenshot-convocations.png"/>
           <p:cNvPicPr>
             <a:picLocks noChangeAspect="1"/>
           </p:cNvPicPr>
@@ -24455,54 +23646,9 @@
           </a:prstGeom>
         </p:spPr>
       </p:pic>
-      <p:sp>
-        <p:nvSpPr>
-          <p:cNvPr id="6" name="Rounded Rectangle 5"/>
-          <p:cNvSpPr/>
-          <p:nvPr/>
-        </p:nvSpPr>
-        <p:spPr>
-          <a:xfrm>
-            <a:off x="10684931" y="109728"/>
-            <a:ext cx="1195868" cy="530352"/>
-          </a:xfrm>
-          <a:prstGeom prst="roundRect">
-            <a:avLst>
-              <a:gd name="adj" fmla="val 8000"/>
-            </a:avLst>
-          </a:prstGeom>
-          <a:solidFill>
-            <a:srgbClr val="000000"/>
-          </a:solidFill>
-          <a:ln>
-            <a:noFill/>
-          </a:ln>
-        </p:spPr>
-        <p:style>
-          <a:lnRef idx="1">
-            <a:schemeClr val="accent1"/>
-          </a:lnRef>
-          <a:fillRef idx="3">
-            <a:schemeClr val="accent1"/>
-          </a:fillRef>
-          <a:effectRef idx="2">
-            <a:schemeClr val="accent1"/>
-          </a:effectRef>
-          <a:fontRef idx="minor">
-            <a:schemeClr val="lt1"/>
-          </a:fontRef>
-        </p:style>
-        <p:txBody>
-          <a:bodyPr rtlCol="0" anchor="ctr"/>
-          <a:lstStyle/>
-          <a:p>
-            <a:pPr algn="ctr"/>
-          </a:p>
-        </p:txBody>
-      </p:sp>
       <p:pic>
         <p:nvPicPr>
-          <p:cNvPr id="7" name="Picture 6" descr="mef-logo.png"/>
+          <p:cNvPr id="6" name="Picture 5" descr="mef-logo.png"/>
           <p:cNvPicPr>
             <a:picLocks noChangeAspect="1"/>
           </p:cNvPicPr>
@@ -24516,8 +23662,8 @@
         </p:blipFill>
         <p:spPr>
           <a:xfrm>
-            <a:off x="10758083" y="146304"/>
-            <a:ext cx="1122717" cy="457200"/>
+            <a:off x="10613115" y="128016"/>
+            <a:ext cx="1231108" cy="475488"/>
           </a:xfrm>
           <a:prstGeom prst="rect">
             <a:avLst/>
@@ -24526,7 +23672,7 @@
       </p:pic>
       <p:sp>
         <p:nvSpPr>
-          <p:cNvPr id="8" name="TextBox 7"/>
+          <p:cNvPr id="7" name="TextBox 6"/>
           <p:cNvSpPr txBox="1"/>
           <p:nvPr/>
         </p:nvSpPr>
@@ -24552,14 +23698,14 @@
                 </a:solidFill>
                 <a:latin typeface="Calibri"/>
               </a:rPr>
-              <a:t>Partie 6  ·  Réalisation</a:t>
-            </a:r>
-          </a:p>
-        </p:txBody>
-      </p:sp>
-      <p:sp>
-        <p:nvSpPr>
-          <p:cNvPr id="9" name="TextBox 8"/>
+              <a:t>Partie 5  ·  Réalisation</a:t>
+            </a:r>
+          </a:p>
+        </p:txBody>
+      </p:sp>
+      <p:sp>
+        <p:nvSpPr>
+          <p:cNvPr id="8" name="TextBox 7"/>
           <p:cNvSpPr txBox="1"/>
           <p:nvPr/>
         </p:nvSpPr>
@@ -24592,7 +23738,7 @@
       </p:sp>
       <p:sp>
         <p:nvSpPr>
-          <p:cNvPr id="10" name="Rectangle 9"/>
+          <p:cNvPr id="9" name="Rectangle 8"/>
           <p:cNvSpPr/>
           <p:nvPr/>
         </p:nvSpPr>
@@ -24635,7 +23781,7 @@
       </p:sp>
       <p:sp>
         <p:nvSpPr>
-          <p:cNvPr id="11" name="TextBox 10"/>
+          <p:cNvPr id="10" name="TextBox 9"/>
           <p:cNvSpPr txBox="1"/>
           <p:nvPr/>
         </p:nvSpPr>
@@ -24668,7 +23814,7 @@
       </p:sp>
       <p:sp>
         <p:nvSpPr>
-          <p:cNvPr id="12" name="TextBox 11"/>
+          <p:cNvPr id="11" name="TextBox 10"/>
           <p:cNvSpPr txBox="1"/>
           <p:nvPr/>
         </p:nvSpPr>
@@ -24701,7 +23847,7 @@
       </p:sp>
       <p:sp>
         <p:nvSpPr>
-          <p:cNvPr id="13" name="TextBox 12"/>
+          <p:cNvPr id="12" name="TextBox 11"/>
           <p:cNvSpPr txBox="1"/>
           <p:nvPr/>
         </p:nvSpPr>
@@ -24734,7 +23880,7 @@
       </p:sp>
       <p:sp>
         <p:nvSpPr>
-          <p:cNvPr id="14" name="TextBox 13"/>
+          <p:cNvPr id="13" name="TextBox 12"/>
           <p:cNvSpPr txBox="1"/>
           <p:nvPr/>
         </p:nvSpPr>
@@ -24767,7 +23913,7 @@
       </p:sp>
       <p:pic>
         <p:nvPicPr>
-          <p:cNvPr id="15" name="Picture 14" descr="screenshot-convocation-pdf.png"/>
+          <p:cNvPr id="14" name="Picture 13" descr="screenshot-convocation-pdf.png"/>
           <p:cNvPicPr>
             <a:picLocks noChangeAspect="1"/>
           </p:cNvPicPr>
@@ -24791,7 +23937,7 @@
       </p:pic>
       <p:pic>
         <p:nvPicPr>
-          <p:cNvPr id="16" name="Picture 15" descr="screenshot-admin-candidats.png"/>
+          <p:cNvPr id="15" name="Picture 14" descr="screenshot-admin-candidats.png"/>
           <p:cNvPicPr>
             <a:picLocks noChangeAspect="1"/>
           </p:cNvPicPr>
@@ -24984,54 +24130,9 @@
           </a:prstGeom>
         </p:spPr>
       </p:pic>
-      <p:sp>
-        <p:nvSpPr>
-          <p:cNvPr id="6" name="Rounded Rectangle 5"/>
-          <p:cNvSpPr/>
-          <p:nvPr/>
-        </p:nvSpPr>
-        <p:spPr>
-          <a:xfrm>
-            <a:off x="10684931" y="109728"/>
-            <a:ext cx="1195868" cy="530352"/>
-          </a:xfrm>
-          <a:prstGeom prst="roundRect">
-            <a:avLst>
-              <a:gd name="adj" fmla="val 8000"/>
-            </a:avLst>
-          </a:prstGeom>
-          <a:solidFill>
-            <a:srgbClr val="000000"/>
-          </a:solidFill>
-          <a:ln>
-            <a:noFill/>
-          </a:ln>
-        </p:spPr>
-        <p:style>
-          <a:lnRef idx="1">
-            <a:schemeClr val="accent1"/>
-          </a:lnRef>
-          <a:fillRef idx="3">
-            <a:schemeClr val="accent1"/>
-          </a:fillRef>
-          <a:effectRef idx="2">
-            <a:schemeClr val="accent1"/>
-          </a:effectRef>
-          <a:fontRef idx="minor">
-            <a:schemeClr val="lt1"/>
-          </a:fontRef>
-        </p:style>
-        <p:txBody>
-          <a:bodyPr rtlCol="0" anchor="ctr"/>
-          <a:lstStyle/>
-          <a:p>
-            <a:pPr algn="ctr"/>
-          </a:p>
-        </p:txBody>
-      </p:sp>
       <p:pic>
         <p:nvPicPr>
-          <p:cNvPr id="7" name="Picture 6" descr="mef-logo.png"/>
+          <p:cNvPr id="6" name="Picture 5" descr="mef-logo.png"/>
           <p:cNvPicPr>
             <a:picLocks noChangeAspect="1"/>
           </p:cNvPicPr>
@@ -25045,8 +24146,8 @@
         </p:blipFill>
         <p:spPr>
           <a:xfrm>
-            <a:off x="10758083" y="146304"/>
-            <a:ext cx="1122717" cy="457200"/>
+            <a:off x="10613115" y="128016"/>
+            <a:ext cx="1231108" cy="475488"/>
           </a:xfrm>
           <a:prstGeom prst="rect">
             <a:avLst/>
@@ -25055,7 +24156,7 @@
       </p:pic>
       <p:sp>
         <p:nvSpPr>
-          <p:cNvPr id="8" name="TextBox 7"/>
+          <p:cNvPr id="7" name="TextBox 6"/>
           <p:cNvSpPr txBox="1"/>
           <p:nvPr/>
         </p:nvSpPr>
@@ -25081,14 +24182,14 @@
                 </a:solidFill>
                 <a:latin typeface="Calibri"/>
               </a:rPr>
-              <a:t>Partie 7  ·  Bilan et perspectives</a:t>
-            </a:r>
-          </a:p>
-        </p:txBody>
-      </p:sp>
-      <p:sp>
-        <p:nvSpPr>
-          <p:cNvPr id="9" name="TextBox 8"/>
+              <a:t>Partie 6  ·  Bilan et perspectives</a:t>
+            </a:r>
+          </a:p>
+        </p:txBody>
+      </p:sp>
+      <p:sp>
+        <p:nvSpPr>
+          <p:cNvPr id="8" name="TextBox 7"/>
           <p:cNvSpPr txBox="1"/>
           <p:nvPr/>
         </p:nvSpPr>
@@ -25121,7 +24222,7 @@
       </p:sp>
       <p:sp>
         <p:nvSpPr>
-          <p:cNvPr id="10" name="Rectangle 9"/>
+          <p:cNvPr id="9" name="Rectangle 8"/>
           <p:cNvSpPr/>
           <p:nvPr/>
         </p:nvSpPr>
@@ -25164,7 +24265,7 @@
       </p:sp>
       <p:sp>
         <p:nvSpPr>
-          <p:cNvPr id="11" name="TextBox 10"/>
+          <p:cNvPr id="10" name="TextBox 9"/>
           <p:cNvSpPr txBox="1"/>
           <p:nvPr/>
         </p:nvSpPr>
@@ -25197,7 +24298,7 @@
       </p:sp>
       <p:sp>
         <p:nvSpPr>
-          <p:cNvPr id="12" name="TextBox 11"/>
+          <p:cNvPr id="11" name="TextBox 10"/>
           <p:cNvSpPr txBox="1"/>
           <p:nvPr/>
         </p:nvSpPr>
@@ -25230,7 +24331,7 @@
       </p:sp>
       <p:sp>
         <p:nvSpPr>
-          <p:cNvPr id="13" name="Rounded Rectangle 12"/>
+          <p:cNvPr id="12" name="Rounded Rectangle 11"/>
           <p:cNvSpPr/>
           <p:nvPr/>
         </p:nvSpPr>
@@ -25277,7 +24378,7 @@
       </p:sp>
       <p:sp>
         <p:nvSpPr>
-          <p:cNvPr id="14" name="Oval 13"/>
+          <p:cNvPr id="13" name="Oval 12"/>
           <p:cNvSpPr/>
           <p:nvPr/>
         </p:nvSpPr>
@@ -25320,7 +24421,7 @@
       </p:sp>
       <p:sp>
         <p:nvSpPr>
-          <p:cNvPr id="15" name="TextBox 14"/>
+          <p:cNvPr id="14" name="TextBox 13"/>
           <p:cNvSpPr txBox="1"/>
           <p:nvPr/>
         </p:nvSpPr>
@@ -25353,7 +24454,7 @@
       </p:sp>
       <p:sp>
         <p:nvSpPr>
-          <p:cNvPr id="16" name="TextBox 15"/>
+          <p:cNvPr id="15" name="TextBox 14"/>
           <p:cNvSpPr txBox="1"/>
           <p:nvPr/>
         </p:nvSpPr>
@@ -25386,7 +24487,7 @@
       </p:sp>
       <p:sp>
         <p:nvSpPr>
-          <p:cNvPr id="17" name="TextBox 16"/>
+          <p:cNvPr id="16" name="TextBox 15"/>
           <p:cNvSpPr txBox="1"/>
           <p:nvPr/>
         </p:nvSpPr>
@@ -25419,7 +24520,7 @@
       </p:sp>
       <p:sp>
         <p:nvSpPr>
-          <p:cNvPr id="18" name="Rounded Rectangle 17"/>
+          <p:cNvPr id="17" name="Rounded Rectangle 16"/>
           <p:cNvSpPr/>
           <p:nvPr/>
         </p:nvSpPr>
@@ -25466,7 +24567,7 @@
       </p:sp>
       <p:sp>
         <p:nvSpPr>
-          <p:cNvPr id="19" name="Oval 18"/>
+          <p:cNvPr id="18" name="Oval 17"/>
           <p:cNvSpPr/>
           <p:nvPr/>
         </p:nvSpPr>
@@ -25509,7 +24610,7 @@
       </p:sp>
       <p:sp>
         <p:nvSpPr>
-          <p:cNvPr id="20" name="TextBox 19"/>
+          <p:cNvPr id="19" name="TextBox 18"/>
           <p:cNvSpPr txBox="1"/>
           <p:nvPr/>
         </p:nvSpPr>
@@ -25542,7 +24643,7 @@
       </p:sp>
       <p:sp>
         <p:nvSpPr>
-          <p:cNvPr id="21" name="TextBox 20"/>
+          <p:cNvPr id="20" name="TextBox 19"/>
           <p:cNvSpPr txBox="1"/>
           <p:nvPr/>
         </p:nvSpPr>
@@ -25575,7 +24676,7 @@
       </p:sp>
       <p:sp>
         <p:nvSpPr>
-          <p:cNvPr id="22" name="TextBox 21"/>
+          <p:cNvPr id="21" name="TextBox 20"/>
           <p:cNvSpPr txBox="1"/>
           <p:nvPr/>
         </p:nvSpPr>
@@ -25608,7 +24709,7 @@
       </p:sp>
       <p:sp>
         <p:nvSpPr>
-          <p:cNvPr id="23" name="Rounded Rectangle 22"/>
+          <p:cNvPr id="22" name="Rounded Rectangle 21"/>
           <p:cNvSpPr/>
           <p:nvPr/>
         </p:nvSpPr>
@@ -25655,7 +24756,7 @@
       </p:sp>
       <p:sp>
         <p:nvSpPr>
-          <p:cNvPr id="24" name="Oval 23"/>
+          <p:cNvPr id="23" name="Oval 22"/>
           <p:cNvSpPr/>
           <p:nvPr/>
         </p:nvSpPr>
@@ -25698,7 +24799,7 @@
       </p:sp>
       <p:sp>
         <p:nvSpPr>
-          <p:cNvPr id="25" name="TextBox 24"/>
+          <p:cNvPr id="24" name="TextBox 23"/>
           <p:cNvSpPr txBox="1"/>
           <p:nvPr/>
         </p:nvSpPr>
@@ -25731,7 +24832,7 @@
       </p:sp>
       <p:sp>
         <p:nvSpPr>
-          <p:cNvPr id="26" name="TextBox 25"/>
+          <p:cNvPr id="25" name="TextBox 24"/>
           <p:cNvSpPr txBox="1"/>
           <p:nvPr/>
         </p:nvSpPr>
@@ -25764,7 +24865,7 @@
       </p:sp>
       <p:sp>
         <p:nvSpPr>
-          <p:cNvPr id="27" name="TextBox 26"/>
+          <p:cNvPr id="26" name="TextBox 25"/>
           <p:cNvSpPr txBox="1"/>
           <p:nvPr/>
         </p:nvSpPr>
@@ -25797,7 +24898,7 @@
       </p:sp>
       <p:sp>
         <p:nvSpPr>
-          <p:cNvPr id="28" name="Rounded Rectangle 27"/>
+          <p:cNvPr id="27" name="Rounded Rectangle 26"/>
           <p:cNvSpPr/>
           <p:nvPr/>
         </p:nvSpPr>
@@ -25844,7 +24945,7 @@
       </p:sp>
       <p:sp>
         <p:nvSpPr>
-          <p:cNvPr id="29" name="Oval 28"/>
+          <p:cNvPr id="28" name="Oval 27"/>
           <p:cNvSpPr/>
           <p:nvPr/>
         </p:nvSpPr>
@@ -25887,7 +24988,7 @@
       </p:sp>
       <p:sp>
         <p:nvSpPr>
-          <p:cNvPr id="30" name="TextBox 29"/>
+          <p:cNvPr id="29" name="TextBox 28"/>
           <p:cNvSpPr txBox="1"/>
           <p:nvPr/>
         </p:nvSpPr>
@@ -25920,7 +25021,7 @@
       </p:sp>
       <p:sp>
         <p:nvSpPr>
-          <p:cNvPr id="31" name="TextBox 30"/>
+          <p:cNvPr id="30" name="TextBox 29"/>
           <p:cNvSpPr txBox="1"/>
           <p:nvPr/>
         </p:nvSpPr>
@@ -25953,7 +25054,7 @@
       </p:sp>
       <p:sp>
         <p:nvSpPr>
-          <p:cNvPr id="32" name="TextBox 31"/>
+          <p:cNvPr id="31" name="TextBox 30"/>
           <p:cNvSpPr txBox="1"/>
           <p:nvPr/>
         </p:nvSpPr>
@@ -25979,14 +25080,14 @@
                 </a:solidFill>
                 <a:latin typeface="Calibri"/>
               </a:rPr>
-              <a:t>UML validé avant le code, cascade, stage de 3 mois à la DAAG.</a:t>
-            </a:r>
-          </a:p>
-        </p:txBody>
-      </p:sp>
-      <p:sp>
-        <p:nvSpPr>
-          <p:cNvPr id="33" name="Rounded Rectangle 32"/>
+              <a:t>UML validé avant le code, cascade, stage de cinq mois et demi à la DAAG.</a:t>
+            </a:r>
+          </a:p>
+        </p:txBody>
+      </p:sp>
+      <p:sp>
+        <p:nvSpPr>
+          <p:cNvPr id="32" name="Rounded Rectangle 31"/>
           <p:cNvSpPr/>
           <p:nvPr/>
         </p:nvSpPr>
@@ -26031,7 +25132,7 @@
       </p:sp>
       <p:sp>
         <p:nvSpPr>
-          <p:cNvPr id="34" name="TextBox 33"/>
+          <p:cNvPr id="33" name="TextBox 32"/>
           <p:cNvSpPr txBox="1"/>
           <p:nvPr/>
         </p:nvSpPr>
@@ -26053,7 +25154,7 @@
             <a:r>
               <a:rPr sz="1400" b="1" i="0">
                 <a:solidFill>
-                  <a:srgbClr val="008591"/>
+                  <a:srgbClr val="99DDD6"/>
                 </a:solidFill>
                 <a:latin typeface="Calibri"/>
               </a:rPr>
@@ -26064,7 +25165,7 @@
       </p:sp>
       <p:sp>
         <p:nvSpPr>
-          <p:cNvPr id="35" name="TextBox 34"/>
+          <p:cNvPr id="34" name="TextBox 33"/>
           <p:cNvSpPr txBox="1"/>
           <p:nvPr/>
         </p:nvSpPr>
@@ -26266,54 +25367,9 @@
           </a:prstGeom>
         </p:spPr>
       </p:pic>
-      <p:sp>
-        <p:nvSpPr>
-          <p:cNvPr id="6" name="Rounded Rectangle 5"/>
-          <p:cNvSpPr/>
-          <p:nvPr/>
-        </p:nvSpPr>
-        <p:spPr>
-          <a:xfrm>
-            <a:off x="10684931" y="109728"/>
-            <a:ext cx="1195868" cy="530352"/>
-          </a:xfrm>
-          <a:prstGeom prst="roundRect">
-            <a:avLst>
-              <a:gd name="adj" fmla="val 8000"/>
-            </a:avLst>
-          </a:prstGeom>
-          <a:solidFill>
-            <a:srgbClr val="000000"/>
-          </a:solidFill>
-          <a:ln>
-            <a:noFill/>
-          </a:ln>
-        </p:spPr>
-        <p:style>
-          <a:lnRef idx="1">
-            <a:schemeClr val="accent1"/>
-          </a:lnRef>
-          <a:fillRef idx="3">
-            <a:schemeClr val="accent1"/>
-          </a:fillRef>
-          <a:effectRef idx="2">
-            <a:schemeClr val="accent1"/>
-          </a:effectRef>
-          <a:fontRef idx="minor">
-            <a:schemeClr val="lt1"/>
-          </a:fontRef>
-        </p:style>
-        <p:txBody>
-          <a:bodyPr rtlCol="0" anchor="ctr"/>
-          <a:lstStyle/>
-          <a:p>
-            <a:pPr algn="ctr"/>
-          </a:p>
-        </p:txBody>
-      </p:sp>
       <p:pic>
         <p:nvPicPr>
-          <p:cNvPr id="7" name="Picture 6" descr="mef-logo.png"/>
+          <p:cNvPr id="6" name="Picture 5" descr="mef-logo.png"/>
           <p:cNvPicPr>
             <a:picLocks noChangeAspect="1"/>
           </p:cNvPicPr>
@@ -26327,8 +25383,8 @@
         </p:blipFill>
         <p:spPr>
           <a:xfrm>
-            <a:off x="10758083" y="146304"/>
-            <a:ext cx="1122717" cy="457200"/>
+            <a:off x="10613115" y="128016"/>
+            <a:ext cx="1231108" cy="475488"/>
           </a:xfrm>
           <a:prstGeom prst="rect">
             <a:avLst/>
@@ -26337,7 +25393,7 @@
       </p:pic>
       <p:sp>
         <p:nvSpPr>
-          <p:cNvPr id="8" name="TextBox 7"/>
+          <p:cNvPr id="7" name="TextBox 6"/>
           <p:cNvSpPr txBox="1"/>
           <p:nvPr/>
         </p:nvSpPr>
@@ -26363,14 +25419,14 @@
                 </a:solidFill>
                 <a:latin typeface="Calibri"/>
               </a:rPr>
-              <a:t>Partie 7  ·  Bilan et perspectives</a:t>
-            </a:r>
-          </a:p>
-        </p:txBody>
-      </p:sp>
-      <p:sp>
-        <p:nvSpPr>
-          <p:cNvPr id="9" name="TextBox 8"/>
+              <a:t>Partie 6  ·  Bilan et perspectives</a:t>
+            </a:r>
+          </a:p>
+        </p:txBody>
+      </p:sp>
+      <p:sp>
+        <p:nvSpPr>
+          <p:cNvPr id="8" name="TextBox 7"/>
           <p:cNvSpPr txBox="1"/>
           <p:nvPr/>
         </p:nvSpPr>
@@ -26403,7 +25459,7 @@
       </p:sp>
       <p:sp>
         <p:nvSpPr>
-          <p:cNvPr id="10" name="Rectangle 9"/>
+          <p:cNvPr id="9" name="Rectangle 8"/>
           <p:cNvSpPr/>
           <p:nvPr/>
         </p:nvSpPr>
@@ -26446,7 +25502,7 @@
       </p:sp>
       <p:sp>
         <p:nvSpPr>
-          <p:cNvPr id="11" name="TextBox 10"/>
+          <p:cNvPr id="10" name="TextBox 9"/>
           <p:cNvSpPr txBox="1"/>
           <p:nvPr/>
         </p:nvSpPr>
@@ -26479,7 +25535,7 @@
       </p:sp>
       <p:sp>
         <p:nvSpPr>
-          <p:cNvPr id="12" name="TextBox 11"/>
+          <p:cNvPr id="11" name="TextBox 10"/>
           <p:cNvSpPr txBox="1"/>
           <p:nvPr/>
         </p:nvSpPr>
@@ -26512,7 +25568,7 @@
       </p:sp>
       <p:sp>
         <p:nvSpPr>
-          <p:cNvPr id="13" name="Rounded Rectangle 12"/>
+          <p:cNvPr id="12" name="Rounded Rectangle 11"/>
           <p:cNvSpPr/>
           <p:nvPr/>
         </p:nvSpPr>
@@ -26559,7 +25615,7 @@
       </p:sp>
       <p:sp>
         <p:nvSpPr>
-          <p:cNvPr id="14" name="Rectangle 13"/>
+          <p:cNvPr id="13" name="Rectangle 12"/>
           <p:cNvSpPr/>
           <p:nvPr/>
         </p:nvSpPr>
@@ -26602,7 +25658,7 @@
       </p:sp>
       <p:sp>
         <p:nvSpPr>
-          <p:cNvPr id="15" name="TextBox 14"/>
+          <p:cNvPr id="14" name="TextBox 13"/>
           <p:cNvSpPr txBox="1"/>
           <p:nvPr/>
         </p:nvSpPr>
@@ -26635,7 +25691,7 @@
       </p:sp>
       <p:sp>
         <p:nvSpPr>
-          <p:cNvPr id="16" name="TextBox 15"/>
+          <p:cNvPr id="15" name="TextBox 14"/>
           <p:cNvSpPr txBox="1"/>
           <p:nvPr/>
         </p:nvSpPr>
@@ -26667,7 +25723,7 @@
                 </a:solidFill>
                 <a:latin typeface="Calibri"/>
               </a:rPr>
-              <a:t>•   Jeton d'accès seul : ajouter un refresh token.</a:t>
+              <a:t>•   Jeton d'accès seul : ajouter un jeton de rafraîchissement.</a:t>
             </a:r>
           </a:p>
           <a:p>
@@ -26722,7 +25778,7 @@
       </p:sp>
       <p:sp>
         <p:nvSpPr>
-          <p:cNvPr id="17" name="Rounded Rectangle 16"/>
+          <p:cNvPr id="16" name="Rounded Rectangle 15"/>
           <p:cNvSpPr/>
           <p:nvPr/>
         </p:nvSpPr>
@@ -26769,7 +25825,7 @@
       </p:sp>
       <p:sp>
         <p:nvSpPr>
-          <p:cNvPr id="18" name="Rectangle 17"/>
+          <p:cNvPr id="17" name="Rectangle 16"/>
           <p:cNvSpPr/>
           <p:nvPr/>
         </p:nvSpPr>
@@ -26812,7 +25868,7 @@
       </p:sp>
       <p:sp>
         <p:nvSpPr>
-          <p:cNvPr id="19" name="TextBox 18"/>
+          <p:cNvPr id="18" name="TextBox 17"/>
           <p:cNvSpPr txBox="1"/>
           <p:nvPr/>
         </p:nvSpPr>
@@ -26845,7 +25901,7 @@
       </p:sp>
       <p:sp>
         <p:nvSpPr>
-          <p:cNvPr id="20" name="TextBox 19"/>
+          <p:cNvPr id="19" name="TextBox 18"/>
           <p:cNvSpPr txBox="1"/>
           <p:nvPr/>
         </p:nvSpPr>
@@ -27058,54 +26114,9 @@
           </a:prstGeom>
         </p:spPr>
       </p:pic>
-      <p:sp>
-        <p:nvSpPr>
-          <p:cNvPr id="5" name="Rounded Rectangle 4"/>
-          <p:cNvSpPr/>
-          <p:nvPr/>
-        </p:nvSpPr>
-        <p:spPr>
-          <a:xfrm>
-            <a:off x="10001346" y="164592"/>
-            <a:ext cx="1861165" cy="822960"/>
-          </a:xfrm>
-          <a:prstGeom prst="roundRect">
-            <a:avLst>
-              <a:gd name="adj" fmla="val 8000"/>
-            </a:avLst>
-          </a:prstGeom>
-          <a:solidFill>
-            <a:srgbClr val="000000"/>
-          </a:solidFill>
-          <a:ln>
-            <a:noFill/>
-          </a:ln>
-        </p:spPr>
-        <p:style>
-          <a:lnRef idx="1">
-            <a:schemeClr val="accent1"/>
-          </a:lnRef>
-          <a:fillRef idx="3">
-            <a:schemeClr val="accent1"/>
-          </a:fillRef>
-          <a:effectRef idx="2">
-            <a:schemeClr val="accent1"/>
-          </a:effectRef>
-          <a:fontRef idx="minor">
-            <a:schemeClr val="lt1"/>
-          </a:fontRef>
-        </p:style>
-        <p:txBody>
-          <a:bodyPr rtlCol="0" anchor="ctr"/>
-          <a:lstStyle/>
-          <a:p>
-            <a:pPr algn="ctr"/>
-          </a:p>
-        </p:txBody>
-      </p:sp>
       <p:pic>
         <p:nvPicPr>
-          <p:cNvPr id="6" name="Picture 5" descr="mef-logo.png"/>
+          <p:cNvPr id="5" name="Picture 4" descr="mef-logo.png"/>
           <p:cNvPicPr>
             <a:picLocks noChangeAspect="1"/>
           </p:cNvPicPr>
@@ -27119,8 +26130,8 @@
         </p:blipFill>
         <p:spPr>
           <a:xfrm>
-            <a:off x="10111074" y="219456"/>
-            <a:ext cx="1751438" cy="713232"/>
+            <a:off x="9960985" y="201168"/>
+            <a:ext cx="1846663" cy="713232"/>
           </a:xfrm>
           <a:prstGeom prst="rect">
             <a:avLst/>
@@ -27129,7 +26140,7 @@
       </p:pic>
       <p:sp>
         <p:nvSpPr>
-          <p:cNvPr id="7" name="Rectangle 6"/>
+          <p:cNvPr id="6" name="Rectangle 5"/>
           <p:cNvSpPr/>
           <p:nvPr/>
         </p:nvSpPr>
@@ -27172,7 +26183,7 @@
       </p:sp>
       <p:sp>
         <p:nvSpPr>
-          <p:cNvPr id="8" name="TextBox 7"/>
+          <p:cNvPr id="7" name="TextBox 6"/>
           <p:cNvSpPr txBox="1"/>
           <p:nvPr/>
         </p:nvSpPr>
@@ -27194,7 +26205,7 @@
             <a:r>
               <a:rPr sz="1600" b="0" i="0">
                 <a:solidFill>
-                  <a:srgbClr val="008591"/>
+                  <a:srgbClr val="99DDD6"/>
                 </a:solidFill>
                 <a:latin typeface="Calibri"/>
               </a:rPr>
@@ -27205,7 +26216,7 @@
       </p:sp>
       <p:sp>
         <p:nvSpPr>
-          <p:cNvPr id="9" name="TextBox 8"/>
+          <p:cNvPr id="8" name="TextBox 7"/>
           <p:cNvSpPr txBox="1"/>
           <p:nvPr/>
         </p:nvSpPr>
@@ -27238,7 +26249,7 @@
       </p:sp>
       <p:sp>
         <p:nvSpPr>
-          <p:cNvPr id="10" name="TextBox 9"/>
+          <p:cNvPr id="9" name="TextBox 8"/>
           <p:cNvSpPr txBox="1"/>
           <p:nvPr/>
         </p:nvSpPr>
@@ -27271,7 +26282,7 @@
       </p:sp>
       <p:sp>
         <p:nvSpPr>
-          <p:cNvPr id="11" name="Rounded Rectangle 10"/>
+          <p:cNvPr id="10" name="Rounded Rectangle 9"/>
           <p:cNvSpPr/>
           <p:nvPr/>
         </p:nvSpPr>
@@ -27316,7 +26327,7 @@
       </p:sp>
       <p:sp>
         <p:nvSpPr>
-          <p:cNvPr id="12" name="TextBox 11"/>
+          <p:cNvPr id="11" name="TextBox 10"/>
           <p:cNvSpPr txBox="1"/>
           <p:nvPr/>
         </p:nvSpPr>
@@ -27349,7 +26360,7 @@
       </p:sp>
       <p:sp>
         <p:nvSpPr>
-          <p:cNvPr id="13" name="TextBox 12"/>
+          <p:cNvPr id="12" name="TextBox 11"/>
           <p:cNvSpPr txBox="1"/>
           <p:nvPr/>
         </p:nvSpPr>
@@ -27382,7 +26393,7 @@
       </p:sp>
       <p:sp>
         <p:nvSpPr>
-          <p:cNvPr id="14" name="Rounded Rectangle 13"/>
+          <p:cNvPr id="13" name="Rounded Rectangle 12"/>
           <p:cNvSpPr/>
           <p:nvPr/>
         </p:nvSpPr>
@@ -27427,7 +26438,7 @@
       </p:sp>
       <p:sp>
         <p:nvSpPr>
-          <p:cNvPr id="15" name="TextBox 14"/>
+          <p:cNvPr id="14" name="TextBox 13"/>
           <p:cNvSpPr txBox="1"/>
           <p:nvPr/>
         </p:nvSpPr>
@@ -27460,7 +26471,7 @@
       </p:sp>
       <p:sp>
         <p:nvSpPr>
-          <p:cNvPr id="16" name="TextBox 15"/>
+          <p:cNvPr id="15" name="TextBox 14"/>
           <p:cNvSpPr txBox="1"/>
           <p:nvPr/>
         </p:nvSpPr>
@@ -27493,7 +26504,7 @@
       </p:sp>
       <p:sp>
         <p:nvSpPr>
-          <p:cNvPr id="17" name="Rounded Rectangle 16"/>
+          <p:cNvPr id="16" name="Rounded Rectangle 15"/>
           <p:cNvSpPr/>
           <p:nvPr/>
         </p:nvSpPr>
@@ -27538,7 +26549,7 @@
       </p:sp>
       <p:sp>
         <p:nvSpPr>
-          <p:cNvPr id="18" name="TextBox 17"/>
+          <p:cNvPr id="17" name="TextBox 16"/>
           <p:cNvSpPr txBox="1"/>
           <p:nvPr/>
         </p:nvSpPr>
@@ -27571,7 +26582,7 @@
       </p:sp>
       <p:sp>
         <p:nvSpPr>
-          <p:cNvPr id="19" name="TextBox 18"/>
+          <p:cNvPr id="18" name="TextBox 17"/>
           <p:cNvSpPr txBox="1"/>
           <p:nvPr/>
         </p:nvSpPr>
@@ -27604,7 +26615,7 @@
       </p:sp>
       <p:sp>
         <p:nvSpPr>
-          <p:cNvPr id="20" name="Rounded Rectangle 19"/>
+          <p:cNvPr id="19" name="Rounded Rectangle 18"/>
           <p:cNvSpPr/>
           <p:nvPr/>
         </p:nvSpPr>
@@ -27649,7 +26660,7 @@
       </p:sp>
       <p:sp>
         <p:nvSpPr>
-          <p:cNvPr id="21" name="TextBox 20"/>
+          <p:cNvPr id="20" name="TextBox 19"/>
           <p:cNvSpPr txBox="1"/>
           <p:nvPr/>
         </p:nvSpPr>
@@ -27682,7 +26693,7 @@
       </p:sp>
       <p:sp>
         <p:nvSpPr>
-          <p:cNvPr id="22" name="TextBox 21"/>
+          <p:cNvPr id="21" name="TextBox 20"/>
           <p:cNvSpPr txBox="1"/>
           <p:nvPr/>
         </p:nvSpPr>
@@ -27715,7 +26726,7 @@
       </p:sp>
       <p:sp>
         <p:nvSpPr>
-          <p:cNvPr id="23" name="TextBox 22"/>
+          <p:cNvPr id="22" name="TextBox 21"/>
           <p:cNvSpPr txBox="1"/>
           <p:nvPr/>
         </p:nvSpPr>
@@ -27748,7 +26759,7 @@
       </p:sp>
       <p:sp>
         <p:nvSpPr>
-          <p:cNvPr id="24" name="Rectangle 23"/>
+          <p:cNvPr id="23" name="Rectangle 22"/>
           <p:cNvSpPr/>
           <p:nvPr/>
         </p:nvSpPr>
@@ -27791,7 +26802,7 @@
       </p:sp>
       <p:sp>
         <p:nvSpPr>
-          <p:cNvPr id="25" name="TextBox 24"/>
+          <p:cNvPr id="24" name="TextBox 23"/>
           <p:cNvSpPr txBox="1"/>
           <p:nvPr/>
         </p:nvSpPr>
@@ -27824,7 +26835,7 @@
       </p:sp>
       <p:sp>
         <p:nvSpPr>
-          <p:cNvPr id="26" name="TextBox 25"/>
+          <p:cNvPr id="25" name="TextBox 24"/>
           <p:cNvSpPr txBox="1"/>
           <p:nvPr/>
         </p:nvSpPr>
@@ -28026,54 +27037,9 @@
           </a:prstGeom>
         </p:spPr>
       </p:pic>
-      <p:sp>
-        <p:nvSpPr>
-          <p:cNvPr id="6" name="Rounded Rectangle 5"/>
-          <p:cNvSpPr/>
-          <p:nvPr/>
-        </p:nvSpPr>
-        <p:spPr>
-          <a:xfrm>
-            <a:off x="10684931" y="109728"/>
-            <a:ext cx="1195868" cy="530352"/>
-          </a:xfrm>
-          <a:prstGeom prst="roundRect">
-            <a:avLst>
-              <a:gd name="adj" fmla="val 8000"/>
-            </a:avLst>
-          </a:prstGeom>
-          <a:solidFill>
-            <a:srgbClr val="000000"/>
-          </a:solidFill>
-          <a:ln>
-            <a:noFill/>
-          </a:ln>
-        </p:spPr>
-        <p:style>
-          <a:lnRef idx="1">
-            <a:schemeClr val="accent1"/>
-          </a:lnRef>
-          <a:fillRef idx="3">
-            <a:schemeClr val="accent1"/>
-          </a:fillRef>
-          <a:effectRef idx="2">
-            <a:schemeClr val="accent1"/>
-          </a:effectRef>
-          <a:fontRef idx="minor">
-            <a:schemeClr val="lt1"/>
-          </a:fontRef>
-        </p:style>
-        <p:txBody>
-          <a:bodyPr rtlCol="0" anchor="ctr"/>
-          <a:lstStyle/>
-          <a:p>
-            <a:pPr algn="ctr"/>
-          </a:p>
-        </p:txBody>
-      </p:sp>
       <p:pic>
         <p:nvPicPr>
-          <p:cNvPr id="7" name="Picture 6" descr="mef-logo.png"/>
+          <p:cNvPr id="6" name="Picture 5" descr="mef-logo.png"/>
           <p:cNvPicPr>
             <a:picLocks noChangeAspect="1"/>
           </p:cNvPicPr>
@@ -28087,8 +27053,8 @@
         </p:blipFill>
         <p:spPr>
           <a:xfrm>
-            <a:off x="10758083" y="146304"/>
-            <a:ext cx="1122717" cy="457200"/>
+            <a:off x="10613115" y="128016"/>
+            <a:ext cx="1231108" cy="475488"/>
           </a:xfrm>
           <a:prstGeom prst="rect">
             <a:avLst/>
@@ -28097,7 +27063,7 @@
       </p:pic>
       <p:sp>
         <p:nvSpPr>
-          <p:cNvPr id="8" name="TextBox 7"/>
+          <p:cNvPr id="7" name="TextBox 6"/>
           <p:cNvSpPr txBox="1"/>
           <p:nvPr/>
         </p:nvSpPr>
@@ -28123,14 +27089,14 @@
                 </a:solidFill>
                 <a:latin typeface="Calibri"/>
               </a:rPr>
-              <a:t>Partie 2  ·  Contexte et problématique</a:t>
-            </a:r>
-          </a:p>
-        </p:txBody>
-      </p:sp>
-      <p:sp>
-        <p:nvSpPr>
-          <p:cNvPr id="9" name="TextBox 8"/>
+              <a:t>Partie 1  ·  Contexte et problématique</a:t>
+            </a:r>
+          </a:p>
+        </p:txBody>
+      </p:sp>
+      <p:sp>
+        <p:nvSpPr>
+          <p:cNvPr id="8" name="TextBox 7"/>
           <p:cNvSpPr txBox="1"/>
           <p:nvPr/>
         </p:nvSpPr>
@@ -28163,7 +27129,7 @@
       </p:sp>
       <p:sp>
         <p:nvSpPr>
-          <p:cNvPr id="10" name="Rectangle 9"/>
+          <p:cNvPr id="9" name="Rectangle 8"/>
           <p:cNvSpPr/>
           <p:nvPr/>
         </p:nvSpPr>
@@ -28206,7 +27172,7 @@
       </p:sp>
       <p:sp>
         <p:nvSpPr>
-          <p:cNvPr id="11" name="TextBox 10"/>
+          <p:cNvPr id="10" name="TextBox 9"/>
           <p:cNvSpPr txBox="1"/>
           <p:nvPr/>
         </p:nvSpPr>
@@ -28239,7 +27205,7 @@
       </p:sp>
       <p:sp>
         <p:nvSpPr>
-          <p:cNvPr id="12" name="TextBox 11"/>
+          <p:cNvPr id="11" name="TextBox 10"/>
           <p:cNvSpPr txBox="1"/>
           <p:nvPr/>
         </p:nvSpPr>
@@ -28272,7 +27238,7 @@
       </p:sp>
       <p:sp>
         <p:nvSpPr>
-          <p:cNvPr id="13" name="TextBox 12"/>
+          <p:cNvPr id="12" name="TextBox 11"/>
           <p:cNvSpPr txBox="1"/>
           <p:nvPr/>
         </p:nvSpPr>
@@ -28305,7 +27271,7 @@
       </p:sp>
       <p:sp>
         <p:nvSpPr>
-          <p:cNvPr id="14" name="TextBox 13"/>
+          <p:cNvPr id="13" name="TextBox 12"/>
           <p:cNvSpPr txBox="1"/>
           <p:nvPr/>
         </p:nvSpPr>
@@ -28417,14 +27383,14 @@
                 </a:solidFill>
                 <a:latin typeface="Calibri"/>
               </a:rPr>
-              <a:t>•   C'est dans ce cadre que s'inscrit le stage.</a:t>
-            </a:r>
-          </a:p>
-        </p:txBody>
-      </p:sp>
-      <p:sp>
-        <p:nvSpPr>
-          <p:cNvPr id="15" name="Rounded Rectangle 14"/>
+              <a:t>•   Le stage se déroule à la DAAG, sur l'organisation des concours de recrutement.</a:t>
+            </a:r>
+          </a:p>
+        </p:txBody>
+      </p:sp>
+      <p:sp>
+        <p:nvSpPr>
+          <p:cNvPr id="14" name="Rounded Rectangle 13"/>
           <p:cNvSpPr/>
           <p:nvPr/>
         </p:nvSpPr>
@@ -28439,10 +27405,12 @@
             </a:avLst>
           </a:prstGeom>
           <a:solidFill>
-            <a:srgbClr val="000000"/>
+            <a:srgbClr val="FFFFFF"/>
           </a:solidFill>
-          <a:ln>
-            <a:noFill/>
+          <a:ln w="9525">
+            <a:solidFill>
+              <a:srgbClr val="D1D5DB"/>
+            </a:solidFill>
           </a:ln>
         </p:spPr>
         <p:style>
@@ -28469,7 +27437,7 @@
       </p:sp>
       <p:pic>
         <p:nvPicPr>
-          <p:cNvPr id="16" name="Picture 15" descr="mef-logo.png"/>
+          <p:cNvPr id="15" name="Picture 14" descr="mef-logo.png"/>
           <p:cNvPicPr>
             <a:picLocks noChangeAspect="1"/>
           </p:cNvPicPr>
@@ -28483,8 +27451,8 @@
         </p:blipFill>
         <p:spPr>
           <a:xfrm>
-            <a:off x="7680960" y="1536192"/>
-            <a:ext cx="3886200" cy="1582564"/>
+            <a:off x="7680960" y="1599529"/>
+            <a:ext cx="3886200" cy="1500957"/>
           </a:xfrm>
           <a:prstGeom prst="rect">
             <a:avLst/>
@@ -28493,7 +27461,7 @@
       </p:pic>
       <p:sp>
         <p:nvSpPr>
-          <p:cNvPr id="17" name="Rounded Rectangle 16"/>
+          <p:cNvPr id="16" name="Rounded Rectangle 15"/>
           <p:cNvSpPr/>
           <p:nvPr/>
         </p:nvSpPr>
@@ -28540,7 +27508,7 @@
       </p:sp>
       <p:sp>
         <p:nvSpPr>
-          <p:cNvPr id="18" name="TextBox 17"/>
+          <p:cNvPr id="17" name="TextBox 16"/>
           <p:cNvSpPr txBox="1"/>
           <p:nvPr/>
         </p:nvSpPr>
@@ -28573,7 +27541,7 @@
       </p:sp>
       <p:sp>
         <p:nvSpPr>
-          <p:cNvPr id="19" name="TextBox 18"/>
+          <p:cNvPr id="18" name="TextBox 17"/>
           <p:cNvSpPr txBox="1"/>
           <p:nvPr/>
         </p:nvSpPr>
@@ -28606,7 +27574,7 @@
       </p:sp>
       <p:sp>
         <p:nvSpPr>
-          <p:cNvPr id="20" name="Rounded Rectangle 19"/>
+          <p:cNvPr id="19" name="Rounded Rectangle 18"/>
           <p:cNvSpPr/>
           <p:nvPr/>
         </p:nvSpPr>
@@ -28653,7 +27621,7 @@
       </p:sp>
       <p:sp>
         <p:nvSpPr>
-          <p:cNvPr id="21" name="TextBox 20"/>
+          <p:cNvPr id="20" name="TextBox 19"/>
           <p:cNvSpPr txBox="1"/>
           <p:nvPr/>
         </p:nvSpPr>
@@ -28686,7 +27654,7 @@
       </p:sp>
       <p:sp>
         <p:nvSpPr>
-          <p:cNvPr id="22" name="TextBox 21"/>
+          <p:cNvPr id="21" name="TextBox 20"/>
           <p:cNvSpPr txBox="1"/>
           <p:nvPr/>
         </p:nvSpPr>
@@ -28719,7 +27687,7 @@
       </p:sp>
       <p:sp>
         <p:nvSpPr>
-          <p:cNvPr id="23" name="Rounded Rectangle 22"/>
+          <p:cNvPr id="22" name="Rounded Rectangle 21"/>
           <p:cNvSpPr/>
           <p:nvPr/>
         </p:nvSpPr>
@@ -28766,7 +27734,7 @@
       </p:sp>
       <p:sp>
         <p:nvSpPr>
-          <p:cNvPr id="24" name="TextBox 23"/>
+          <p:cNvPr id="23" name="TextBox 22"/>
           <p:cNvSpPr txBox="1"/>
           <p:nvPr/>
         </p:nvSpPr>
@@ -28799,7 +27767,7 @@
       </p:sp>
       <p:sp>
         <p:nvSpPr>
-          <p:cNvPr id="25" name="TextBox 24"/>
+          <p:cNvPr id="24" name="TextBox 23"/>
           <p:cNvSpPr txBox="1"/>
           <p:nvPr/>
         </p:nvSpPr>
@@ -29001,54 +27969,9 @@
           </a:prstGeom>
         </p:spPr>
       </p:pic>
-      <p:sp>
-        <p:nvSpPr>
-          <p:cNvPr id="6" name="Rounded Rectangle 5"/>
-          <p:cNvSpPr/>
-          <p:nvPr/>
-        </p:nvSpPr>
-        <p:spPr>
-          <a:xfrm>
-            <a:off x="10684931" y="109728"/>
-            <a:ext cx="1195868" cy="530352"/>
-          </a:xfrm>
-          <a:prstGeom prst="roundRect">
-            <a:avLst>
-              <a:gd name="adj" fmla="val 8000"/>
-            </a:avLst>
-          </a:prstGeom>
-          <a:solidFill>
-            <a:srgbClr val="000000"/>
-          </a:solidFill>
-          <a:ln>
-            <a:noFill/>
-          </a:ln>
-        </p:spPr>
-        <p:style>
-          <a:lnRef idx="1">
-            <a:schemeClr val="accent1"/>
-          </a:lnRef>
-          <a:fillRef idx="3">
-            <a:schemeClr val="accent1"/>
-          </a:fillRef>
-          <a:effectRef idx="2">
-            <a:schemeClr val="accent1"/>
-          </a:effectRef>
-          <a:fontRef idx="minor">
-            <a:schemeClr val="lt1"/>
-          </a:fontRef>
-        </p:style>
-        <p:txBody>
-          <a:bodyPr rtlCol="0" anchor="ctr"/>
-          <a:lstStyle/>
-          <a:p>
-            <a:pPr algn="ctr"/>
-          </a:p>
-        </p:txBody>
-      </p:sp>
       <p:pic>
         <p:nvPicPr>
-          <p:cNvPr id="7" name="Picture 6" descr="mef-logo.png"/>
+          <p:cNvPr id="6" name="Picture 5" descr="mef-logo.png"/>
           <p:cNvPicPr>
             <a:picLocks noChangeAspect="1"/>
           </p:cNvPicPr>
@@ -29062,8 +27985,8 @@
         </p:blipFill>
         <p:spPr>
           <a:xfrm>
-            <a:off x="10758083" y="146304"/>
-            <a:ext cx="1122717" cy="457200"/>
+            <a:off x="10613115" y="128016"/>
+            <a:ext cx="1231108" cy="475488"/>
           </a:xfrm>
           <a:prstGeom prst="rect">
             <a:avLst/>
@@ -29072,7 +27995,7 @@
       </p:pic>
       <p:sp>
         <p:nvSpPr>
-          <p:cNvPr id="8" name="TextBox 7"/>
+          <p:cNvPr id="7" name="TextBox 6"/>
           <p:cNvSpPr txBox="1"/>
           <p:nvPr/>
         </p:nvSpPr>
@@ -29098,14 +28021,14 @@
                 </a:solidFill>
                 <a:latin typeface="Calibri"/>
               </a:rPr>
-              <a:t>Partie 2  ·  Contexte et problématique</a:t>
-            </a:r>
-          </a:p>
-        </p:txBody>
-      </p:sp>
-      <p:sp>
-        <p:nvSpPr>
-          <p:cNvPr id="9" name="TextBox 8"/>
+              <a:t>Partie 1  ·  Contexte et problématique</a:t>
+            </a:r>
+          </a:p>
+        </p:txBody>
+      </p:sp>
+      <p:sp>
+        <p:nvSpPr>
+          <p:cNvPr id="8" name="TextBox 7"/>
           <p:cNvSpPr txBox="1"/>
           <p:nvPr/>
         </p:nvSpPr>
@@ -29138,7 +28061,7 @@
       </p:sp>
       <p:sp>
         <p:nvSpPr>
-          <p:cNvPr id="10" name="Rectangle 9"/>
+          <p:cNvPr id="9" name="Rectangle 8"/>
           <p:cNvSpPr/>
           <p:nvPr/>
         </p:nvSpPr>
@@ -29181,7 +28104,7 @@
       </p:sp>
       <p:sp>
         <p:nvSpPr>
-          <p:cNvPr id="11" name="TextBox 10"/>
+          <p:cNvPr id="10" name="TextBox 9"/>
           <p:cNvSpPr txBox="1"/>
           <p:nvPr/>
         </p:nvSpPr>
@@ -29214,7 +28137,7 @@
       </p:sp>
       <p:sp>
         <p:nvSpPr>
-          <p:cNvPr id="12" name="TextBox 11"/>
+          <p:cNvPr id="11" name="TextBox 10"/>
           <p:cNvSpPr txBox="1"/>
           <p:nvPr/>
         </p:nvSpPr>
@@ -29247,7 +28170,7 @@
       </p:sp>
       <p:sp>
         <p:nvSpPr>
-          <p:cNvPr id="13" name="TextBox 12"/>
+          <p:cNvPr id="12" name="TextBox 11"/>
           <p:cNvSpPr txBox="1"/>
           <p:nvPr/>
         </p:nvSpPr>
@@ -29280,7 +28203,7 @@
       </p:sp>
       <p:sp>
         <p:nvSpPr>
-          <p:cNvPr id="14" name="Rounded Rectangle 13"/>
+          <p:cNvPr id="13" name="Rounded Rectangle 12"/>
           <p:cNvSpPr/>
           <p:nvPr/>
         </p:nvSpPr>
@@ -29327,7 +28250,7 @@
       </p:sp>
       <p:sp>
         <p:nvSpPr>
-          <p:cNvPr id="15" name="Oval 14"/>
+          <p:cNvPr id="14" name="Oval 13"/>
           <p:cNvSpPr/>
           <p:nvPr/>
         </p:nvSpPr>
@@ -29370,7 +28293,7 @@
       </p:sp>
       <p:sp>
         <p:nvSpPr>
-          <p:cNvPr id="16" name="TextBox 15"/>
+          <p:cNvPr id="15" name="TextBox 14"/>
           <p:cNvSpPr txBox="1"/>
           <p:nvPr/>
         </p:nvSpPr>
@@ -29403,7 +28326,7 @@
       </p:sp>
       <p:sp>
         <p:nvSpPr>
-          <p:cNvPr id="17" name="TextBox 16"/>
+          <p:cNvPr id="16" name="TextBox 15"/>
           <p:cNvSpPr txBox="1"/>
           <p:nvPr/>
         </p:nvSpPr>
@@ -29436,7 +28359,7 @@
       </p:sp>
       <p:sp>
         <p:nvSpPr>
-          <p:cNvPr id="18" name="TextBox 17"/>
+          <p:cNvPr id="17" name="TextBox 16"/>
           <p:cNvSpPr txBox="1"/>
           <p:nvPr/>
         </p:nvSpPr>
@@ -29469,7 +28392,7 @@
       </p:sp>
       <p:sp>
         <p:nvSpPr>
-          <p:cNvPr id="19" name="Rounded Rectangle 18"/>
+          <p:cNvPr id="18" name="Rounded Rectangle 17"/>
           <p:cNvSpPr/>
           <p:nvPr/>
         </p:nvSpPr>
@@ -29516,7 +28439,7 @@
       </p:sp>
       <p:sp>
         <p:nvSpPr>
-          <p:cNvPr id="20" name="Oval 19"/>
+          <p:cNvPr id="19" name="Oval 18"/>
           <p:cNvSpPr/>
           <p:nvPr/>
         </p:nvSpPr>
@@ -29559,7 +28482,7 @@
       </p:sp>
       <p:sp>
         <p:nvSpPr>
-          <p:cNvPr id="21" name="TextBox 20"/>
+          <p:cNvPr id="20" name="TextBox 19"/>
           <p:cNvSpPr txBox="1"/>
           <p:nvPr/>
         </p:nvSpPr>
@@ -29592,7 +28515,7 @@
       </p:sp>
       <p:sp>
         <p:nvSpPr>
-          <p:cNvPr id="22" name="TextBox 21"/>
+          <p:cNvPr id="21" name="TextBox 20"/>
           <p:cNvSpPr txBox="1"/>
           <p:nvPr/>
         </p:nvSpPr>
@@ -29625,7 +28548,7 @@
       </p:sp>
       <p:sp>
         <p:nvSpPr>
-          <p:cNvPr id="23" name="TextBox 22"/>
+          <p:cNvPr id="22" name="TextBox 21"/>
           <p:cNvSpPr txBox="1"/>
           <p:nvPr/>
         </p:nvSpPr>
@@ -29658,7 +28581,7 @@
       </p:sp>
       <p:sp>
         <p:nvSpPr>
-          <p:cNvPr id="24" name="Rounded Rectangle 23"/>
+          <p:cNvPr id="23" name="Rounded Rectangle 22"/>
           <p:cNvSpPr/>
           <p:nvPr/>
         </p:nvSpPr>
@@ -29705,7 +28628,7 @@
       </p:sp>
       <p:sp>
         <p:nvSpPr>
-          <p:cNvPr id="25" name="Oval 24"/>
+          <p:cNvPr id="24" name="Oval 23"/>
           <p:cNvSpPr/>
           <p:nvPr/>
         </p:nvSpPr>
@@ -29748,7 +28671,7 @@
       </p:sp>
       <p:sp>
         <p:nvSpPr>
-          <p:cNvPr id="26" name="TextBox 25"/>
+          <p:cNvPr id="25" name="TextBox 24"/>
           <p:cNvSpPr txBox="1"/>
           <p:nvPr/>
         </p:nvSpPr>
@@ -29781,7 +28704,7 @@
       </p:sp>
       <p:sp>
         <p:nvSpPr>
-          <p:cNvPr id="27" name="TextBox 26"/>
+          <p:cNvPr id="26" name="TextBox 25"/>
           <p:cNvSpPr txBox="1"/>
           <p:nvPr/>
         </p:nvSpPr>
@@ -29814,7 +28737,7 @@
       </p:sp>
       <p:sp>
         <p:nvSpPr>
-          <p:cNvPr id="28" name="TextBox 27"/>
+          <p:cNvPr id="27" name="TextBox 26"/>
           <p:cNvSpPr txBox="1"/>
           <p:nvPr/>
         </p:nvSpPr>
@@ -29847,7 +28770,7 @@
       </p:sp>
       <p:sp>
         <p:nvSpPr>
-          <p:cNvPr id="29" name="Rounded Rectangle 28"/>
+          <p:cNvPr id="28" name="Rounded Rectangle 27"/>
           <p:cNvSpPr/>
           <p:nvPr/>
         </p:nvSpPr>
@@ -29892,7 +28815,7 @@
       </p:sp>
       <p:sp>
         <p:nvSpPr>
-          <p:cNvPr id="30" name="TextBox 29"/>
+          <p:cNvPr id="29" name="TextBox 28"/>
           <p:cNvSpPr txBox="1"/>
           <p:nvPr/>
         </p:nvSpPr>
@@ -29914,7 +28837,7 @@
             <a:r>
               <a:rPr sz="1600" b="1" i="0">
                 <a:solidFill>
-                  <a:srgbClr val="008591"/>
+                  <a:srgbClr val="99DDD6"/>
                 </a:solidFill>
                 <a:latin typeface="Calibri"/>
               </a:rPr>
@@ -29925,7 +28848,7 @@
       </p:sp>
       <p:sp>
         <p:nvSpPr>
-          <p:cNvPr id="31" name="TextBox 30"/>
+          <p:cNvPr id="30" name="TextBox 29"/>
           <p:cNvSpPr txBox="1"/>
           <p:nvPr/>
         </p:nvSpPr>
@@ -30127,54 +29050,9 @@
           </a:prstGeom>
         </p:spPr>
       </p:pic>
-      <p:sp>
-        <p:nvSpPr>
-          <p:cNvPr id="6" name="Rounded Rectangle 5"/>
-          <p:cNvSpPr/>
-          <p:nvPr/>
-        </p:nvSpPr>
-        <p:spPr>
-          <a:xfrm>
-            <a:off x="10684931" y="109728"/>
-            <a:ext cx="1195868" cy="530352"/>
-          </a:xfrm>
-          <a:prstGeom prst="roundRect">
-            <a:avLst>
-              <a:gd name="adj" fmla="val 8000"/>
-            </a:avLst>
-          </a:prstGeom>
-          <a:solidFill>
-            <a:srgbClr val="000000"/>
-          </a:solidFill>
-          <a:ln>
-            <a:noFill/>
-          </a:ln>
-        </p:spPr>
-        <p:style>
-          <a:lnRef idx="1">
-            <a:schemeClr val="accent1"/>
-          </a:lnRef>
-          <a:fillRef idx="3">
-            <a:schemeClr val="accent1"/>
-          </a:fillRef>
-          <a:effectRef idx="2">
-            <a:schemeClr val="accent1"/>
-          </a:effectRef>
-          <a:fontRef idx="minor">
-            <a:schemeClr val="lt1"/>
-          </a:fontRef>
-        </p:style>
-        <p:txBody>
-          <a:bodyPr rtlCol="0" anchor="ctr"/>
-          <a:lstStyle/>
-          <a:p>
-            <a:pPr algn="ctr"/>
-          </a:p>
-        </p:txBody>
-      </p:sp>
       <p:pic>
         <p:nvPicPr>
-          <p:cNvPr id="7" name="Picture 6" descr="mef-logo.png"/>
+          <p:cNvPr id="6" name="Picture 5" descr="mef-logo.png"/>
           <p:cNvPicPr>
             <a:picLocks noChangeAspect="1"/>
           </p:cNvPicPr>
@@ -30188,8 +29066,8 @@
         </p:blipFill>
         <p:spPr>
           <a:xfrm>
-            <a:off x="10758083" y="146304"/>
-            <a:ext cx="1122717" cy="457200"/>
+            <a:off x="10613115" y="128016"/>
+            <a:ext cx="1231108" cy="475488"/>
           </a:xfrm>
           <a:prstGeom prst="rect">
             <a:avLst/>
@@ -30198,7 +29076,7 @@
       </p:pic>
       <p:sp>
         <p:nvSpPr>
-          <p:cNvPr id="8" name="TextBox 7"/>
+          <p:cNvPr id="7" name="TextBox 6"/>
           <p:cNvSpPr txBox="1"/>
           <p:nvPr/>
         </p:nvSpPr>
@@ -30224,14 +29102,14 @@
                 </a:solidFill>
                 <a:latin typeface="Calibri"/>
               </a:rPr>
-              <a:t>Partie 2  ·  Contexte et problématique</a:t>
-            </a:r>
-          </a:p>
-        </p:txBody>
-      </p:sp>
-      <p:sp>
-        <p:nvSpPr>
-          <p:cNvPr id="9" name="TextBox 8"/>
+              <a:t>Partie 1  ·  Contexte et problématique</a:t>
+            </a:r>
+          </a:p>
+        </p:txBody>
+      </p:sp>
+      <p:sp>
+        <p:nvSpPr>
+          <p:cNvPr id="8" name="TextBox 7"/>
           <p:cNvSpPr txBox="1"/>
           <p:nvPr/>
         </p:nvSpPr>
@@ -30264,7 +29142,7 @@
       </p:sp>
       <p:sp>
         <p:nvSpPr>
-          <p:cNvPr id="10" name="Rectangle 9"/>
+          <p:cNvPr id="9" name="Rectangle 8"/>
           <p:cNvSpPr/>
           <p:nvPr/>
         </p:nvSpPr>
@@ -30307,7 +29185,7 @@
       </p:sp>
       <p:sp>
         <p:nvSpPr>
-          <p:cNvPr id="11" name="TextBox 10"/>
+          <p:cNvPr id="10" name="TextBox 9"/>
           <p:cNvSpPr txBox="1"/>
           <p:nvPr/>
         </p:nvSpPr>
@@ -30340,7 +29218,7 @@
       </p:sp>
       <p:sp>
         <p:nvSpPr>
-          <p:cNvPr id="12" name="TextBox 11"/>
+          <p:cNvPr id="11" name="TextBox 10"/>
           <p:cNvSpPr txBox="1"/>
           <p:nvPr/>
         </p:nvSpPr>
@@ -30373,7 +29251,7 @@
       </p:sp>
       <p:sp>
         <p:nvSpPr>
-          <p:cNvPr id="13" name="TextBox 12"/>
+          <p:cNvPr id="12" name="TextBox 11"/>
           <p:cNvSpPr txBox="1"/>
           <p:nvPr/>
         </p:nvSpPr>
@@ -30406,7 +29284,7 @@
       </p:sp>
       <p:sp>
         <p:nvSpPr>
-          <p:cNvPr id="14" name="Rounded Rectangle 13"/>
+          <p:cNvPr id="13" name="Rounded Rectangle 12"/>
           <p:cNvSpPr/>
           <p:nvPr/>
         </p:nvSpPr>
@@ -30453,7 +29331,7 @@
       </p:sp>
       <p:sp>
         <p:nvSpPr>
-          <p:cNvPr id="15" name="Rounded Rectangle 14"/>
+          <p:cNvPr id="14" name="Rounded Rectangle 13"/>
           <p:cNvSpPr/>
           <p:nvPr/>
         </p:nvSpPr>
@@ -30496,7 +29374,7 @@
       </p:sp>
       <p:sp>
         <p:nvSpPr>
-          <p:cNvPr id="16" name="TextBox 15"/>
+          <p:cNvPr id="15" name="TextBox 14"/>
           <p:cNvSpPr txBox="1"/>
           <p:nvPr/>
         </p:nvSpPr>
@@ -30529,7 +29407,7 @@
       </p:sp>
       <p:sp>
         <p:nvSpPr>
-          <p:cNvPr id="17" name="TextBox 16"/>
+          <p:cNvPr id="16" name="TextBox 15"/>
           <p:cNvSpPr txBox="1"/>
           <p:nvPr/>
         </p:nvSpPr>
@@ -30562,7 +29440,7 @@
       </p:sp>
       <p:sp>
         <p:nvSpPr>
-          <p:cNvPr id="18" name="Rounded Rectangle 17"/>
+          <p:cNvPr id="17" name="Rounded Rectangle 16"/>
           <p:cNvSpPr/>
           <p:nvPr/>
         </p:nvSpPr>
@@ -30609,7 +29487,7 @@
       </p:sp>
       <p:sp>
         <p:nvSpPr>
-          <p:cNvPr id="19" name="Rounded Rectangle 18"/>
+          <p:cNvPr id="18" name="Rounded Rectangle 17"/>
           <p:cNvSpPr/>
           <p:nvPr/>
         </p:nvSpPr>
@@ -30652,7 +29530,7 @@
       </p:sp>
       <p:sp>
         <p:nvSpPr>
-          <p:cNvPr id="20" name="TextBox 19"/>
+          <p:cNvPr id="19" name="TextBox 18"/>
           <p:cNvSpPr txBox="1"/>
           <p:nvPr/>
         </p:nvSpPr>
@@ -30685,7 +29563,7 @@
       </p:sp>
       <p:sp>
         <p:nvSpPr>
-          <p:cNvPr id="21" name="TextBox 20"/>
+          <p:cNvPr id="20" name="TextBox 19"/>
           <p:cNvSpPr txBox="1"/>
           <p:nvPr/>
         </p:nvSpPr>
@@ -30718,7 +29596,7 @@
       </p:sp>
       <p:sp>
         <p:nvSpPr>
-          <p:cNvPr id="22" name="Rounded Rectangle 21"/>
+          <p:cNvPr id="21" name="Rounded Rectangle 20"/>
           <p:cNvSpPr/>
           <p:nvPr/>
         </p:nvSpPr>
@@ -30765,7 +29643,7 @@
       </p:sp>
       <p:sp>
         <p:nvSpPr>
-          <p:cNvPr id="23" name="Rounded Rectangle 22"/>
+          <p:cNvPr id="22" name="Rounded Rectangle 21"/>
           <p:cNvSpPr/>
           <p:nvPr/>
         </p:nvSpPr>
@@ -30808,7 +29686,7 @@
       </p:sp>
       <p:sp>
         <p:nvSpPr>
-          <p:cNvPr id="24" name="TextBox 23"/>
+          <p:cNvPr id="23" name="TextBox 22"/>
           <p:cNvSpPr txBox="1"/>
           <p:nvPr/>
         </p:nvSpPr>
@@ -30841,7 +29719,7 @@
       </p:sp>
       <p:sp>
         <p:nvSpPr>
-          <p:cNvPr id="25" name="TextBox 24"/>
+          <p:cNvPr id="24" name="TextBox 23"/>
           <p:cNvSpPr txBox="1"/>
           <p:nvPr/>
         </p:nvSpPr>
@@ -30874,7 +29752,7 @@
       </p:sp>
       <p:sp>
         <p:nvSpPr>
-          <p:cNvPr id="26" name="Rounded Rectangle 25"/>
+          <p:cNvPr id="25" name="Rounded Rectangle 24"/>
           <p:cNvSpPr/>
           <p:nvPr/>
         </p:nvSpPr>
@@ -30921,7 +29799,7 @@
       </p:sp>
       <p:sp>
         <p:nvSpPr>
-          <p:cNvPr id="27" name="Rounded Rectangle 26"/>
+          <p:cNvPr id="26" name="Rounded Rectangle 25"/>
           <p:cNvSpPr/>
           <p:nvPr/>
         </p:nvSpPr>
@@ -30964,7 +29842,7 @@
       </p:sp>
       <p:sp>
         <p:nvSpPr>
-          <p:cNvPr id="28" name="TextBox 27"/>
+          <p:cNvPr id="27" name="TextBox 26"/>
           <p:cNvSpPr txBox="1"/>
           <p:nvPr/>
         </p:nvSpPr>
@@ -30997,7 +29875,7 @@
       </p:sp>
       <p:sp>
         <p:nvSpPr>
-          <p:cNvPr id="29" name="TextBox 28"/>
+          <p:cNvPr id="28" name="TextBox 27"/>
           <p:cNvSpPr txBox="1"/>
           <p:nvPr/>
         </p:nvSpPr>
@@ -31199,54 +30077,9 @@
           </a:prstGeom>
         </p:spPr>
       </p:pic>
-      <p:sp>
-        <p:nvSpPr>
-          <p:cNvPr id="6" name="Rounded Rectangle 5"/>
-          <p:cNvSpPr/>
-          <p:nvPr/>
-        </p:nvSpPr>
-        <p:spPr>
-          <a:xfrm>
-            <a:off x="10684931" y="109728"/>
-            <a:ext cx="1195868" cy="530352"/>
-          </a:xfrm>
-          <a:prstGeom prst="roundRect">
-            <a:avLst>
-              <a:gd name="adj" fmla="val 8000"/>
-            </a:avLst>
-          </a:prstGeom>
-          <a:solidFill>
-            <a:srgbClr val="000000"/>
-          </a:solidFill>
-          <a:ln>
-            <a:noFill/>
-          </a:ln>
-        </p:spPr>
-        <p:style>
-          <a:lnRef idx="1">
-            <a:schemeClr val="accent1"/>
-          </a:lnRef>
-          <a:fillRef idx="3">
-            <a:schemeClr val="accent1"/>
-          </a:fillRef>
-          <a:effectRef idx="2">
-            <a:schemeClr val="accent1"/>
-          </a:effectRef>
-          <a:fontRef idx="minor">
-            <a:schemeClr val="lt1"/>
-          </a:fontRef>
-        </p:style>
-        <p:txBody>
-          <a:bodyPr rtlCol="0" anchor="ctr"/>
-          <a:lstStyle/>
-          <a:p>
-            <a:pPr algn="ctr"/>
-          </a:p>
-        </p:txBody>
-      </p:sp>
       <p:pic>
         <p:nvPicPr>
-          <p:cNvPr id="7" name="Picture 6" descr="mef-logo.png"/>
+          <p:cNvPr id="6" name="Picture 5" descr="mef-logo.png"/>
           <p:cNvPicPr>
             <a:picLocks noChangeAspect="1"/>
           </p:cNvPicPr>
@@ -31260,8 +30093,8 @@
         </p:blipFill>
         <p:spPr>
           <a:xfrm>
-            <a:off x="10758083" y="146304"/>
-            <a:ext cx="1122717" cy="457200"/>
+            <a:off x="10613115" y="128016"/>
+            <a:ext cx="1231108" cy="475488"/>
           </a:xfrm>
           <a:prstGeom prst="rect">
             <a:avLst/>
@@ -31270,7 +30103,7 @@
       </p:pic>
       <p:sp>
         <p:nvSpPr>
-          <p:cNvPr id="8" name="TextBox 7"/>
+          <p:cNvPr id="7" name="TextBox 6"/>
           <p:cNvSpPr txBox="1"/>
           <p:nvPr/>
         </p:nvSpPr>
@@ -31296,14 +30129,14 @@
                 </a:solidFill>
                 <a:latin typeface="Calibri"/>
               </a:rPr>
-              <a:t>Partie 2  ·  Contexte et problématique</a:t>
-            </a:r>
-          </a:p>
-        </p:txBody>
-      </p:sp>
-      <p:sp>
-        <p:nvSpPr>
-          <p:cNvPr id="9" name="TextBox 8"/>
+              <a:t>Partie 1  ·  Contexte et problématique</a:t>
+            </a:r>
+          </a:p>
+        </p:txBody>
+      </p:sp>
+      <p:sp>
+        <p:nvSpPr>
+          <p:cNvPr id="8" name="TextBox 7"/>
           <p:cNvSpPr txBox="1"/>
           <p:nvPr/>
         </p:nvSpPr>
@@ -31336,7 +30169,7 @@
       </p:sp>
       <p:sp>
         <p:nvSpPr>
-          <p:cNvPr id="10" name="Rectangle 9"/>
+          <p:cNvPr id="9" name="Rectangle 8"/>
           <p:cNvSpPr/>
           <p:nvPr/>
         </p:nvSpPr>
@@ -31379,7 +30212,7 @@
       </p:sp>
       <p:sp>
         <p:nvSpPr>
-          <p:cNvPr id="11" name="TextBox 10"/>
+          <p:cNvPr id="10" name="TextBox 9"/>
           <p:cNvSpPr txBox="1"/>
           <p:nvPr/>
         </p:nvSpPr>
@@ -31412,7 +30245,7 @@
       </p:sp>
       <p:sp>
         <p:nvSpPr>
-          <p:cNvPr id="12" name="TextBox 11"/>
+          <p:cNvPr id="11" name="TextBox 10"/>
           <p:cNvSpPr txBox="1"/>
           <p:nvPr/>
         </p:nvSpPr>
@@ -31445,7 +30278,7 @@
       </p:sp>
       <p:sp>
         <p:nvSpPr>
-          <p:cNvPr id="13" name="Rounded Rectangle 12"/>
+          <p:cNvPr id="12" name="Rounded Rectangle 11"/>
           <p:cNvSpPr/>
           <p:nvPr/>
         </p:nvSpPr>
@@ -31490,7 +30323,7 @@
       </p:sp>
       <p:sp>
         <p:nvSpPr>
-          <p:cNvPr id="14" name="TextBox 13"/>
+          <p:cNvPr id="13" name="TextBox 12"/>
           <p:cNvSpPr txBox="1"/>
           <p:nvPr/>
         </p:nvSpPr>
@@ -31523,7 +30356,7 @@
       </p:sp>
       <p:sp>
         <p:nvSpPr>
-          <p:cNvPr id="15" name="Rounded Rectangle 14"/>
+          <p:cNvPr id="14" name="Rounded Rectangle 13"/>
           <p:cNvSpPr/>
           <p:nvPr/>
         </p:nvSpPr>
@@ -31570,7 +30403,7 @@
       </p:sp>
       <p:sp>
         <p:nvSpPr>
-          <p:cNvPr id="16" name="Oval 15"/>
+          <p:cNvPr id="15" name="Oval 14"/>
           <p:cNvSpPr/>
           <p:nvPr/>
         </p:nvSpPr>
@@ -31613,7 +30446,7 @@
       </p:sp>
       <p:sp>
         <p:nvSpPr>
-          <p:cNvPr id="17" name="TextBox 16"/>
+          <p:cNvPr id="16" name="TextBox 15"/>
           <p:cNvSpPr txBox="1"/>
           <p:nvPr/>
         </p:nvSpPr>
@@ -31646,7 +30479,7 @@
       </p:sp>
       <p:sp>
         <p:nvSpPr>
-          <p:cNvPr id="18" name="TextBox 17"/>
+          <p:cNvPr id="17" name="TextBox 16"/>
           <p:cNvSpPr txBox="1"/>
           <p:nvPr/>
         </p:nvSpPr>
@@ -31679,7 +30512,7 @@
       </p:sp>
       <p:sp>
         <p:nvSpPr>
-          <p:cNvPr id="19" name="TextBox 18"/>
+          <p:cNvPr id="18" name="TextBox 17"/>
           <p:cNvSpPr txBox="1"/>
           <p:nvPr/>
         </p:nvSpPr>
@@ -31712,7 +30545,7 @@
       </p:sp>
       <p:sp>
         <p:nvSpPr>
-          <p:cNvPr id="20" name="Rounded Rectangle 19"/>
+          <p:cNvPr id="19" name="Rounded Rectangle 18"/>
           <p:cNvSpPr/>
           <p:nvPr/>
         </p:nvSpPr>
@@ -31759,7 +30592,7 @@
       </p:sp>
       <p:sp>
         <p:nvSpPr>
-          <p:cNvPr id="21" name="Oval 20"/>
+          <p:cNvPr id="20" name="Oval 19"/>
           <p:cNvSpPr/>
           <p:nvPr/>
         </p:nvSpPr>
@@ -31802,7 +30635,7 @@
       </p:sp>
       <p:sp>
         <p:nvSpPr>
-          <p:cNvPr id="22" name="TextBox 21"/>
+          <p:cNvPr id="21" name="TextBox 20"/>
           <p:cNvSpPr txBox="1"/>
           <p:nvPr/>
         </p:nvSpPr>
@@ -31835,7 +30668,7 @@
       </p:sp>
       <p:sp>
         <p:nvSpPr>
-          <p:cNvPr id="23" name="TextBox 22"/>
+          <p:cNvPr id="22" name="TextBox 21"/>
           <p:cNvSpPr txBox="1"/>
           <p:nvPr/>
         </p:nvSpPr>
@@ -31868,7 +30701,7 @@
       </p:sp>
       <p:sp>
         <p:nvSpPr>
-          <p:cNvPr id="24" name="TextBox 23"/>
+          <p:cNvPr id="23" name="TextBox 22"/>
           <p:cNvSpPr txBox="1"/>
           <p:nvPr/>
         </p:nvSpPr>
@@ -31901,7 +30734,7 @@
       </p:sp>
       <p:sp>
         <p:nvSpPr>
-          <p:cNvPr id="25" name="Rounded Rectangle 24"/>
+          <p:cNvPr id="24" name="Rounded Rectangle 23"/>
           <p:cNvSpPr/>
           <p:nvPr/>
         </p:nvSpPr>
@@ -31948,7 +30781,7 @@
       </p:sp>
       <p:sp>
         <p:nvSpPr>
-          <p:cNvPr id="26" name="Oval 25"/>
+          <p:cNvPr id="25" name="Oval 24"/>
           <p:cNvSpPr/>
           <p:nvPr/>
         </p:nvSpPr>
@@ -31991,7 +30824,7 @@
       </p:sp>
       <p:sp>
         <p:nvSpPr>
-          <p:cNvPr id="27" name="TextBox 26"/>
+          <p:cNvPr id="26" name="TextBox 25"/>
           <p:cNvSpPr txBox="1"/>
           <p:nvPr/>
         </p:nvSpPr>
@@ -32024,7 +30857,7 @@
       </p:sp>
       <p:sp>
         <p:nvSpPr>
-          <p:cNvPr id="28" name="TextBox 27"/>
+          <p:cNvPr id="27" name="TextBox 26"/>
           <p:cNvSpPr txBox="1"/>
           <p:nvPr/>
         </p:nvSpPr>
@@ -32057,7 +30890,7 @@
       </p:sp>
       <p:sp>
         <p:nvSpPr>
-          <p:cNvPr id="29" name="TextBox 28"/>
+          <p:cNvPr id="28" name="TextBox 27"/>
           <p:cNvSpPr txBox="1"/>
           <p:nvPr/>
         </p:nvSpPr>
@@ -32090,7 +30923,7 @@
       </p:sp>
       <p:sp>
         <p:nvSpPr>
-          <p:cNvPr id="30" name="Rounded Rectangle 29"/>
+          <p:cNvPr id="29" name="Rounded Rectangle 28"/>
           <p:cNvSpPr/>
           <p:nvPr/>
         </p:nvSpPr>
@@ -32137,7 +30970,7 @@
       </p:sp>
       <p:sp>
         <p:nvSpPr>
-          <p:cNvPr id="31" name="Oval 30"/>
+          <p:cNvPr id="30" name="Oval 29"/>
           <p:cNvSpPr/>
           <p:nvPr/>
         </p:nvSpPr>
@@ -32180,7 +31013,7 @@
       </p:sp>
       <p:sp>
         <p:nvSpPr>
-          <p:cNvPr id="32" name="TextBox 31"/>
+          <p:cNvPr id="31" name="TextBox 30"/>
           <p:cNvSpPr txBox="1"/>
           <p:nvPr/>
         </p:nvSpPr>
@@ -32213,7 +31046,7 @@
       </p:sp>
       <p:sp>
         <p:nvSpPr>
-          <p:cNvPr id="33" name="TextBox 32"/>
+          <p:cNvPr id="32" name="TextBox 31"/>
           <p:cNvSpPr txBox="1"/>
           <p:nvPr/>
         </p:nvSpPr>
@@ -32246,7 +31079,7 @@
       </p:sp>
       <p:sp>
         <p:nvSpPr>
-          <p:cNvPr id="34" name="TextBox 33"/>
+          <p:cNvPr id="33" name="TextBox 32"/>
           <p:cNvSpPr txBox="1"/>
           <p:nvPr/>
         </p:nvSpPr>
@@ -32448,54 +31281,9 @@
           </a:prstGeom>
         </p:spPr>
       </p:pic>
-      <p:sp>
-        <p:nvSpPr>
-          <p:cNvPr id="6" name="Rounded Rectangle 5"/>
-          <p:cNvSpPr/>
-          <p:nvPr/>
-        </p:nvSpPr>
-        <p:spPr>
-          <a:xfrm>
-            <a:off x="10684931" y="109728"/>
-            <a:ext cx="1195868" cy="530352"/>
-          </a:xfrm>
-          <a:prstGeom prst="roundRect">
-            <a:avLst>
-              <a:gd name="adj" fmla="val 8000"/>
-            </a:avLst>
-          </a:prstGeom>
-          <a:solidFill>
-            <a:srgbClr val="000000"/>
-          </a:solidFill>
-          <a:ln>
-            <a:noFill/>
-          </a:ln>
-        </p:spPr>
-        <p:style>
-          <a:lnRef idx="1">
-            <a:schemeClr val="accent1"/>
-          </a:lnRef>
-          <a:fillRef idx="3">
-            <a:schemeClr val="accent1"/>
-          </a:fillRef>
-          <a:effectRef idx="2">
-            <a:schemeClr val="accent1"/>
-          </a:effectRef>
-          <a:fontRef idx="minor">
-            <a:schemeClr val="lt1"/>
-          </a:fontRef>
-        </p:style>
-        <p:txBody>
-          <a:bodyPr rtlCol="0" anchor="ctr"/>
-          <a:lstStyle/>
-          <a:p>
-            <a:pPr algn="ctr"/>
-          </a:p>
-        </p:txBody>
-      </p:sp>
       <p:pic>
         <p:nvPicPr>
-          <p:cNvPr id="7" name="Picture 6" descr="mef-logo.png"/>
+          <p:cNvPr id="6" name="Picture 5" descr="mef-logo.png"/>
           <p:cNvPicPr>
             <a:picLocks noChangeAspect="1"/>
           </p:cNvPicPr>
@@ -32509,8 +31297,8 @@
         </p:blipFill>
         <p:spPr>
           <a:xfrm>
-            <a:off x="10758083" y="146304"/>
-            <a:ext cx="1122717" cy="457200"/>
+            <a:off x="10613115" y="128016"/>
+            <a:ext cx="1231108" cy="475488"/>
           </a:xfrm>
           <a:prstGeom prst="rect">
             <a:avLst/>
@@ -32519,7 +31307,7 @@
       </p:pic>
       <p:sp>
         <p:nvSpPr>
-          <p:cNvPr id="8" name="TextBox 7"/>
+          <p:cNvPr id="7" name="TextBox 6"/>
           <p:cNvSpPr txBox="1"/>
           <p:nvPr/>
         </p:nvSpPr>
@@ -32545,14 +31333,14 @@
                 </a:solidFill>
                 <a:latin typeface="Calibri"/>
               </a:rPr>
-              <a:t>Partie 3  ·  Objectifs et démarche</a:t>
-            </a:r>
-          </a:p>
-        </p:txBody>
-      </p:sp>
-      <p:sp>
-        <p:nvSpPr>
-          <p:cNvPr id="9" name="TextBox 8"/>
+              <a:t>Partie 2  ·  Objectifs et démarche</a:t>
+            </a:r>
+          </a:p>
+        </p:txBody>
+      </p:sp>
+      <p:sp>
+        <p:nvSpPr>
+          <p:cNvPr id="8" name="TextBox 7"/>
           <p:cNvSpPr txBox="1"/>
           <p:nvPr/>
         </p:nvSpPr>
@@ -32585,7 +31373,7 @@
       </p:sp>
       <p:sp>
         <p:nvSpPr>
-          <p:cNvPr id="10" name="Rectangle 9"/>
+          <p:cNvPr id="9" name="Rectangle 8"/>
           <p:cNvSpPr/>
           <p:nvPr/>
         </p:nvSpPr>
@@ -32628,7 +31416,7 @@
       </p:sp>
       <p:sp>
         <p:nvSpPr>
-          <p:cNvPr id="11" name="TextBox 10"/>
+          <p:cNvPr id="10" name="TextBox 9"/>
           <p:cNvSpPr txBox="1"/>
           <p:nvPr/>
         </p:nvSpPr>
@@ -32661,7 +31449,7 @@
       </p:sp>
       <p:sp>
         <p:nvSpPr>
-          <p:cNvPr id="12" name="TextBox 11"/>
+          <p:cNvPr id="11" name="TextBox 10"/>
           <p:cNvSpPr txBox="1"/>
           <p:nvPr/>
         </p:nvSpPr>
@@ -32694,7 +31482,7 @@
       </p:sp>
       <p:sp>
         <p:nvSpPr>
-          <p:cNvPr id="13" name="Rounded Rectangle 12"/>
+          <p:cNvPr id="12" name="Rounded Rectangle 11"/>
           <p:cNvSpPr/>
           <p:nvPr/>
         </p:nvSpPr>
@@ -32739,7 +31527,7 @@
       </p:sp>
       <p:sp>
         <p:nvSpPr>
-          <p:cNvPr id="14" name="TextBox 13"/>
+          <p:cNvPr id="13" name="TextBox 12"/>
           <p:cNvSpPr txBox="1"/>
           <p:nvPr/>
         </p:nvSpPr>
@@ -32761,7 +31549,7 @@
             <a:r>
               <a:rPr sz="1200" b="1" i="0">
                 <a:solidFill>
-                  <a:srgbClr val="008591"/>
+                  <a:srgbClr val="99DDD6"/>
                 </a:solidFill>
                 <a:latin typeface="Calibri"/>
               </a:rPr>
@@ -32772,7 +31560,7 @@
       </p:sp>
       <p:sp>
         <p:nvSpPr>
-          <p:cNvPr id="15" name="TextBox 14"/>
+          <p:cNvPr id="14" name="TextBox 13"/>
           <p:cNvSpPr txBox="1"/>
           <p:nvPr/>
         </p:nvSpPr>
@@ -32805,7 +31593,7 @@
       </p:sp>
       <p:sp>
         <p:nvSpPr>
-          <p:cNvPr id="16" name="Rounded Rectangle 15"/>
+          <p:cNvPr id="15" name="Rounded Rectangle 14"/>
           <p:cNvSpPr/>
           <p:nvPr/>
         </p:nvSpPr>
@@ -32852,7 +31640,7 @@
       </p:sp>
       <p:sp>
         <p:nvSpPr>
-          <p:cNvPr id="17" name="Oval 16"/>
+          <p:cNvPr id="16" name="Oval 15"/>
           <p:cNvSpPr/>
           <p:nvPr/>
         </p:nvSpPr>
@@ -32895,7 +31683,7 @@
       </p:sp>
       <p:sp>
         <p:nvSpPr>
-          <p:cNvPr id="18" name="TextBox 17"/>
+          <p:cNvPr id="17" name="TextBox 16"/>
           <p:cNvSpPr txBox="1"/>
           <p:nvPr/>
         </p:nvSpPr>
@@ -32928,7 +31716,7 @@
       </p:sp>
       <p:sp>
         <p:nvSpPr>
-          <p:cNvPr id="19" name="TextBox 18"/>
+          <p:cNvPr id="18" name="TextBox 17"/>
           <p:cNvSpPr txBox="1"/>
           <p:nvPr/>
         </p:nvSpPr>
@@ -32961,7 +31749,7 @@
       </p:sp>
       <p:sp>
         <p:nvSpPr>
-          <p:cNvPr id="20" name="TextBox 19"/>
+          <p:cNvPr id="19" name="TextBox 18"/>
           <p:cNvSpPr txBox="1"/>
           <p:nvPr/>
         </p:nvSpPr>
@@ -32994,7 +31782,7 @@
       </p:sp>
       <p:sp>
         <p:nvSpPr>
-          <p:cNvPr id="21" name="Rounded Rectangle 20"/>
+          <p:cNvPr id="20" name="Rounded Rectangle 19"/>
           <p:cNvSpPr/>
           <p:nvPr/>
         </p:nvSpPr>
@@ -33041,7 +31829,7 @@
       </p:sp>
       <p:sp>
         <p:nvSpPr>
-          <p:cNvPr id="22" name="Oval 21"/>
+          <p:cNvPr id="21" name="Oval 20"/>
           <p:cNvSpPr/>
           <p:nvPr/>
         </p:nvSpPr>
@@ -33084,7 +31872,7 @@
       </p:sp>
       <p:sp>
         <p:nvSpPr>
-          <p:cNvPr id="23" name="TextBox 22"/>
+          <p:cNvPr id="22" name="TextBox 21"/>
           <p:cNvSpPr txBox="1"/>
           <p:nvPr/>
         </p:nvSpPr>
@@ -33117,7 +31905,7 @@
       </p:sp>
       <p:sp>
         <p:nvSpPr>
-          <p:cNvPr id="24" name="TextBox 23"/>
+          <p:cNvPr id="23" name="TextBox 22"/>
           <p:cNvSpPr txBox="1"/>
           <p:nvPr/>
         </p:nvSpPr>
@@ -33150,7 +31938,7 @@
       </p:sp>
       <p:sp>
         <p:nvSpPr>
-          <p:cNvPr id="25" name="TextBox 24"/>
+          <p:cNvPr id="24" name="TextBox 23"/>
           <p:cNvSpPr txBox="1"/>
           <p:nvPr/>
         </p:nvSpPr>
@@ -33183,7 +31971,7 @@
       </p:sp>
       <p:sp>
         <p:nvSpPr>
-          <p:cNvPr id="26" name="Rounded Rectangle 25"/>
+          <p:cNvPr id="25" name="Rounded Rectangle 24"/>
           <p:cNvSpPr/>
           <p:nvPr/>
         </p:nvSpPr>
@@ -33230,7 +32018,7 @@
       </p:sp>
       <p:sp>
         <p:nvSpPr>
-          <p:cNvPr id="27" name="Oval 26"/>
+          <p:cNvPr id="26" name="Oval 25"/>
           <p:cNvSpPr/>
           <p:nvPr/>
         </p:nvSpPr>
@@ -33273,7 +32061,7 @@
       </p:sp>
       <p:sp>
         <p:nvSpPr>
-          <p:cNvPr id="28" name="TextBox 27"/>
+          <p:cNvPr id="27" name="TextBox 26"/>
           <p:cNvSpPr txBox="1"/>
           <p:nvPr/>
         </p:nvSpPr>
@@ -33306,7 +32094,7 @@
       </p:sp>
       <p:sp>
         <p:nvSpPr>
-          <p:cNvPr id="29" name="TextBox 28"/>
+          <p:cNvPr id="28" name="TextBox 27"/>
           <p:cNvSpPr txBox="1"/>
           <p:nvPr/>
         </p:nvSpPr>
@@ -33339,7 +32127,7 @@
       </p:sp>
       <p:sp>
         <p:nvSpPr>
-          <p:cNvPr id="30" name="TextBox 29"/>
+          <p:cNvPr id="29" name="TextBox 28"/>
           <p:cNvSpPr txBox="1"/>
           <p:nvPr/>
         </p:nvSpPr>
@@ -33372,7 +32160,7 @@
       </p:sp>
       <p:sp>
         <p:nvSpPr>
-          <p:cNvPr id="31" name="Rounded Rectangle 30"/>
+          <p:cNvPr id="30" name="Rounded Rectangle 29"/>
           <p:cNvSpPr/>
           <p:nvPr/>
         </p:nvSpPr>
@@ -33419,7 +32207,7 @@
       </p:sp>
       <p:sp>
         <p:nvSpPr>
-          <p:cNvPr id="32" name="Oval 31"/>
+          <p:cNvPr id="31" name="Oval 30"/>
           <p:cNvSpPr/>
           <p:nvPr/>
         </p:nvSpPr>
@@ -33462,7 +32250,7 @@
       </p:sp>
       <p:sp>
         <p:nvSpPr>
-          <p:cNvPr id="33" name="TextBox 32"/>
+          <p:cNvPr id="32" name="TextBox 31"/>
           <p:cNvSpPr txBox="1"/>
           <p:nvPr/>
         </p:nvSpPr>
@@ -33495,7 +32283,7 @@
       </p:sp>
       <p:sp>
         <p:nvSpPr>
-          <p:cNvPr id="34" name="TextBox 33"/>
+          <p:cNvPr id="33" name="TextBox 32"/>
           <p:cNvSpPr txBox="1"/>
           <p:nvPr/>
         </p:nvSpPr>
@@ -33528,7 +32316,7 @@
       </p:sp>
       <p:sp>
         <p:nvSpPr>
-          <p:cNvPr id="35" name="TextBox 34"/>
+          <p:cNvPr id="34" name="TextBox 33"/>
           <p:cNvSpPr txBox="1"/>
           <p:nvPr/>
         </p:nvSpPr>
@@ -33561,14 +32349,14 @@
       </p:sp>
       <p:sp>
         <p:nvSpPr>
-          <p:cNvPr id="36" name="Rounded Rectangle 35"/>
+          <p:cNvPr id="35" name="Rounded Rectangle 34"/>
           <p:cNvSpPr/>
           <p:nvPr/>
         </p:nvSpPr>
         <p:spPr>
           <a:xfrm>
-            <a:off x="438912" y="4498848"/>
-            <a:ext cx="3611880" cy="1783080"/>
+            <a:off x="1892808" y="4498848"/>
+            <a:ext cx="2761488" cy="1783080"/>
           </a:xfrm>
           <a:prstGeom prst="roundRect">
             <a:avLst>
@@ -33608,13 +32396,13 @@
       </p:sp>
       <p:sp>
         <p:nvSpPr>
-          <p:cNvPr id="37" name="Oval 36"/>
+          <p:cNvPr id="36" name="Oval 35"/>
           <p:cNvSpPr/>
           <p:nvPr/>
         </p:nvSpPr>
         <p:spPr>
           <a:xfrm>
-            <a:off x="585216" y="4645152"/>
+            <a:off x="2039112" y="4645152"/>
             <a:ext cx="365760" cy="365760"/>
           </a:xfrm>
           <a:prstGeom prst="ellipse">
@@ -33651,33 +32439,66 @@
       </p:sp>
       <p:sp>
         <p:nvSpPr>
+          <p:cNvPr id="37" name="TextBox 36"/>
+          <p:cNvSpPr txBox="1"/>
+          <p:nvPr/>
+        </p:nvSpPr>
+        <p:spPr>
+          <a:xfrm>
+            <a:off x="2039112" y="4645152"/>
+            <a:ext cx="365760" cy="365760"/>
+          </a:xfrm>
+          <a:prstGeom prst="rect">
+            <a:avLst/>
+          </a:prstGeom>
+          <a:noFill/>
+        </p:spPr>
+        <p:txBody>
+          <a:bodyPr wrap="square" anchor="ctr"/>
+          <a:lstStyle/>
+          <a:p>
+            <a:pPr algn="ctr"/>
+            <a:r>
+              <a:rPr sz="1100" b="1" i="0">
+                <a:solidFill>
+                  <a:srgbClr val="FFFFFF"/>
+                </a:solidFill>
+                <a:latin typeface="Calibri"/>
+              </a:rPr>
+              <a:t>05</a:t>
+            </a:r>
+          </a:p>
+        </p:txBody>
+      </p:sp>
+      <p:sp>
+        <p:nvSpPr>
           <p:cNvPr id="38" name="TextBox 37"/>
           <p:cNvSpPr txBox="1"/>
           <p:nvPr/>
         </p:nvSpPr>
         <p:spPr>
           <a:xfrm>
-            <a:off x="585216" y="4645152"/>
-            <a:ext cx="365760" cy="365760"/>
-          </a:xfrm>
-          <a:prstGeom prst="rect">
-            <a:avLst/>
-          </a:prstGeom>
-          <a:noFill/>
-        </p:spPr>
-        <p:txBody>
-          <a:bodyPr wrap="square" anchor="ctr"/>
-          <a:lstStyle/>
-          <a:p>
-            <a:pPr algn="ctr"/>
-            <a:r>
-              <a:rPr sz="1100" b="1" i="0">
-                <a:solidFill>
-                  <a:srgbClr val="FFFFFF"/>
-                </a:solidFill>
-                <a:latin typeface="Calibri"/>
-              </a:rPr>
-              <a:t>05</a:t>
+            <a:off x="2478024" y="4663440"/>
+            <a:ext cx="1984248" cy="347472"/>
+          </a:xfrm>
+          <a:prstGeom prst="rect">
+            <a:avLst/>
+          </a:prstGeom>
+          <a:noFill/>
+        </p:spPr>
+        <p:txBody>
+          <a:bodyPr wrap="square" anchor="t"/>
+          <a:lstStyle/>
+          <a:p>
+            <a:pPr algn="l"/>
+            <a:r>
+              <a:rPr sz="1500" b="1" i="0">
+                <a:solidFill>
+                  <a:srgbClr val="0B2545"/>
+                </a:solidFill>
+                <a:latin typeface="Calibri"/>
+              </a:rPr>
+              <a:t>Pilotage</a:t>
             </a:r>
           </a:p>
         </p:txBody>
@@ -33690,8 +32511,8 @@
         </p:nvSpPr>
         <p:spPr>
           <a:xfrm>
-            <a:off x="1024128" y="4663440"/>
-            <a:ext cx="2834640" cy="347472"/>
+            <a:off x="2057400" y="5120640"/>
+            <a:ext cx="2432304" cy="1024128"/>
           </a:xfrm>
           <a:prstGeom prst="rect">
             <a:avLst/>
@@ -33704,60 +32525,27 @@
           <a:p>
             <a:pPr algn="l"/>
             <a:r>
-              <a:rPr sz="1500" b="1" i="0">
-                <a:solidFill>
-                  <a:srgbClr val="0B2545"/>
-                </a:solidFill>
-                <a:latin typeface="Calibri"/>
-              </a:rPr>
-              <a:t>Pilotage</a:t>
-            </a:r>
-          </a:p>
-        </p:txBody>
-      </p:sp>
-      <p:sp>
-        <p:nvSpPr>
-          <p:cNvPr id="40" name="TextBox 39"/>
-          <p:cNvSpPr txBox="1"/>
-          <p:nvPr/>
-        </p:nvSpPr>
-        <p:spPr>
-          <a:xfrm>
-            <a:off x="603504" y="5120640"/>
-            <a:ext cx="3282696" cy="1024128"/>
-          </a:xfrm>
-          <a:prstGeom prst="rect">
-            <a:avLst/>
-          </a:prstGeom>
-          <a:noFill/>
-        </p:spPr>
-        <p:txBody>
-          <a:bodyPr wrap="square" anchor="t"/>
-          <a:lstStyle/>
-          <a:p>
-            <a:pPr algn="l"/>
-            <a:r>
               <a:rPr sz="1300" b="0" i="0">
                 <a:solidFill>
                   <a:srgbClr val="1F2937"/>
                 </a:solidFill>
                 <a:latin typeface="Calibri"/>
               </a:rPr>
-              <a:t>Tableau de bord : effectifs, remplissage, dernière run, historique.</a:t>
-            </a:r>
-          </a:p>
-        </p:txBody>
-      </p:sp>
-      <p:sp>
-        <p:nvSpPr>
-          <p:cNvPr id="41" name="Rounded Rectangle 40"/>
+              <a:t>Tableau de bord : effectifs, remplissage, dernière exécution, historique.</a:t>
+            </a:r>
+          </a:p>
+        </p:txBody>
+      </p:sp>
+      <p:sp>
+        <p:nvSpPr>
+          <p:cNvPr id="40" name="Rounded Rectangle 39"/>
           <p:cNvSpPr/>
           <p:nvPr/>
         </p:nvSpPr>
         <p:spPr>
           <a:xfrm>
-            <a:off x="4279392" y="4498848"/>
-            <a:ext cx="3611880" cy="1783080"/>
+            <a:off x="4800600" y="4498848"/>
+            <a:ext cx="2761488" cy="1783080"/>
           </a:xfrm>
           <a:prstGeom prst="roundRect">
             <a:avLst>
@@ -33797,13 +32585,13 @@
       </p:sp>
       <p:sp>
         <p:nvSpPr>
-          <p:cNvPr id="42" name="Oval 41"/>
+          <p:cNvPr id="41" name="Oval 40"/>
           <p:cNvSpPr/>
           <p:nvPr/>
         </p:nvSpPr>
         <p:spPr>
           <a:xfrm>
-            <a:off x="4425696" y="4645152"/>
+            <a:off x="4946904" y="4645152"/>
             <a:ext cx="365760" cy="365760"/>
           </a:xfrm>
           <a:prstGeom prst="ellipse">
@@ -33840,33 +32628,66 @@
       </p:sp>
       <p:sp>
         <p:nvSpPr>
+          <p:cNvPr id="42" name="TextBox 41"/>
+          <p:cNvSpPr txBox="1"/>
+          <p:nvPr/>
+        </p:nvSpPr>
+        <p:spPr>
+          <a:xfrm>
+            <a:off x="4946904" y="4645152"/>
+            <a:ext cx="365760" cy="365760"/>
+          </a:xfrm>
+          <a:prstGeom prst="rect">
+            <a:avLst/>
+          </a:prstGeom>
+          <a:noFill/>
+        </p:spPr>
+        <p:txBody>
+          <a:bodyPr wrap="square" anchor="ctr"/>
+          <a:lstStyle/>
+          <a:p>
+            <a:pPr algn="ctr"/>
+            <a:r>
+              <a:rPr sz="1100" b="1" i="0">
+                <a:solidFill>
+                  <a:srgbClr val="FFFFFF"/>
+                </a:solidFill>
+                <a:latin typeface="Calibri"/>
+              </a:rPr>
+              <a:t>06</a:t>
+            </a:r>
+          </a:p>
+        </p:txBody>
+      </p:sp>
+      <p:sp>
+        <p:nvSpPr>
           <p:cNvPr id="43" name="TextBox 42"/>
           <p:cNvSpPr txBox="1"/>
           <p:nvPr/>
         </p:nvSpPr>
         <p:spPr>
           <a:xfrm>
-            <a:off x="4425696" y="4645152"/>
-            <a:ext cx="365760" cy="365760"/>
-          </a:xfrm>
-          <a:prstGeom prst="rect">
-            <a:avLst/>
-          </a:prstGeom>
-          <a:noFill/>
-        </p:spPr>
-        <p:txBody>
-          <a:bodyPr wrap="square" anchor="ctr"/>
-          <a:lstStyle/>
-          <a:p>
-            <a:pPr algn="ctr"/>
-            <a:r>
-              <a:rPr sz="1100" b="1" i="0">
-                <a:solidFill>
-                  <a:srgbClr val="FFFFFF"/>
-                </a:solidFill>
-                <a:latin typeface="Calibri"/>
-              </a:rPr>
-              <a:t>06</a:t>
+            <a:off x="5385816" y="4663440"/>
+            <a:ext cx="1984248" cy="347472"/>
+          </a:xfrm>
+          <a:prstGeom prst="rect">
+            <a:avLst/>
+          </a:prstGeom>
+          <a:noFill/>
+        </p:spPr>
+        <p:txBody>
+          <a:bodyPr wrap="square" anchor="t"/>
+          <a:lstStyle/>
+          <a:p>
+            <a:pPr algn="l"/>
+            <a:r>
+              <a:rPr sz="1500" b="1" i="0">
+                <a:solidFill>
+                  <a:srgbClr val="0B2545"/>
+                </a:solidFill>
+                <a:latin typeface="Calibri"/>
+              </a:rPr>
+              <a:t>Sécurité</a:t>
             </a:r>
           </a:p>
         </p:txBody>
@@ -33879,8 +32700,8 @@
         </p:nvSpPr>
         <p:spPr>
           <a:xfrm>
-            <a:off x="4864608" y="4663440"/>
-            <a:ext cx="2834640" cy="347472"/>
+            <a:off x="4965192" y="5120640"/>
+            <a:ext cx="2432304" cy="1024128"/>
           </a:xfrm>
           <a:prstGeom prst="rect">
             <a:avLst/>
@@ -33893,39 +32714,6 @@
           <a:p>
             <a:pPr algn="l"/>
             <a:r>
-              <a:rPr sz="1500" b="1" i="0">
-                <a:solidFill>
-                  <a:srgbClr val="0B2545"/>
-                </a:solidFill>
-                <a:latin typeface="Calibri"/>
-              </a:rPr>
-              <a:t>Sécurité</a:t>
-            </a:r>
-          </a:p>
-        </p:txBody>
-      </p:sp>
-      <p:sp>
-        <p:nvSpPr>
-          <p:cNvPr id="45" name="TextBox 44"/>
-          <p:cNvSpPr txBox="1"/>
-          <p:nvPr/>
-        </p:nvSpPr>
-        <p:spPr>
-          <a:xfrm>
-            <a:off x="4443984" y="5120640"/>
-            <a:ext cx="3282696" cy="1024128"/>
-          </a:xfrm>
-          <a:prstGeom prst="rect">
-            <a:avLst/>
-          </a:prstGeom>
-          <a:noFill/>
-        </p:spPr>
-        <p:txBody>
-          <a:bodyPr wrap="square" anchor="t"/>
-          <a:lstStyle/>
-          <a:p>
-            <a:pPr algn="l"/>
-            <a:r>
               <a:rPr sz="1300" b="0" i="0">
                 <a:solidFill>
                   <a:srgbClr val="1F2937"/>
@@ -33939,14 +32727,14 @@
       </p:sp>
       <p:sp>
         <p:nvSpPr>
-          <p:cNvPr id="46" name="Rounded Rectangle 45"/>
+          <p:cNvPr id="45" name="Rounded Rectangle 44"/>
           <p:cNvSpPr/>
           <p:nvPr/>
         </p:nvSpPr>
         <p:spPr>
           <a:xfrm>
-            <a:off x="8119872" y="4498848"/>
-            <a:ext cx="3611880" cy="1783080"/>
+            <a:off x="7708392" y="4498848"/>
+            <a:ext cx="2761488" cy="1783080"/>
           </a:xfrm>
           <a:prstGeom prst="roundRect">
             <a:avLst>
@@ -33986,13 +32774,13 @@
       </p:sp>
       <p:sp>
         <p:nvSpPr>
-          <p:cNvPr id="47" name="Oval 46"/>
+          <p:cNvPr id="46" name="Oval 45"/>
           <p:cNvSpPr/>
           <p:nvPr/>
         </p:nvSpPr>
         <p:spPr>
           <a:xfrm>
-            <a:off x="8266176" y="4645152"/>
+            <a:off x="7854696" y="4645152"/>
             <a:ext cx="365760" cy="365760"/>
           </a:xfrm>
           <a:prstGeom prst="ellipse">
@@ -34029,33 +32817,66 @@
       </p:sp>
       <p:sp>
         <p:nvSpPr>
+          <p:cNvPr id="47" name="TextBox 46"/>
+          <p:cNvSpPr txBox="1"/>
+          <p:nvPr/>
+        </p:nvSpPr>
+        <p:spPr>
+          <a:xfrm>
+            <a:off x="7854696" y="4645152"/>
+            <a:ext cx="365760" cy="365760"/>
+          </a:xfrm>
+          <a:prstGeom prst="rect">
+            <a:avLst/>
+          </a:prstGeom>
+          <a:noFill/>
+        </p:spPr>
+        <p:txBody>
+          <a:bodyPr wrap="square" anchor="ctr"/>
+          <a:lstStyle/>
+          <a:p>
+            <a:pPr algn="ctr"/>
+            <a:r>
+              <a:rPr sz="1100" b="1" i="0">
+                <a:solidFill>
+                  <a:srgbClr val="FFFFFF"/>
+                </a:solidFill>
+                <a:latin typeface="Calibri"/>
+              </a:rPr>
+              <a:t>07</a:t>
+            </a:r>
+          </a:p>
+        </p:txBody>
+      </p:sp>
+      <p:sp>
+        <p:nvSpPr>
           <p:cNvPr id="48" name="TextBox 47"/>
           <p:cNvSpPr txBox="1"/>
           <p:nvPr/>
         </p:nvSpPr>
         <p:spPr>
           <a:xfrm>
-            <a:off x="8266176" y="4645152"/>
-            <a:ext cx="365760" cy="365760"/>
-          </a:xfrm>
-          <a:prstGeom prst="rect">
-            <a:avLst/>
-          </a:prstGeom>
-          <a:noFill/>
-        </p:spPr>
-        <p:txBody>
-          <a:bodyPr wrap="square" anchor="ctr"/>
-          <a:lstStyle/>
-          <a:p>
-            <a:pPr algn="ctr"/>
-            <a:r>
-              <a:rPr sz="1100" b="1" i="0">
-                <a:solidFill>
-                  <a:srgbClr val="FFFFFF"/>
-                </a:solidFill>
-                <a:latin typeface="Calibri"/>
-              </a:rPr>
-              <a:t>07</a:t>
+            <a:off x="8293608" y="4663440"/>
+            <a:ext cx="1984248" cy="347472"/>
+          </a:xfrm>
+          <a:prstGeom prst="rect">
+            <a:avLst/>
+          </a:prstGeom>
+          <a:noFill/>
+        </p:spPr>
+        <p:txBody>
+          <a:bodyPr wrap="square" anchor="t"/>
+          <a:lstStyle/>
+          <a:p>
+            <a:pPr algn="l"/>
+            <a:r>
+              <a:rPr sz="1500" b="1" i="0">
+                <a:solidFill>
+                  <a:srgbClr val="0B2545"/>
+                </a:solidFill>
+                <a:latin typeface="Calibri"/>
+              </a:rPr>
+              <a:t>Architecture</a:t>
             </a:r>
           </a:p>
         </p:txBody>
@@ -34068,41 +32889,8 @@
         </p:nvSpPr>
         <p:spPr>
           <a:xfrm>
-            <a:off x="8705088" y="4663440"/>
-            <a:ext cx="2834640" cy="347472"/>
-          </a:xfrm>
-          <a:prstGeom prst="rect">
-            <a:avLst/>
-          </a:prstGeom>
-          <a:noFill/>
-        </p:spPr>
-        <p:txBody>
-          <a:bodyPr wrap="square" anchor="t"/>
-          <a:lstStyle/>
-          <a:p>
-            <a:pPr algn="l"/>
-            <a:r>
-              <a:rPr sz="1500" b="1" i="0">
-                <a:solidFill>
-                  <a:srgbClr val="0B2545"/>
-                </a:solidFill>
-                <a:latin typeface="Calibri"/>
-              </a:rPr>
-              <a:t>Architecture</a:t>
-            </a:r>
-          </a:p>
-        </p:txBody>
-      </p:sp>
-      <p:sp>
-        <p:nvSpPr>
-          <p:cNvPr id="50" name="TextBox 49"/>
-          <p:cNvSpPr txBox="1"/>
-          <p:nvPr/>
-        </p:nvSpPr>
-        <p:spPr>
-          <a:xfrm>
-            <a:off x="8284464" y="5120640"/>
-            <a:ext cx="3282696" cy="1024128"/>
+            <a:off x="7872984" y="5120640"/>
+            <a:ext cx="2432304" cy="1024128"/>
           </a:xfrm>
           <a:prstGeom prst="rect">
             <a:avLst/>
@@ -34297,54 +33085,9 @@
           </a:prstGeom>
         </p:spPr>
       </p:pic>
-      <p:sp>
-        <p:nvSpPr>
-          <p:cNvPr id="6" name="Rounded Rectangle 5"/>
-          <p:cNvSpPr/>
-          <p:nvPr/>
-        </p:nvSpPr>
-        <p:spPr>
-          <a:xfrm>
-            <a:off x="10684931" y="109728"/>
-            <a:ext cx="1195868" cy="530352"/>
-          </a:xfrm>
-          <a:prstGeom prst="roundRect">
-            <a:avLst>
-              <a:gd name="adj" fmla="val 8000"/>
-            </a:avLst>
-          </a:prstGeom>
-          <a:solidFill>
-            <a:srgbClr val="000000"/>
-          </a:solidFill>
-          <a:ln>
-            <a:noFill/>
-          </a:ln>
-        </p:spPr>
-        <p:style>
-          <a:lnRef idx="1">
-            <a:schemeClr val="accent1"/>
-          </a:lnRef>
-          <a:fillRef idx="3">
-            <a:schemeClr val="accent1"/>
-          </a:fillRef>
-          <a:effectRef idx="2">
-            <a:schemeClr val="accent1"/>
-          </a:effectRef>
-          <a:fontRef idx="minor">
-            <a:schemeClr val="lt1"/>
-          </a:fontRef>
-        </p:style>
-        <p:txBody>
-          <a:bodyPr rtlCol="0" anchor="ctr"/>
-          <a:lstStyle/>
-          <a:p>
-            <a:pPr algn="ctr"/>
-          </a:p>
-        </p:txBody>
-      </p:sp>
       <p:pic>
         <p:nvPicPr>
-          <p:cNvPr id="7" name="Picture 6" descr="mef-logo.png"/>
+          <p:cNvPr id="6" name="Picture 5" descr="mef-logo.png"/>
           <p:cNvPicPr>
             <a:picLocks noChangeAspect="1"/>
           </p:cNvPicPr>
@@ -34358,8 +33101,8 @@
         </p:blipFill>
         <p:spPr>
           <a:xfrm>
-            <a:off x="10758083" y="146304"/>
-            <a:ext cx="1122717" cy="457200"/>
+            <a:off x="10613115" y="128016"/>
+            <a:ext cx="1231108" cy="475488"/>
           </a:xfrm>
           <a:prstGeom prst="rect">
             <a:avLst/>
@@ -34368,7 +33111,7 @@
       </p:pic>
       <p:sp>
         <p:nvSpPr>
-          <p:cNvPr id="8" name="TextBox 7"/>
+          <p:cNvPr id="7" name="TextBox 6"/>
           <p:cNvSpPr txBox="1"/>
           <p:nvPr/>
         </p:nvSpPr>
@@ -34394,14 +33137,14 @@
                 </a:solidFill>
                 <a:latin typeface="Calibri"/>
               </a:rPr>
-              <a:t>Partie 3  ·  Objectifs et démarche</a:t>
-            </a:r>
-          </a:p>
-        </p:txBody>
-      </p:sp>
-      <p:sp>
-        <p:nvSpPr>
-          <p:cNvPr id="9" name="TextBox 8"/>
+              <a:t>Partie 2  ·  Objectifs et démarche</a:t>
+            </a:r>
+          </a:p>
+        </p:txBody>
+      </p:sp>
+      <p:sp>
+        <p:nvSpPr>
+          <p:cNvPr id="8" name="TextBox 7"/>
           <p:cNvSpPr txBox="1"/>
           <p:nvPr/>
         </p:nvSpPr>
@@ -34434,7 +33177,7 @@
       </p:sp>
       <p:sp>
         <p:nvSpPr>
-          <p:cNvPr id="10" name="Rectangle 9"/>
+          <p:cNvPr id="9" name="Rectangle 8"/>
           <p:cNvSpPr/>
           <p:nvPr/>
         </p:nvSpPr>
@@ -34477,7 +33220,7 @@
       </p:sp>
       <p:sp>
         <p:nvSpPr>
-          <p:cNvPr id="11" name="TextBox 10"/>
+          <p:cNvPr id="10" name="TextBox 9"/>
           <p:cNvSpPr txBox="1"/>
           <p:nvPr/>
         </p:nvSpPr>
@@ -34510,7 +33253,7 @@
       </p:sp>
       <p:sp>
         <p:nvSpPr>
-          <p:cNvPr id="12" name="TextBox 11"/>
+          <p:cNvPr id="11" name="TextBox 10"/>
           <p:cNvSpPr txBox="1"/>
           <p:nvPr/>
         </p:nvSpPr>
@@ -34543,7 +33286,7 @@
       </p:sp>
       <p:sp>
         <p:nvSpPr>
-          <p:cNvPr id="13" name="TextBox 12"/>
+          <p:cNvPr id="12" name="TextBox 11"/>
           <p:cNvSpPr txBox="1"/>
           <p:nvPr/>
         </p:nvSpPr>
@@ -34576,7 +33319,7 @@
       </p:sp>
       <p:sp>
         <p:nvSpPr>
-          <p:cNvPr id="14" name="Rounded Rectangle 13"/>
+          <p:cNvPr id="13" name="Rounded Rectangle 12"/>
           <p:cNvSpPr/>
           <p:nvPr/>
         </p:nvSpPr>
@@ -34623,7 +33366,7 @@
       </p:sp>
       <p:sp>
         <p:nvSpPr>
-          <p:cNvPr id="15" name="Rectangle 14"/>
+          <p:cNvPr id="14" name="Rectangle 13"/>
           <p:cNvSpPr/>
           <p:nvPr/>
         </p:nvSpPr>
@@ -34666,7 +33409,7 @@
       </p:sp>
       <p:sp>
         <p:nvSpPr>
-          <p:cNvPr id="16" name="TextBox 15"/>
+          <p:cNvPr id="15" name="TextBox 14"/>
           <p:cNvSpPr txBox="1"/>
           <p:nvPr/>
         </p:nvSpPr>
@@ -34699,7 +33442,7 @@
       </p:sp>
       <p:sp>
         <p:nvSpPr>
-          <p:cNvPr id="17" name="TextBox 16"/>
+          <p:cNvPr id="16" name="TextBox 15"/>
           <p:cNvSpPr txBox="1"/>
           <p:nvPr/>
         </p:nvSpPr>
@@ -34732,7 +33475,7 @@
       </p:sp>
       <p:sp>
         <p:nvSpPr>
-          <p:cNvPr id="18" name="Right Arrow 17"/>
+          <p:cNvPr id="17" name="Right Arrow 16"/>
           <p:cNvSpPr/>
           <p:nvPr/>
         </p:nvSpPr>
@@ -34775,7 +33518,7 @@
       </p:sp>
       <p:sp>
         <p:nvSpPr>
-          <p:cNvPr id="19" name="Rounded Rectangle 18"/>
+          <p:cNvPr id="18" name="Rounded Rectangle 17"/>
           <p:cNvSpPr/>
           <p:nvPr/>
         </p:nvSpPr>
@@ -34822,7 +33565,7 @@
       </p:sp>
       <p:sp>
         <p:nvSpPr>
-          <p:cNvPr id="20" name="Rectangle 19"/>
+          <p:cNvPr id="19" name="Rectangle 18"/>
           <p:cNvSpPr/>
           <p:nvPr/>
         </p:nvSpPr>
@@ -34865,7 +33608,7 @@
       </p:sp>
       <p:sp>
         <p:nvSpPr>
-          <p:cNvPr id="21" name="TextBox 20"/>
+          <p:cNvPr id="20" name="TextBox 19"/>
           <p:cNvSpPr txBox="1"/>
           <p:nvPr/>
         </p:nvSpPr>
@@ -34898,7 +33641,7 @@
       </p:sp>
       <p:sp>
         <p:nvSpPr>
-          <p:cNvPr id="22" name="TextBox 21"/>
+          <p:cNvPr id="21" name="TextBox 20"/>
           <p:cNvSpPr txBox="1"/>
           <p:nvPr/>
         </p:nvSpPr>
@@ -34931,7 +33674,7 @@
       </p:sp>
       <p:sp>
         <p:nvSpPr>
-          <p:cNvPr id="23" name="Right Arrow 22"/>
+          <p:cNvPr id="22" name="Right Arrow 21"/>
           <p:cNvSpPr/>
           <p:nvPr/>
         </p:nvSpPr>
@@ -34974,7 +33717,7 @@
       </p:sp>
       <p:sp>
         <p:nvSpPr>
-          <p:cNvPr id="24" name="Rounded Rectangle 23"/>
+          <p:cNvPr id="23" name="Rounded Rectangle 22"/>
           <p:cNvSpPr/>
           <p:nvPr/>
         </p:nvSpPr>
@@ -35021,7 +33764,7 @@
       </p:sp>
       <p:sp>
         <p:nvSpPr>
-          <p:cNvPr id="25" name="Rectangle 24"/>
+          <p:cNvPr id="24" name="Rectangle 23"/>
           <p:cNvSpPr/>
           <p:nvPr/>
         </p:nvSpPr>
@@ -35064,7 +33807,7 @@
       </p:sp>
       <p:sp>
         <p:nvSpPr>
-          <p:cNvPr id="26" name="TextBox 25"/>
+          <p:cNvPr id="25" name="TextBox 24"/>
           <p:cNvSpPr txBox="1"/>
           <p:nvPr/>
         </p:nvSpPr>
@@ -35097,7 +33840,7 @@
       </p:sp>
       <p:sp>
         <p:nvSpPr>
-          <p:cNvPr id="27" name="TextBox 26"/>
+          <p:cNvPr id="26" name="TextBox 25"/>
           <p:cNvSpPr txBox="1"/>
           <p:nvPr/>
         </p:nvSpPr>
@@ -35130,7 +33873,7 @@
       </p:sp>
       <p:sp>
         <p:nvSpPr>
-          <p:cNvPr id="28" name="Right Arrow 27"/>
+          <p:cNvPr id="27" name="Right Arrow 26"/>
           <p:cNvSpPr/>
           <p:nvPr/>
         </p:nvSpPr>
@@ -35173,7 +33916,7 @@
       </p:sp>
       <p:sp>
         <p:nvSpPr>
-          <p:cNvPr id="29" name="Rounded Rectangle 28"/>
+          <p:cNvPr id="28" name="Rounded Rectangle 27"/>
           <p:cNvSpPr/>
           <p:nvPr/>
         </p:nvSpPr>
@@ -35220,7 +33963,7 @@
       </p:sp>
       <p:sp>
         <p:nvSpPr>
-          <p:cNvPr id="30" name="Rectangle 29"/>
+          <p:cNvPr id="29" name="Rectangle 28"/>
           <p:cNvSpPr/>
           <p:nvPr/>
         </p:nvSpPr>
@@ -35263,7 +34006,7 @@
       </p:sp>
       <p:sp>
         <p:nvSpPr>
-          <p:cNvPr id="31" name="TextBox 30"/>
+          <p:cNvPr id="30" name="TextBox 29"/>
           <p:cNvSpPr txBox="1"/>
           <p:nvPr/>
         </p:nvSpPr>
@@ -35296,7 +34039,7 @@
       </p:sp>
       <p:sp>
         <p:nvSpPr>
-          <p:cNvPr id="32" name="TextBox 31"/>
+          <p:cNvPr id="31" name="TextBox 30"/>
           <p:cNvSpPr txBox="1"/>
           <p:nvPr/>
         </p:nvSpPr>
@@ -35329,7 +34072,7 @@
       </p:sp>
       <p:sp>
         <p:nvSpPr>
-          <p:cNvPr id="33" name="Rounded Rectangle 32"/>
+          <p:cNvPr id="32" name="Rounded Rectangle 31"/>
           <p:cNvSpPr/>
           <p:nvPr/>
         </p:nvSpPr>
@@ -35374,7 +34117,7 @@
       </p:sp>
       <p:sp>
         <p:nvSpPr>
-          <p:cNvPr id="34" name="TextBox 33"/>
+          <p:cNvPr id="33" name="TextBox 32"/>
           <p:cNvSpPr txBox="1"/>
           <p:nvPr/>
         </p:nvSpPr>
@@ -35396,7 +34139,7 @@
             <a:r>
               <a:rPr sz="1400" b="1" i="0">
                 <a:solidFill>
-                  <a:srgbClr val="008591"/>
+                  <a:srgbClr val="99DDD6"/>
                 </a:solidFill>
                 <a:latin typeface="Calibri"/>
               </a:rPr>
@@ -35407,7 +34150,7 @@
       </p:sp>
       <p:sp>
         <p:nvSpPr>
-          <p:cNvPr id="35" name="TextBox 34"/>
+          <p:cNvPr id="34" name="TextBox 33"/>
           <p:cNvSpPr txBox="1"/>
           <p:nvPr/>
         </p:nvSpPr>
@@ -35433,7 +34176,7 @@
                 </a:solidFill>
                 <a:latin typeface="Calibri"/>
               </a:rPr>
-              <a:t>Moi : analyse, UML, backend, interfaces, répartition, convocations et tests.   ·   Encadrant : définition du besoin, validation de chaque étape, pilotage.   ·   Pas de sprints courts : une porte qualité à la fin de chaque phase.</a:t>
+              <a:t>Étudiant : analyse, UML, backend, interfaces, répartition, convocations et tests.   ·   Encadrant : définition du besoin, validation de chaque étape, pilotage.   ·   Pas de sprints courts : une porte qualité à la fin de chaque phase.</a:t>
             </a:r>
           </a:p>
         </p:txBody>
@@ -35609,54 +34352,9 @@
           </a:prstGeom>
         </p:spPr>
       </p:pic>
-      <p:sp>
-        <p:nvSpPr>
-          <p:cNvPr id="6" name="Rounded Rectangle 5"/>
-          <p:cNvSpPr/>
-          <p:nvPr/>
-        </p:nvSpPr>
-        <p:spPr>
-          <a:xfrm>
-            <a:off x="10684931" y="109728"/>
-            <a:ext cx="1195868" cy="530352"/>
-          </a:xfrm>
-          <a:prstGeom prst="roundRect">
-            <a:avLst>
-              <a:gd name="adj" fmla="val 8000"/>
-            </a:avLst>
-          </a:prstGeom>
-          <a:solidFill>
-            <a:srgbClr val="000000"/>
-          </a:solidFill>
-          <a:ln>
-            <a:noFill/>
-          </a:ln>
-        </p:spPr>
-        <p:style>
-          <a:lnRef idx="1">
-            <a:schemeClr val="accent1"/>
-          </a:lnRef>
-          <a:fillRef idx="3">
-            <a:schemeClr val="accent1"/>
-          </a:fillRef>
-          <a:effectRef idx="2">
-            <a:schemeClr val="accent1"/>
-          </a:effectRef>
-          <a:fontRef idx="minor">
-            <a:schemeClr val="lt1"/>
-          </a:fontRef>
-        </p:style>
-        <p:txBody>
-          <a:bodyPr rtlCol="0" anchor="ctr"/>
-          <a:lstStyle/>
-          <a:p>
-            <a:pPr algn="ctr"/>
-          </a:p>
-        </p:txBody>
-      </p:sp>
       <p:pic>
         <p:nvPicPr>
-          <p:cNvPr id="7" name="Picture 6" descr="mef-logo.png"/>
+          <p:cNvPr id="6" name="Picture 5" descr="mef-logo.png"/>
           <p:cNvPicPr>
             <a:picLocks noChangeAspect="1"/>
           </p:cNvPicPr>
@@ -35670,8 +34368,8 @@
         </p:blipFill>
         <p:spPr>
           <a:xfrm>
-            <a:off x="10758083" y="146304"/>
-            <a:ext cx="1122717" cy="457200"/>
+            <a:off x="10613115" y="128016"/>
+            <a:ext cx="1231108" cy="475488"/>
           </a:xfrm>
           <a:prstGeom prst="rect">
             <a:avLst/>
@@ -35680,7 +34378,7 @@
       </p:pic>
       <p:sp>
         <p:nvSpPr>
-          <p:cNvPr id="8" name="TextBox 7"/>
+          <p:cNvPr id="7" name="TextBox 6"/>
           <p:cNvSpPr txBox="1"/>
           <p:nvPr/>
         </p:nvSpPr>
@@ -35706,14 +34404,14 @@
                 </a:solidFill>
                 <a:latin typeface="Calibri"/>
               </a:rPr>
-              <a:t>Partie 3  ·  Objectifs et démarche</a:t>
-            </a:r>
-          </a:p>
-        </p:txBody>
-      </p:sp>
-      <p:sp>
-        <p:nvSpPr>
-          <p:cNvPr id="9" name="TextBox 8"/>
+              <a:t>Partie 2  ·  Objectifs et démarche</a:t>
+            </a:r>
+          </a:p>
+        </p:txBody>
+      </p:sp>
+      <p:sp>
+        <p:nvSpPr>
+          <p:cNvPr id="8" name="TextBox 7"/>
           <p:cNvSpPr txBox="1"/>
           <p:nvPr/>
         </p:nvSpPr>
@@ -35739,14 +34437,14 @@
                 </a:solidFill>
                 <a:latin typeface="Calibri"/>
               </a:rPr>
-              <a:t>Planification : trois mois de stage</a:t>
-            </a:r>
-          </a:p>
-        </p:txBody>
-      </p:sp>
-      <p:sp>
-        <p:nvSpPr>
-          <p:cNvPr id="10" name="Rectangle 9"/>
+              <a:t>Planification : cinq mois et demi de stage</a:t>
+            </a:r>
+          </a:p>
+        </p:txBody>
+      </p:sp>
+      <p:sp>
+        <p:nvSpPr>
+          <p:cNvPr id="9" name="Rectangle 8"/>
           <p:cNvSpPr/>
           <p:nvPr/>
         </p:nvSpPr>
@@ -35789,7 +34487,7 @@
       </p:sp>
       <p:sp>
         <p:nvSpPr>
-          <p:cNvPr id="11" name="TextBox 10"/>
+          <p:cNvPr id="10" name="TextBox 9"/>
           <p:cNvSpPr txBox="1"/>
           <p:nvPr/>
         </p:nvSpPr>
@@ -35822,7 +34520,7 @@
       </p:sp>
       <p:sp>
         <p:nvSpPr>
-          <p:cNvPr id="12" name="TextBox 11"/>
+          <p:cNvPr id="11" name="TextBox 10"/>
           <p:cNvSpPr txBox="1"/>
           <p:nvPr/>
         </p:nvSpPr>
@@ -35855,7 +34553,7 @@
       </p:sp>
       <p:sp>
         <p:nvSpPr>
-          <p:cNvPr id="13" name="TextBox 12"/>
+          <p:cNvPr id="12" name="TextBox 11"/>
           <p:cNvSpPr txBox="1"/>
           <p:nvPr/>
         </p:nvSpPr>
@@ -35881,14 +34579,14 @@
                 </a:solidFill>
                 <a:latin typeface="Calibri"/>
               </a:rPr>
-              <a:t>Du 6 mars au 6 juin 2026  ·  enchaînement séquentiel validé avec l'encadrant</a:t>
+              <a:t>Du 6 mars au 17 août 2026  ·  enchaînement séquentiel validé avec l'encadrant</a:t>
             </a:r>
           </a:p>
         </p:txBody>
       </p:sp>
       <p:pic>
         <p:nvPicPr>
-          <p:cNvPr id="14" name="Picture 13" descr="gantt.png"/>
+          <p:cNvPr id="13" name="Picture 12" descr="gantt.png"/>
           <p:cNvPicPr>
             <a:picLocks noChangeAspect="1"/>
           </p:cNvPicPr>
@@ -35902,8 +34600,8 @@
         </p:blipFill>
         <p:spPr>
           <a:xfrm>
-            <a:off x="868680" y="1664208"/>
-            <a:ext cx="10424160" cy="4613176"/>
+            <a:off x="438912" y="2042750"/>
+            <a:ext cx="11292840" cy="3979507"/>
           </a:xfrm>
           <a:prstGeom prst="rect">
             <a:avLst/>
